--- a/Final_Makale_Sunum_Sablonu.pptx
+++ b/Final_Makale_Sunum_Sablonu.pptx
@@ -4,6 +4,9 @@
   <p:sldMasterIdLst>
     <p:sldMasterId id="2147483648" r:id="rId1"/>
   </p:sldMasterIdLst>
+  <p:notesMasterIdLst>
+    <p:notesMasterId r:id="rId12"/>
+  </p:notesMasterIdLst>
   <p:sldIdLst>
     <p:sldId id="256" r:id="rId2"/>
     <p:sldId id="257" r:id="rId3"/>
@@ -16,11 +19,8 @@
     <p:sldId id="264" r:id="rId10"/>
     <p:sldId id="265" r:id="rId11"/>
   </p:sldIdLst>
-  <p:notesMasterIdLst>
-    <p:notesMasterId r:id="rId12"/>
-  </p:notesMasterIdLst>
-  <p:sldSz cx="12191695" cy="6858000"/>
-  <p:notesSz cx="6858000" cy="12191695"/>
+  <p:sldSz cx="12192000" cy="6858000"/>
+  <p:notesSz cx="6858000" cy="12192000"/>
   <p:defaultTextStyle>
     <a:lvl1pPr marL="0" algn="l" defTabSz="914400" rtl="0" eaLnBrk="1" latinLnBrk="0" hangingPunct="1">
       <a:defRPr sz="1800" kern="1200">
@@ -113,6 +113,11 @@
       </a:defRPr>
     </a:lvl9pPr>
   </p:defaultTextStyle>
+  <p:extLst>
+    <p:ext uri="{EFAFB233-063F-42B5-8137-9DF3F51BA10A}">
+      <p15:sldGuideLst xmlns:p15="http://schemas.microsoft.com/office/powerpoint/2012/main"/>
+    </p:ext>
+  </p:extLst>
 </p:presentation>
 </file>
 
@@ -138,234 +143,10 @@
           <a:chExt cx="0" cy="0"/>
         </a:xfrm>
       </p:grpSpPr>
-      <p:sp>
-        <p:nvSpPr>
-          <p:cNvPr id="2" name="Header Placeholder 1"/>
-          <p:cNvSpPr>
-            <a:spLocks noGrp="1"/>
-          </p:cNvSpPr>
-          <p:nvPr>
-            <p:ph type="hdr" sz="quarter"/>
-          </p:nvPr>
-        </p:nvSpPr>
-        <p:spPr>
-          <a:xfrm>
-            <a:off x="0" y="0"/>
-            <a:ext cx="2971800" cy="458788"/>
-          </a:xfrm>
-          <a:prstGeom prst="rect">
-            <a:avLst/>
-          </a:prstGeom>
-        </p:spPr>
-        <p:txBody>
-          <a:bodyPr vert="horz" lIns="91440" tIns="45720" rIns="91440" bIns="45720" rtlCol="0"/>
-          <a:lstStyle>
-            <a:lvl1pPr algn="l">
-              <a:defRPr sz="1200"/>
-            </a:lvl1pPr>
-          </a:lstStyle>
-          <a:p>
-            <a:endParaRPr lang="en-US"/>
-          </a:p>
-        </p:txBody>
-      </p:sp>
-      <p:sp>
-        <p:nvSpPr>
-          <p:cNvPr id="3" name="Date Placeholder 2"/>
-          <p:cNvSpPr>
-            <a:spLocks noGrp="1"/>
-          </p:cNvSpPr>
-          <p:nvPr>
-            <p:ph type="dt" idx="1"/>
-          </p:nvPr>
-        </p:nvSpPr>
-        <p:spPr>
-          <a:xfrm>
-            <a:off x="3884613" y="0"/>
-            <a:ext cx="2971800" cy="458788"/>
-          </a:xfrm>
-          <a:prstGeom prst="rect">
-            <a:avLst/>
-          </a:prstGeom>
-        </p:spPr>
-        <p:txBody>
-          <a:bodyPr vert="horz" lIns="91440" tIns="45720" rIns="91440" bIns="45720" rtlCol="0"/>
-          <a:lstStyle>
-            <a:lvl1pPr algn="r">
-              <a:defRPr sz="1200"/>
-            </a:lvl1pPr>
-          </a:lstStyle>
-          <a:p>
-            <a:fld id="{5282F153-3F37-0F45-9E97-73ACFA13230C}" type="datetimeFigureOut">
-              <a:rPr lang="en-US"/>
-              <a:t>7/23/19</a:t>
-            </a:fld>
-            <a:endParaRPr lang="en-US"/>
-          </a:p>
-        </p:txBody>
-      </p:sp>
-      <p:sp>
-        <p:nvSpPr>
-          <p:cNvPr id="4" name="Slide Image Placeholder 3"/>
-          <p:cNvSpPr>
-            <a:spLocks noGrp="1" noRot="1" noChangeAspect="1"/>
-          </p:cNvSpPr>
-          <p:nvPr>
-            <p:ph type="sldImg" idx="2"/>
-          </p:nvPr>
-        </p:nvSpPr>
-        <p:spPr>
-          <a:xfrm>
-            <a:off x="685800" y="1143000"/>
-            <a:ext cx="5486400" cy="3086100"/>
-          </a:xfrm>
-          <a:prstGeom prst="rect">
-            <a:avLst/>
-          </a:prstGeom>
-          <a:noFill/>
-          <a:ln w="12700">
-            <a:solidFill>
-              <a:prstClr val="black"/>
-            </a:solidFill>
-          </a:ln>
-        </p:spPr>
-        <p:txBody>
-          <a:bodyPr vert="horz" lIns="91440" tIns="45720" rIns="91440" bIns="45720" rtlCol="0" anchor="ctr"/>
-          <a:lstStyle/>
-          <a:p>
-            <a:endParaRPr lang="en-US"/>
-          </a:p>
-        </p:txBody>
-      </p:sp>
-      <p:sp>
-        <p:nvSpPr>
-          <p:cNvPr id="5" name="Notes Placeholder 4"/>
-          <p:cNvSpPr>
-            <a:spLocks noGrp="1"/>
-          </p:cNvSpPr>
-          <p:nvPr>
-            <p:ph type="body" sz="quarter" idx="3"/>
-          </p:nvPr>
-        </p:nvSpPr>
-        <p:spPr>
-          <a:xfrm>
-            <a:off x="685800" y="4400550"/>
-            <a:ext cx="5486400" cy="3600450"/>
-          </a:xfrm>
-          <a:prstGeom prst="rect">
-            <a:avLst/>
-          </a:prstGeom>
-        </p:spPr>
-        <p:txBody>
-          <a:bodyPr vert="horz" lIns="91440" tIns="45720" rIns="91440" bIns="45720" rtlCol="0"/>
-          <a:lstStyle/>
-          <a:p>
-            <a:pPr lvl="0"/>
-            <a:r>
-              <a:rPr lang="en-US"/>
-              <a:t>Click to edit Master text styles</a:t>
-            </a:r>
-          </a:p>
-          <a:p>
-            <a:pPr lvl="1"/>
-            <a:r>
-              <a:rPr lang="en-US"/>
-              <a:t>Second level</a:t>
-            </a:r>
-          </a:p>
-          <a:p>
-            <a:pPr lvl="2"/>
-            <a:r>
-              <a:rPr lang="en-US"/>
-              <a:t>Third level</a:t>
-            </a:r>
-          </a:p>
-          <a:p>
-            <a:pPr lvl="3"/>
-            <a:r>
-              <a:rPr lang="en-US"/>
-              <a:t>Fourth level</a:t>
-            </a:r>
-          </a:p>
-          <a:p>
-            <a:pPr lvl="4"/>
-            <a:r>
-              <a:rPr lang="en-US"/>
-              <a:t>Fifth level</a:t>
-            </a:r>
-          </a:p>
-        </p:txBody>
-      </p:sp>
-      <p:sp>
-        <p:nvSpPr>
-          <p:cNvPr id="6" name="Footer Placeholder 5"/>
-          <p:cNvSpPr>
-            <a:spLocks noGrp="1"/>
-          </p:cNvSpPr>
-          <p:nvPr>
-            <p:ph type="ftr" sz="quarter" idx="4"/>
-          </p:nvPr>
-        </p:nvSpPr>
-        <p:spPr>
-          <a:xfrm>
-            <a:off x="0" y="8685213"/>
-            <a:ext cx="2971800" cy="458787"/>
-          </a:xfrm>
-          <a:prstGeom prst="rect">
-            <a:avLst/>
-          </a:prstGeom>
-        </p:spPr>
-        <p:txBody>
-          <a:bodyPr vert="horz" lIns="91440" tIns="45720" rIns="91440" bIns="45720" rtlCol="0" anchor="b"/>
-          <a:lstStyle>
-            <a:lvl1pPr algn="l">
-              <a:defRPr sz="1200"/>
-            </a:lvl1pPr>
-          </a:lstStyle>
-          <a:p>
-            <a:endParaRPr lang="en-US"/>
-          </a:p>
-        </p:txBody>
-      </p:sp>
-      <p:sp>
-        <p:nvSpPr>
-          <p:cNvPr id="7" name="Slide Number Placeholder 6"/>
-          <p:cNvSpPr>
-            <a:spLocks noGrp="1"/>
-          </p:cNvSpPr>
-          <p:nvPr>
-            <p:ph type="sldNum" sz="quarter" idx="5"/>
-          </p:nvPr>
-        </p:nvSpPr>
-        <p:spPr>
-          <a:xfrm>
-            <a:off x="3884613" y="8685213"/>
-            <a:ext cx="2971800" cy="458787"/>
-          </a:xfrm>
-          <a:prstGeom prst="rect">
-            <a:avLst/>
-          </a:prstGeom>
-        </p:spPr>
-        <p:txBody>
-          <a:bodyPr vert="horz" lIns="91440" tIns="45720" rIns="91440" bIns="45720" rtlCol="0" anchor="b"/>
-          <a:lstStyle>
-            <a:lvl1pPr algn="r">
-              <a:defRPr sz="1200"/>
-            </a:lvl1pPr>
-          </a:lstStyle>
-          <a:p>
-            <a:fld id="{CE5E9CC1-C706-0F49-92D6-E571CC5EEA8F}" type="slidenum">
-              <a:rPr lang="en-US"/>
-              <a:t>‹#›</a:t>
-            </a:fld>
-            <a:endParaRPr lang="en-US"/>
-          </a:p>
-        </p:txBody>
-      </p:sp>
     </p:spTree>
     <p:extLst>
       <p:ext uri="{BB962C8B-B14F-4D97-AF65-F5344CB8AC3E}">
-        <p14:creationId xmlns:p14="http://schemas.microsoft.com/office/powerpoint/2010/main" val="1024086991"/>
+        <p14:creationId xmlns:p14="http://schemas.microsoft.com/office/powerpoint/2010/main" val="3392627979"/>
       </p:ext>
     </p:extLst>
   </p:cSld>
@@ -509,10 +290,6 @@
           <a:bodyPr/>
           <a:lstStyle/>
           <a:p>
-            <a:r>
-              <a:rPr lang="en-US" dirty="0"/>
-              <a:t/>
-            </a:r>
             <a:endParaRPr lang="en-US" dirty="0"/>
           </a:p>
         </p:txBody>
@@ -597,10 +374,6 @@
           <a:bodyPr/>
           <a:lstStyle/>
           <a:p>
-            <a:r>
-              <a:rPr lang="en-US" dirty="0"/>
-              <a:t/>
-            </a:r>
             <a:endParaRPr lang="en-US" dirty="0"/>
           </a:p>
         </p:txBody>
@@ -685,10 +458,6 @@
           <a:bodyPr/>
           <a:lstStyle/>
           <a:p>
-            <a:r>
-              <a:rPr lang="en-US" dirty="0"/>
-              <a:t/>
-            </a:r>
             <a:endParaRPr lang="en-US" dirty="0"/>
           </a:p>
         </p:txBody>
@@ -773,10 +542,6 @@
           <a:bodyPr/>
           <a:lstStyle/>
           <a:p>
-            <a:r>
-              <a:rPr lang="en-US" dirty="0"/>
-              <a:t/>
-            </a:r>
             <a:endParaRPr lang="en-US" dirty="0"/>
           </a:p>
         </p:txBody>
@@ -861,10 +626,6 @@
           <a:bodyPr/>
           <a:lstStyle/>
           <a:p>
-            <a:r>
-              <a:rPr lang="en-US" dirty="0"/>
-              <a:t/>
-            </a:r>
             <a:endParaRPr lang="en-US" dirty="0"/>
           </a:p>
         </p:txBody>
@@ -949,10 +710,6 @@
           <a:bodyPr/>
           <a:lstStyle/>
           <a:p>
-            <a:r>
-              <a:rPr lang="en-US" dirty="0"/>
-              <a:t/>
-            </a:r>
             <a:endParaRPr lang="en-US" dirty="0"/>
           </a:p>
         </p:txBody>
@@ -1037,10 +794,6 @@
           <a:bodyPr/>
           <a:lstStyle/>
           <a:p>
-            <a:r>
-              <a:rPr lang="en-US" dirty="0"/>
-              <a:t/>
-            </a:r>
             <a:endParaRPr lang="en-US" dirty="0"/>
           </a:p>
         </p:txBody>
@@ -1125,10 +878,6 @@
           <a:bodyPr/>
           <a:lstStyle/>
           <a:p>
-            <a:r>
-              <a:rPr lang="en-US" dirty="0"/>
-              <a:t/>
-            </a:r>
             <a:endParaRPr lang="en-US" dirty="0"/>
           </a:p>
         </p:txBody>
@@ -1213,10 +962,6 @@
           <a:bodyPr/>
           <a:lstStyle/>
           <a:p>
-            <a:r>
-              <a:rPr lang="en-US" dirty="0"/>
-              <a:t/>
-            </a:r>
             <a:endParaRPr lang="en-US" dirty="0"/>
           </a:p>
         </p:txBody>
@@ -1301,10 +1046,6 @@
           <a:bodyPr/>
           <a:lstStyle/>
           <a:p>
-            <a:r>
-              <a:rPr lang="en-US" dirty="0"/>
-              <a:t/>
-            </a:r>
             <a:endParaRPr lang="en-US" dirty="0"/>
           </a:p>
         </p:txBody>
@@ -1383,6 +1124,7 @@
         <a:solidFill>
           <a:srgbClr val="F8FAFC"/>
         </a:solidFill>
+        <a:effectLst/>
       </p:bgPr>
     </p:bg>
     <p:spTree>
@@ -1410,6 +1152,11 @@
 <file path=ppt/slideMasters/slideMaster1.xml><?xml version="1.0" encoding="utf-8"?>
 <p:sldMaster xmlns:a="http://schemas.openxmlformats.org/drawingml/2006/main" xmlns:r="http://schemas.openxmlformats.org/officeDocument/2006/relationships" xmlns:p="http://schemas.openxmlformats.org/presentationml/2006/main">
   <p:cSld>
+    <p:bg>
+      <p:bgRef idx="1001">
+        <a:schemeClr val="bg1"/>
+      </p:bgRef>
+    </p:bg>
     <p:spTree>
       <p:nvGrpSpPr>
         <p:cNvPr id="1" name=""/>
@@ -1693,6 +1440,7 @@
         <a:solidFill>
           <a:srgbClr val="F8FAFC"/>
         </a:solidFill>
+        <a:effectLst/>
       </p:bgPr>
     </p:bg>
     <p:spTree>
@@ -1733,6 +1481,13 @@
             <a:prstDash val="solid"/>
           </a:ln>
         </p:spPr>
+        <p:txBody>
+          <a:bodyPr/>
+          <a:lstStyle/>
+          <a:p>
+            <a:endParaRPr lang="tr-TR"/>
+          </a:p>
+        </p:txBody>
       </p:sp>
       <p:sp>
         <p:nvSpPr>
@@ -1758,6 +1513,13 @@
             <a:prstDash val="solid"/>
           </a:ln>
         </p:spPr>
+        <p:txBody>
+          <a:bodyPr/>
+          <a:lstStyle/>
+          <a:p>
+            <a:endParaRPr lang="tr-TR"/>
+          </a:p>
+        </p:txBody>
       </p:sp>
       <p:sp>
         <p:nvSpPr>
@@ -1780,7 +1542,7 @@
           <a:bodyPr wrap="square" lIns="0" tIns="0" rIns="0" bIns="0" rtlCol="0" anchor="ctr"/>
           <a:lstStyle/>
           <a:p>
-            <a:pPr indent="0" marL="0">
+            <a:pPr marL="0" indent="0">
               <a:buNone/>
             </a:pPr>
             <a:r>
@@ -1792,7 +1554,29 @@
                 <a:ea typeface="Aptos Display" pitchFamily="34" charset="-122"/>
                 <a:cs typeface="Aptos Display" pitchFamily="34" charset="-120"/>
               </a:rPr>
-              <a:t>Final Makale/Bildiri Sunumu</a:t>
+              <a:t>Final </a:t>
+            </a:r>
+            <a:r>
+              <a:rPr lang="en-US" sz="3400" b="1" dirty="0" err="1">
+                <a:solidFill>
+                  <a:srgbClr val="1E2A5A"/>
+                </a:solidFill>
+                <a:latin typeface="Aptos Display" pitchFamily="34" charset="0"/>
+                <a:ea typeface="Aptos Display" pitchFamily="34" charset="-122"/>
+                <a:cs typeface="Aptos Display" pitchFamily="34" charset="-120"/>
+              </a:rPr>
+              <a:t>Bildiri</a:t>
+            </a:r>
+            <a:r>
+              <a:rPr lang="en-US" sz="3400" b="1" dirty="0">
+                <a:solidFill>
+                  <a:srgbClr val="1E2A5A"/>
+                </a:solidFill>
+                <a:latin typeface="Aptos Display" pitchFamily="34" charset="0"/>
+                <a:ea typeface="Aptos Display" pitchFamily="34" charset="-122"/>
+                <a:cs typeface="Aptos Display" pitchFamily="34" charset="-120"/>
+              </a:rPr>
+              <a:t> Sunumu</a:t>
             </a:r>
             <a:endParaRPr lang="en-US" sz="3400" dirty="0"/>
           </a:p>
@@ -1819,7 +1603,7 @@
           <a:bodyPr wrap="square" lIns="0" tIns="0" rIns="0" bIns="0" rtlCol="0" anchor="ctr"/>
           <a:lstStyle/>
           <a:p>
-            <a:pPr indent="0" marL="0">
+            <a:pPr marL="0" indent="0">
               <a:buNone/>
             </a:pPr>
             <a:r>
@@ -1859,6 +1643,13 @@
             <a:prstDash val="solid"/>
           </a:ln>
         </p:spPr>
+        <p:txBody>
+          <a:bodyPr/>
+          <a:lstStyle/>
+          <a:p>
+            <a:endParaRPr lang="tr-TR"/>
+          </a:p>
+        </p:txBody>
       </p:sp>
       <p:sp>
         <p:nvSpPr>
@@ -1883,10 +1674,38 @@
           </a:bodyPr>
           <a:lstStyle/>
           <a:p>
-            <a:pPr indent="0" marL="0">
+            <a:pPr marL="0" indent="0">
               <a:buNone/>
             </a:pPr>
             <a:r>
+              <a:rPr lang="tr-TR" sz="1600" dirty="0">
+                <a:solidFill>
+                  <a:srgbClr val="111827"/>
+                </a:solidFill>
+                <a:latin typeface="Aptos" pitchFamily="34" charset="0"/>
+                <a:ea typeface="Aptos" pitchFamily="34" charset="-122"/>
+                <a:cs typeface="Aptos" pitchFamily="34" charset="-120"/>
+              </a:rPr>
+              <a:t>Emirhan AYDIN</a:t>
+            </a:r>
+            <a:endParaRPr lang="en-US" sz="1600" dirty="0"/>
+          </a:p>
+          <a:p>
+            <a:pPr marL="0" indent="0">
+              <a:buNone/>
+            </a:pPr>
+            <a:r>
+              <a:rPr lang="tr-TR" sz="1600" dirty="0">
+                <a:solidFill>
+                  <a:srgbClr val="111827"/>
+                </a:solidFill>
+                <a:latin typeface="Aptos" pitchFamily="34" charset="0"/>
+                <a:ea typeface="Aptos" pitchFamily="34" charset="-122"/>
+                <a:cs typeface="Aptos" pitchFamily="34" charset="-120"/>
+              </a:rPr>
+              <a:t>ISIC 2019 </a:t>
+            </a:r>
+            <a:r>
               <a:rPr lang="en-US" sz="1600" dirty="0">
                 <a:solidFill>
                   <a:srgbClr val="111827"/>
@@ -1895,41 +1714,28 @@
                 <a:ea typeface="Aptos" pitchFamily="34" charset="-122"/>
                 <a:cs typeface="Aptos" pitchFamily="34" charset="-120"/>
               </a:rPr>
-              <a:t>Ad Soyad</a:t>
+              <a:t>/</a:t>
+            </a:r>
+            <a:r>
+              <a:rPr lang="tr-TR" sz="1600" dirty="0">
+                <a:solidFill>
+                  <a:srgbClr val="111827"/>
+                </a:solidFill>
+                <a:latin typeface="Aptos" pitchFamily="34" charset="0"/>
+                <a:ea typeface="Aptos" pitchFamily="34" charset="-122"/>
+                <a:cs typeface="Aptos" pitchFamily="34" charset="-120"/>
+              </a:rPr>
+              <a:t> Dermatolojik Görüntü Sınıflandırması</a:t>
             </a:r>
             <a:endParaRPr lang="en-US" sz="1600" dirty="0"/>
           </a:p>
           <a:p>
-            <a:pPr indent="0" marL="0">
+            <a:pPr marL="0" indent="0">
               <a:buNone/>
             </a:pPr>
             <a:r>
-              <a:rPr lang="en-US" sz="1600" dirty="0">
-                <a:solidFill>
-                  <a:srgbClr val="111827"/>
-                </a:solidFill>
-                <a:latin typeface="Aptos" pitchFamily="34" charset="0"/>
-                <a:ea typeface="Aptos" pitchFamily="34" charset="-122"/>
-                <a:cs typeface="Aptos" pitchFamily="34" charset="-120"/>
-              </a:rPr>
-              <a:t>Veri Kümesi / Problem Alanı</a:t>
-            </a:r>
-            <a:endParaRPr lang="en-US" sz="1600" dirty="0"/>
-          </a:p>
-          <a:p>
-            <a:pPr indent="0" marL="0">
-              <a:buNone/>
-            </a:pPr>
-            <a:r>
-              <a:rPr lang="en-US" sz="1600" dirty="0">
-                <a:solidFill>
-                  <a:srgbClr val="111827"/>
-                </a:solidFill>
-                <a:latin typeface="Aptos" pitchFamily="34" charset="0"/>
-                <a:ea typeface="Aptos" pitchFamily="34" charset="-122"/>
-                <a:cs typeface="Aptos" pitchFamily="34" charset="-120"/>
-              </a:rPr>
-              <a:t>Araştırma Odağı</a:t>
+              <a:rPr lang="tr-TR" sz="1600" dirty="0"/>
+              <a:t>ViT Modellerinin Fine Tune Sonuçlarının Karşılaştırılması</a:t>
             </a:r>
             <a:endParaRPr lang="en-US" sz="1600" dirty="0"/>
           </a:p>
@@ -1958,7 +1764,7 @@
           </a:bodyPr>
           <a:lstStyle/>
           <a:p>
-            <a:pPr indent="0" marL="0">
+            <a:pPr marL="0" indent="0">
               <a:buNone/>
             </a:pPr>
             <a:r>
@@ -1997,7 +1803,7 @@
           <a:bodyPr wrap="square" lIns="0" tIns="0" rIns="0" bIns="0" rtlCol="0" anchor="ctr"/>
           <a:lstStyle/>
           <a:p>
-            <a:pPr indent="0" marL="0">
+            <a:pPr marL="0" indent="0">
               <a:buNone/>
             </a:pPr>
             <a:r>
@@ -2036,7 +1842,7 @@
           <a:bodyPr wrap="square" lIns="0" tIns="0" rIns="0" bIns="0" rtlCol="0" anchor="ctr"/>
           <a:lstStyle/>
           <a:p>
-            <a:pPr algn="r" indent="0" marL="0">
+            <a:pPr marL="0" indent="0" algn="r">
               <a:buNone/>
             </a:pPr>
             <a:r>
@@ -2070,6 +1876,7 @@
         <a:solidFill>
           <a:srgbClr val="F8FAFC"/>
         </a:solidFill>
+        <a:effectLst/>
       </p:bgPr>
     </p:bg>
     <p:spTree>
@@ -2110,6 +1917,13 @@
             <a:prstDash val="solid"/>
           </a:ln>
         </p:spPr>
+        <p:txBody>
+          <a:bodyPr/>
+          <a:lstStyle/>
+          <a:p>
+            <a:endParaRPr lang="tr-TR"/>
+          </a:p>
+        </p:txBody>
       </p:sp>
       <p:sp>
         <p:nvSpPr>
@@ -2132,7 +1946,7 @@
           <a:bodyPr wrap="square" lIns="0" tIns="0" rIns="0" bIns="0" rtlCol="0" anchor="ctr"/>
           <a:lstStyle/>
           <a:p>
-            <a:pPr indent="0" marL="0">
+            <a:pPr marL="0" indent="0">
               <a:buNone/>
             </a:pPr>
             <a:r>
@@ -2171,7 +1985,7 @@
           <a:bodyPr wrap="square" lIns="0" tIns="0" rIns="0" bIns="0" rtlCol="0" anchor="ctr"/>
           <a:lstStyle/>
           <a:p>
-            <a:pPr indent="0" marL="0">
+            <a:pPr marL="0" indent="0">
               <a:buNone/>
             </a:pPr>
             <a:r>
@@ -2211,6 +2025,13 @@
             <a:prstDash val="solid"/>
           </a:ln>
         </p:spPr>
+        <p:txBody>
+          <a:bodyPr/>
+          <a:lstStyle/>
+          <a:p>
+            <a:endParaRPr lang="tr-TR"/>
+          </a:p>
+        </p:txBody>
       </p:sp>
       <p:sp>
         <p:nvSpPr>
@@ -2233,7 +2054,7 @@
           <a:bodyPr wrap="square" lIns="0" tIns="0" rIns="0" bIns="0" rtlCol="0" anchor="ctr"/>
           <a:lstStyle/>
           <a:p>
-            <a:pPr indent="0" marL="0">
+            <a:pPr marL="0" indent="0">
               <a:buNone/>
             </a:pPr>
             <a:r>
@@ -2272,7 +2093,7 @@
           <a:bodyPr wrap="square" lIns="0" tIns="0" rIns="0" bIns="0" rtlCol="0" anchor="ctr"/>
           <a:lstStyle/>
           <a:p>
-            <a:pPr algn="r" indent="0" marL="0">
+            <a:pPr marL="0" indent="0" algn="r">
               <a:buNone/>
             </a:pPr>
             <a:r>
@@ -2396,6 +2217,13 @@
             <a:prstDash val="solid"/>
           </a:ln>
         </p:spPr>
+        <p:txBody>
+          <a:bodyPr/>
+          <a:lstStyle/>
+          <a:p>
+            <a:endParaRPr lang="tr-TR"/>
+          </a:p>
+        </p:txBody>
       </p:sp>
       <p:sp>
         <p:nvSpPr>
@@ -2420,7 +2248,7 @@
           </a:bodyPr>
           <a:lstStyle/>
           <a:p>
-            <a:pPr indent="0" marL="0">
+            <a:pPr marL="0" indent="0">
               <a:buNone/>
             </a:pPr>
             <a:r>
@@ -2454,6 +2282,7 @@
         <a:solidFill>
           <a:srgbClr val="F8FAFC"/>
         </a:solidFill>
+        <a:effectLst/>
       </p:bgPr>
     </p:bg>
     <p:spTree>
@@ -2494,6 +2323,13 @@
             <a:prstDash val="solid"/>
           </a:ln>
         </p:spPr>
+        <p:txBody>
+          <a:bodyPr/>
+          <a:lstStyle/>
+          <a:p>
+            <a:endParaRPr lang="tr-TR"/>
+          </a:p>
+        </p:txBody>
       </p:sp>
       <p:sp>
         <p:nvSpPr>
@@ -2516,7 +2352,7 @@
           <a:bodyPr wrap="square" lIns="0" tIns="0" rIns="0" bIns="0" rtlCol="0" anchor="ctr"/>
           <a:lstStyle/>
           <a:p>
-            <a:pPr indent="0" marL="0">
+            <a:pPr marL="0" indent="0">
               <a:buNone/>
             </a:pPr>
             <a:r>
@@ -2555,7 +2391,7 @@
           <a:bodyPr wrap="square" lIns="0" tIns="0" rIns="0" bIns="0" rtlCol="0" anchor="ctr"/>
           <a:lstStyle/>
           <a:p>
-            <a:pPr indent="0" marL="0">
+            <a:pPr marL="0" indent="0">
               <a:buNone/>
             </a:pPr>
             <a:r>
@@ -2595,6 +2431,13 @@
             <a:prstDash val="solid"/>
           </a:ln>
         </p:spPr>
+        <p:txBody>
+          <a:bodyPr/>
+          <a:lstStyle/>
+          <a:p>
+            <a:endParaRPr lang="tr-TR"/>
+          </a:p>
+        </p:txBody>
       </p:sp>
       <p:sp>
         <p:nvSpPr>
@@ -2617,7 +2460,7 @@
           <a:bodyPr wrap="square" lIns="0" tIns="0" rIns="0" bIns="0" rtlCol="0" anchor="ctr"/>
           <a:lstStyle/>
           <a:p>
-            <a:pPr indent="0" marL="0">
+            <a:pPr marL="0" indent="0">
               <a:buNone/>
             </a:pPr>
             <a:r>
@@ -2656,7 +2499,7 @@
           <a:bodyPr wrap="square" lIns="0" tIns="0" rIns="0" bIns="0" rtlCol="0" anchor="ctr"/>
           <a:lstStyle/>
           <a:p>
-            <a:pPr algn="r" indent="0" marL="0">
+            <a:pPr marL="0" indent="0" algn="r">
               <a:buNone/>
             </a:pPr>
             <a:r>
@@ -2697,58 +2540,43 @@
           </a:bodyPr>
           <a:lstStyle/>
           <a:p>
-            <a:r>
-              <a:rPr lang="en-US" sz="1550" dirty="0">
-                <a:solidFill>
-                  <a:srgbClr val="111827"/>
-                </a:solidFill>
-                <a:latin typeface="Aptos" pitchFamily="34" charset="0"/>
-                <a:ea typeface="Aptos" pitchFamily="34" charset="-122"/>
-                <a:cs typeface="Aptos" pitchFamily="34" charset="-120"/>
-              </a:rPr>
-              <a:t>Çalışılan görüntü sınıflandırma problemi ve kullanım bağlamı.</a:t>
-            </a:r>
-            <a:endParaRPr lang="en-US" sz="1550" dirty="0"/>
-          </a:p>
-          <a:p>
-            <a:r>
-              <a:rPr lang="en-US" sz="1550" dirty="0">
-                <a:solidFill>
-                  <a:srgbClr val="111827"/>
-                </a:solidFill>
-                <a:latin typeface="Aptos" pitchFamily="34" charset="0"/>
-                <a:ea typeface="Aptos" pitchFamily="34" charset="-122"/>
-                <a:cs typeface="Aptos" pitchFamily="34" charset="-120"/>
-              </a:rPr>
-              <a:t>Çalışmanın temel amacı veya araştırma sorusu.</a:t>
-            </a:r>
-            <a:endParaRPr lang="en-US" sz="1550" dirty="0"/>
-          </a:p>
-          <a:p>
-            <a:r>
-              <a:rPr lang="en-US" sz="1550" dirty="0">
-                <a:solidFill>
-                  <a:srgbClr val="111827"/>
-                </a:solidFill>
-                <a:latin typeface="Aptos" pitchFamily="34" charset="0"/>
-                <a:ea typeface="Aptos" pitchFamily="34" charset="-122"/>
-                <a:cs typeface="Aptos" pitchFamily="34" charset="-120"/>
-              </a:rPr>
-              <a:t>Bu çalışmada neyin incelendiği: karşılaştırma, iyileştirme, analiz veya yöntem denemesi.</a:t>
-            </a:r>
-            <a:endParaRPr lang="en-US" sz="1550" dirty="0"/>
-          </a:p>
-          <a:p>
-            <a:r>
-              <a:rPr lang="en-US" sz="1550" dirty="0">
-                <a:solidFill>
-                  <a:srgbClr val="111827"/>
-                </a:solidFill>
-                <a:latin typeface="Aptos" pitchFamily="34" charset="0"/>
-                <a:ea typeface="Aptos" pitchFamily="34" charset="-122"/>
-                <a:cs typeface="Aptos" pitchFamily="34" charset="-120"/>
-              </a:rPr>
-              <a:t>Önceki ödevlerden yararlanıldıysa, bunun final çalışmasına nasıl bağlandığı.</a:t>
+            <a:pPr marL="285750" indent="-285750">
+              <a:buFont typeface="Arial" panose="020B0604020202020204" pitchFamily="34" charset="0"/>
+              <a:buChar char="•"/>
+            </a:pPr>
+            <a:r>
+              <a:rPr lang="tr-TR" sz="1600" dirty="0"/>
+              <a:t>Problem: Dermatoskopik görüntülerden deri lezyonu sınıflandırılması </a:t>
+            </a:r>
+          </a:p>
+          <a:p>
+            <a:pPr marL="285750" indent="-285750">
+              <a:buFont typeface="Arial" panose="020B0604020202020204" pitchFamily="34" charset="0"/>
+              <a:buChar char="•"/>
+            </a:pPr>
+            <a:r>
+              <a:rPr lang="tr-TR" sz="1600" dirty="0"/>
+              <a:t>Veri Kümesi: ISIC 2019 (25.331 görüntü, 8 sınıf) </a:t>
+            </a:r>
+          </a:p>
+          <a:p>
+            <a:pPr marL="285750" indent="-285750">
+              <a:buFont typeface="Arial" panose="020B0604020202020204" pitchFamily="34" charset="0"/>
+              <a:buChar char="•"/>
+            </a:pPr>
+            <a:r>
+              <a:rPr lang="tr-TR" sz="1600" dirty="0"/>
+              <a:t>Amaç: Vision Transformer modellerinin karşılaştırılması </a:t>
+            </a:r>
+          </a:p>
+          <a:p>
+            <a:pPr marL="285750" indent="-285750">
+              <a:buFont typeface="Arial" panose="020B0604020202020204" pitchFamily="34" charset="0"/>
+              <a:buChar char="•"/>
+            </a:pPr>
+            <a:r>
+              <a:rPr lang="tr-TR" sz="1600" dirty="0"/>
+              <a:t>Kapsam: ViT, DeiT, CaiT, BEiT, Swin, PVT-v2, ConViT, MobileViT ve MaxViT</a:t>
             </a:r>
             <a:endParaRPr lang="en-US" sz="1550" dirty="0"/>
           </a:p>
@@ -2780,6 +2608,13 @@
             <a:prstDash val="solid"/>
           </a:ln>
         </p:spPr>
+        <p:txBody>
+          <a:bodyPr/>
+          <a:lstStyle/>
+          <a:p>
+            <a:endParaRPr lang="tr-TR"/>
+          </a:p>
+        </p:txBody>
       </p:sp>
       <p:sp>
         <p:nvSpPr>
@@ -2804,7 +2639,7 @@
           </a:bodyPr>
           <a:lstStyle/>
           <a:p>
-            <a:pPr indent="0" marL="0">
+            <a:pPr marL="0" indent="0">
               <a:buNone/>
             </a:pPr>
             <a:r>
@@ -2838,6 +2673,7 @@
         <a:solidFill>
           <a:srgbClr val="F8FAFC"/>
         </a:solidFill>
+        <a:effectLst/>
       </p:bgPr>
     </p:bg>
     <p:spTree>
@@ -2878,6 +2714,13 @@
             <a:prstDash val="solid"/>
           </a:ln>
         </p:spPr>
+        <p:txBody>
+          <a:bodyPr/>
+          <a:lstStyle/>
+          <a:p>
+            <a:endParaRPr lang="tr-TR"/>
+          </a:p>
+        </p:txBody>
       </p:sp>
       <p:sp>
         <p:nvSpPr>
@@ -2900,7 +2743,7 @@
           <a:bodyPr wrap="square" lIns="0" tIns="0" rIns="0" bIns="0" rtlCol="0" anchor="ctr"/>
           <a:lstStyle/>
           <a:p>
-            <a:pPr indent="0" marL="0">
+            <a:pPr marL="0" indent="0">
               <a:buNone/>
             </a:pPr>
             <a:r>
@@ -2939,7 +2782,7 @@
           <a:bodyPr wrap="square" lIns="0" tIns="0" rIns="0" bIns="0" rtlCol="0" anchor="ctr"/>
           <a:lstStyle/>
           <a:p>
-            <a:pPr indent="0" marL="0">
+            <a:pPr marL="0" indent="0">
               <a:buNone/>
             </a:pPr>
             <a:r>
@@ -2979,6 +2822,13 @@
             <a:prstDash val="solid"/>
           </a:ln>
         </p:spPr>
+        <p:txBody>
+          <a:bodyPr/>
+          <a:lstStyle/>
+          <a:p>
+            <a:endParaRPr lang="tr-TR"/>
+          </a:p>
+        </p:txBody>
       </p:sp>
       <p:sp>
         <p:nvSpPr>
@@ -3001,7 +2851,7 @@
           <a:bodyPr wrap="square" lIns="0" tIns="0" rIns="0" bIns="0" rtlCol="0" anchor="ctr"/>
           <a:lstStyle/>
           <a:p>
-            <a:pPr indent="0" marL="0">
+            <a:pPr marL="0" indent="0">
               <a:buNone/>
             </a:pPr>
             <a:r>
@@ -3040,7 +2890,7 @@
           <a:bodyPr wrap="square" lIns="0" tIns="0" rIns="0" bIns="0" rtlCol="0" anchor="ctr"/>
           <a:lstStyle/>
           <a:p>
-            <a:pPr algn="r" indent="0" marL="0">
+            <a:pPr marL="0" indent="0" algn="r">
               <a:buNone/>
             </a:pPr>
             <a:r>
@@ -3081,58 +2931,101 @@
           </a:bodyPr>
           <a:lstStyle/>
           <a:p>
-            <a:r>
-              <a:rPr lang="en-US" sz="1550" dirty="0">
-                <a:solidFill>
-                  <a:srgbClr val="111827"/>
-                </a:solidFill>
-                <a:latin typeface="Aptos" pitchFamily="34" charset="0"/>
-                <a:ea typeface="Aptos" pitchFamily="34" charset="-122"/>
-                <a:cs typeface="Aptos" pitchFamily="34" charset="-120"/>
-              </a:rPr>
-              <a:t>Veri kümesinin adı, kaynağı ve sınıflandırma görevi.</a:t>
-            </a:r>
-            <a:endParaRPr lang="en-US" sz="1550" dirty="0"/>
-          </a:p>
-          <a:p>
-            <a:r>
-              <a:rPr lang="en-US" sz="1550" dirty="0">
-                <a:solidFill>
-                  <a:srgbClr val="111827"/>
-                </a:solidFill>
-                <a:latin typeface="Aptos" pitchFamily="34" charset="0"/>
-                <a:ea typeface="Aptos" pitchFamily="34" charset="-122"/>
-                <a:cs typeface="Aptos" pitchFamily="34" charset="-120"/>
-              </a:rPr>
-              <a:t>Sınıf sayısı, veri sayısı ve kullanılan train/validation/test ayrımı.</a:t>
-            </a:r>
-            <a:endParaRPr lang="en-US" sz="1550" dirty="0"/>
-          </a:p>
-          <a:p>
-            <a:r>
-              <a:rPr lang="en-US" sz="1550" dirty="0">
-                <a:solidFill>
-                  <a:srgbClr val="111827"/>
-                </a:solidFill>
-                <a:latin typeface="Aptos" pitchFamily="34" charset="0"/>
-                <a:ea typeface="Aptos" pitchFamily="34" charset="-122"/>
-                <a:cs typeface="Aptos" pitchFamily="34" charset="-120"/>
-              </a:rPr>
-              <a:t>Örnek görseller veya sınıf dağılımı gibi kısa görsel destekler.</a:t>
-            </a:r>
-            <a:endParaRPr lang="en-US" sz="1550" dirty="0"/>
-          </a:p>
-          <a:p>
-            <a:r>
-              <a:rPr lang="en-US" sz="1550" dirty="0">
-                <a:solidFill>
-                  <a:srgbClr val="111827"/>
-                </a:solidFill>
-                <a:latin typeface="Aptos" pitchFamily="34" charset="0"/>
-                <a:ea typeface="Aptos" pitchFamily="34" charset="-122"/>
-                <a:cs typeface="Aptos" pitchFamily="34" charset="-120"/>
-              </a:rPr>
-              <a:t>Veri kümesindeki zorluklar: benzer sınıflar, dengesizlik, az veri, görüntü kalitesi vb.</a:t>
+            <a:pPr marL="285750" indent="-285750">
+              <a:buFont typeface="Arial" panose="020B0604020202020204" pitchFamily="34" charset="0"/>
+              <a:buChar char="•"/>
+            </a:pPr>
+            <a:r>
+              <a:rPr lang="tr-TR" sz="1600" dirty="0"/>
+              <a:t>ISIC 2019 Challenge veri kümesi kullanılmıştır. </a:t>
+            </a:r>
+          </a:p>
+          <a:p>
+            <a:pPr marL="285750" indent="-285750">
+              <a:buFont typeface="Arial" panose="020B0604020202020204" pitchFamily="34" charset="0"/>
+              <a:buChar char="•"/>
+            </a:pPr>
+            <a:r>
+              <a:rPr lang="tr-TR" sz="1600" dirty="0"/>
+              <a:t>Toplam </a:t>
+            </a:r>
+            <a:r>
+              <a:rPr lang="tr-TR" sz="1600" b="1" dirty="0"/>
+              <a:t>25.331 dermatoskopik görüntü</a:t>
+            </a:r>
+            <a:r>
+              <a:rPr lang="tr-TR" sz="1600" dirty="0"/>
+              <a:t> ve </a:t>
+            </a:r>
+            <a:r>
+              <a:rPr lang="tr-TR" sz="1600" b="1" dirty="0"/>
+              <a:t>8 farklı deri lezyonu sınıfı</a:t>
+            </a:r>
+            <a:r>
+              <a:rPr lang="tr-TR" sz="1600" dirty="0"/>
+              <a:t> içermektedir. </a:t>
+            </a:r>
+          </a:p>
+          <a:p>
+            <a:pPr marL="285750" indent="-285750">
+              <a:buFont typeface="Arial" panose="020B0604020202020204" pitchFamily="34" charset="0"/>
+              <a:buChar char="•"/>
+            </a:pPr>
+            <a:r>
+              <a:rPr lang="tr-TR" sz="1600" dirty="0"/>
+              <a:t>Veri kümesi </a:t>
+            </a:r>
+            <a:r>
+              <a:rPr lang="tr-TR" sz="1600" b="1" dirty="0"/>
+              <a:t>%80 eğitim, %10 doğrulama ve %10 test</a:t>
+            </a:r>
+            <a:r>
+              <a:rPr lang="tr-TR" sz="1600" dirty="0"/>
+              <a:t> olarak ayrılmıştır. </a:t>
+            </a:r>
+          </a:p>
+          <a:p>
+            <a:pPr marL="285750" indent="-285750">
+              <a:buFont typeface="Arial" panose="020B0604020202020204" pitchFamily="34" charset="0"/>
+              <a:buChar char="•"/>
+            </a:pPr>
+            <a:r>
+              <a:rPr lang="tr-TR" sz="1600" dirty="0"/>
+              <a:t>Çalışmada çok sınıflı deri lezyonu sınıflandırma problemi ele alınmıştır. </a:t>
+            </a:r>
+          </a:p>
+          <a:p>
+            <a:pPr marL="285750" indent="-285750">
+              <a:buFont typeface="Arial" panose="020B0604020202020204" pitchFamily="34" charset="0"/>
+              <a:buChar char="•"/>
+            </a:pPr>
+            <a:r>
+              <a:rPr lang="tr-TR" sz="1600" dirty="0"/>
+              <a:t>Veri kümesinde </a:t>
+            </a:r>
+            <a:r>
+              <a:rPr lang="tr-TR" sz="1600" b="1" dirty="0"/>
+              <a:t>sınıf dengesizliği</a:t>
+            </a:r>
+            <a:r>
+              <a:rPr lang="tr-TR" sz="1600" dirty="0"/>
+              <a:t>, </a:t>
+            </a:r>
+            <a:r>
+              <a:rPr lang="tr-TR" sz="1600" b="1" dirty="0"/>
+              <a:t>benzer görünümlü lezyonlar</a:t>
+            </a:r>
+            <a:r>
+              <a:rPr lang="tr-TR" sz="1600" dirty="0"/>
+              <a:t> ve </a:t>
+            </a:r>
+            <a:r>
+              <a:rPr lang="tr-TR" sz="1600" b="1" dirty="0"/>
+              <a:t>sınıflar arası yüksek benzerlik</a:t>
+            </a:r>
+            <a:r>
+              <a:rPr lang="tr-TR" sz="1600" dirty="0"/>
+              <a:t> gibi zorluklar bulunmaktadır.</a:t>
             </a:r>
             <a:endParaRPr lang="en-US" sz="1550" dirty="0"/>
           </a:p>
@@ -3164,6 +3057,13 @@
             <a:prstDash val="solid"/>
           </a:ln>
         </p:spPr>
+        <p:txBody>
+          <a:bodyPr/>
+          <a:lstStyle/>
+          <a:p>
+            <a:endParaRPr lang="tr-TR"/>
+          </a:p>
+        </p:txBody>
       </p:sp>
       <p:sp>
         <p:nvSpPr>
@@ -3188,7 +3088,7 @@
           </a:bodyPr>
           <a:lstStyle/>
           <a:p>
-            <a:pPr indent="0" marL="0">
+            <a:pPr marL="0" indent="0">
               <a:buNone/>
             </a:pPr>
             <a:r>
@@ -3222,6 +3122,7 @@
         <a:solidFill>
           <a:srgbClr val="F8FAFC"/>
         </a:solidFill>
+        <a:effectLst/>
       </p:bgPr>
     </p:bg>
     <p:spTree>
@@ -3262,6 +3163,13 @@
             <a:prstDash val="solid"/>
           </a:ln>
         </p:spPr>
+        <p:txBody>
+          <a:bodyPr/>
+          <a:lstStyle/>
+          <a:p>
+            <a:endParaRPr lang="tr-TR"/>
+          </a:p>
+        </p:txBody>
       </p:sp>
       <p:sp>
         <p:nvSpPr>
@@ -3284,7 +3192,7 @@
           <a:bodyPr wrap="square" lIns="0" tIns="0" rIns="0" bIns="0" rtlCol="0" anchor="ctr"/>
           <a:lstStyle/>
           <a:p>
-            <a:pPr indent="0" marL="0">
+            <a:pPr marL="0" indent="0">
               <a:buNone/>
             </a:pPr>
             <a:r>
@@ -3323,7 +3231,7 @@
           <a:bodyPr wrap="square" lIns="0" tIns="0" rIns="0" bIns="0" rtlCol="0" anchor="ctr"/>
           <a:lstStyle/>
           <a:p>
-            <a:pPr indent="0" marL="0">
+            <a:pPr marL="0" indent="0">
               <a:buNone/>
             </a:pPr>
             <a:r>
@@ -3363,6 +3271,13 @@
             <a:prstDash val="solid"/>
           </a:ln>
         </p:spPr>
+        <p:txBody>
+          <a:bodyPr/>
+          <a:lstStyle/>
+          <a:p>
+            <a:endParaRPr lang="tr-TR"/>
+          </a:p>
+        </p:txBody>
       </p:sp>
       <p:sp>
         <p:nvSpPr>
@@ -3385,7 +3300,7 @@
           <a:bodyPr wrap="square" lIns="0" tIns="0" rIns="0" bIns="0" rtlCol="0" anchor="ctr"/>
           <a:lstStyle/>
           <a:p>
-            <a:pPr indent="0" marL="0">
+            <a:pPr marL="0" indent="0">
               <a:buNone/>
             </a:pPr>
             <a:r>
@@ -3424,7 +3339,7 @@
           <a:bodyPr wrap="square" lIns="0" tIns="0" rIns="0" bIns="0" rtlCol="0" anchor="ctr"/>
           <a:lstStyle/>
           <a:p>
-            <a:pPr algn="r" indent="0" marL="0">
+            <a:pPr marL="0" indent="0" algn="r">
               <a:buNone/>
             </a:pPr>
             <a:r>
@@ -3465,58 +3380,53 @@
           </a:bodyPr>
           <a:lstStyle/>
           <a:p>
-            <a:r>
-              <a:rPr lang="en-US" sz="1550" dirty="0">
-                <a:solidFill>
-                  <a:srgbClr val="111827"/>
-                </a:solidFill>
-                <a:latin typeface="Aptos" pitchFamily="34" charset="0"/>
-                <a:ea typeface="Aptos" pitchFamily="34" charset="-122"/>
-                <a:cs typeface="Aptos" pitchFamily="34" charset="-120"/>
-              </a:rPr>
-              <a:t>Kullanılan model, yaklaşım veya stratejilerin kısa tanıtımı.</a:t>
-            </a:r>
-            <a:endParaRPr lang="en-US" sz="1550" dirty="0"/>
-          </a:p>
-          <a:p>
-            <a:r>
-              <a:rPr lang="en-US" sz="1550" dirty="0">
-                <a:solidFill>
-                  <a:srgbClr val="111827"/>
-                </a:solidFill>
-                <a:latin typeface="Aptos" pitchFamily="34" charset="0"/>
-                <a:ea typeface="Aptos" pitchFamily="34" charset="-122"/>
-                <a:cs typeface="Aptos" pitchFamily="34" charset="-120"/>
-              </a:rPr>
-              <a:t>Seçilen yöntemin neden bu problem için uygun görüldüğü.</a:t>
-            </a:r>
-            <a:endParaRPr lang="en-US" sz="1550" dirty="0"/>
-          </a:p>
-          <a:p>
-            <a:r>
-              <a:rPr lang="en-US" sz="1550" dirty="0">
-                <a:solidFill>
-                  <a:srgbClr val="111827"/>
-                </a:solidFill>
-                <a:latin typeface="Aptos" pitchFamily="34" charset="0"/>
-                <a:ea typeface="Aptos" pitchFamily="34" charset="-122"/>
-                <a:cs typeface="Aptos" pitchFamily="34" charset="-120"/>
-              </a:rPr>
-              <a:t>Varsa karşılaştırılan modeller veya denenen değişkenler.</a:t>
-            </a:r>
-            <a:endParaRPr lang="en-US" sz="1550" dirty="0"/>
-          </a:p>
-          <a:p>
-            <a:r>
-              <a:rPr lang="en-US" sz="1550" dirty="0">
-                <a:solidFill>
-                  <a:srgbClr val="111827"/>
-                </a:solidFill>
-                <a:latin typeface="Aptos" pitchFamily="34" charset="0"/>
-                <a:ea typeface="Aptos" pitchFamily="34" charset="-122"/>
-                <a:cs typeface="Aptos" pitchFamily="34" charset="-120"/>
-              </a:rPr>
-              <a:t>Bu bölüm CNN, ViT, transfer learning, augmentation, fine-tuning veya başka bir stratejiye göre uyarlanabilir.</a:t>
+            <a:pPr marL="285750" indent="-285750">
+              <a:buFont typeface="Arial" panose="020B0604020202020204" pitchFamily="34" charset="0"/>
+              <a:buChar char="•"/>
+            </a:pPr>
+            <a:r>
+              <a:rPr lang="tr-TR" sz="1600" dirty="0"/>
+              <a:t>Çalışmada transfer öğrenme tabanlı fine-tuning yaklaşımı kullanılmıştır. </a:t>
+            </a:r>
+          </a:p>
+          <a:p>
+            <a:pPr marL="285750" indent="-285750">
+              <a:buFont typeface="Arial" panose="020B0604020202020204" pitchFamily="34" charset="0"/>
+              <a:buChar char="•"/>
+            </a:pPr>
+            <a:r>
+              <a:rPr lang="tr-TR" sz="1600" dirty="0"/>
+              <a:t>ViT, DeiT, CaiT, BEiT, Swin Transformer, PVT-v2, ConViT, MobileViT ve MaxViT modelleri karşılaştırılmıştır. </a:t>
+            </a:r>
+          </a:p>
+          <a:p>
+            <a:pPr marL="285750" indent="-285750">
+              <a:buFont typeface="Arial" panose="020B0604020202020204" pitchFamily="34" charset="0"/>
+              <a:buChar char="•"/>
+            </a:pPr>
+            <a:r>
+              <a:rPr lang="tr-TR" sz="1600" dirty="0"/>
+              <a:t>Tüm modeller aynı veri kümesi ve benzer eğitim parametreleri ile eğitilerek adil bir karşılaştırma sağlanmıştır. </a:t>
+            </a:r>
+          </a:p>
+          <a:p>
+            <a:pPr marL="285750" indent="-285750">
+              <a:buFont typeface="Arial" panose="020B0604020202020204" pitchFamily="34" charset="0"/>
+              <a:buChar char="•"/>
+            </a:pPr>
+            <a:r>
+              <a:rPr lang="tr-TR" sz="1600" dirty="0"/>
+              <a:t>Ön eğitimli (pretrained) ağırlıklar kullanılarak eğitim süresi azaltılmış ve genelleme performansının artırılması amaçlanmıştır. </a:t>
+            </a:r>
+          </a:p>
+          <a:p>
+            <a:pPr marL="285750" indent="-285750">
+              <a:buFont typeface="Arial" panose="020B0604020202020204" pitchFamily="34" charset="0"/>
+              <a:buChar char="•"/>
+            </a:pPr>
+            <a:r>
+              <a:rPr lang="tr-TR" sz="1600" dirty="0"/>
+              <a:t>Vision Transformer tabanlı mimariler, görüntülerdeki yerel ve küresel ilişkileri etkili şekilde öğrenebildikleri için deri lezyonu sınıflandırma problemi için uygun görülmüştür.</a:t>
             </a:r>
             <a:endParaRPr lang="en-US" sz="1550" dirty="0"/>
           </a:p>
@@ -3548,6 +3458,13 @@
             <a:prstDash val="solid"/>
           </a:ln>
         </p:spPr>
+        <p:txBody>
+          <a:bodyPr/>
+          <a:lstStyle/>
+          <a:p>
+            <a:endParaRPr lang="tr-TR"/>
+          </a:p>
+        </p:txBody>
       </p:sp>
       <p:sp>
         <p:nvSpPr>
@@ -3572,7 +3489,7 @@
           </a:bodyPr>
           <a:lstStyle/>
           <a:p>
-            <a:pPr indent="0" marL="0">
+            <a:pPr marL="0" indent="0">
               <a:buNone/>
             </a:pPr>
             <a:r>
@@ -3606,6 +3523,7 @@
         <a:solidFill>
           <a:srgbClr val="F8FAFC"/>
         </a:solidFill>
+        <a:effectLst/>
       </p:bgPr>
     </p:bg>
     <p:spTree>
@@ -3646,6 +3564,13 @@
             <a:prstDash val="solid"/>
           </a:ln>
         </p:spPr>
+        <p:txBody>
+          <a:bodyPr/>
+          <a:lstStyle/>
+          <a:p>
+            <a:endParaRPr lang="tr-TR"/>
+          </a:p>
+        </p:txBody>
       </p:sp>
       <p:sp>
         <p:nvSpPr>
@@ -3668,7 +3593,7 @@
           <a:bodyPr wrap="square" lIns="0" tIns="0" rIns="0" bIns="0" rtlCol="0" anchor="ctr"/>
           <a:lstStyle/>
           <a:p>
-            <a:pPr indent="0" marL="0">
+            <a:pPr marL="0" indent="0">
               <a:buNone/>
             </a:pPr>
             <a:r>
@@ -3707,7 +3632,7 @@
           <a:bodyPr wrap="square" lIns="0" tIns="0" rIns="0" bIns="0" rtlCol="0" anchor="ctr"/>
           <a:lstStyle/>
           <a:p>
-            <a:pPr indent="0" marL="0">
+            <a:pPr marL="0" indent="0">
               <a:buNone/>
             </a:pPr>
             <a:r>
@@ -3747,6 +3672,13 @@
             <a:prstDash val="solid"/>
           </a:ln>
         </p:spPr>
+        <p:txBody>
+          <a:bodyPr/>
+          <a:lstStyle/>
+          <a:p>
+            <a:endParaRPr lang="tr-TR"/>
+          </a:p>
+        </p:txBody>
       </p:sp>
       <p:sp>
         <p:nvSpPr>
@@ -3769,7 +3701,7 @@
           <a:bodyPr wrap="square" lIns="0" tIns="0" rIns="0" bIns="0" rtlCol="0" anchor="ctr"/>
           <a:lstStyle/>
           <a:p>
-            <a:pPr indent="0" marL="0">
+            <a:pPr marL="0" indent="0">
               <a:buNone/>
             </a:pPr>
             <a:r>
@@ -3808,7 +3740,7 @@
           <a:bodyPr wrap="square" lIns="0" tIns="0" rIns="0" bIns="0" rtlCol="0" anchor="ctr"/>
           <a:lstStyle/>
           <a:p>
-            <a:pPr algn="r" indent="0" marL="0">
+            <a:pPr marL="0" indent="0" algn="r">
               <a:buNone/>
             </a:pPr>
             <a:r>
@@ -3849,58 +3781,73 @@
           </a:bodyPr>
           <a:lstStyle/>
           <a:p>
-            <a:r>
-              <a:rPr lang="en-US" sz="1550" dirty="0">
-                <a:solidFill>
-                  <a:srgbClr val="111827"/>
-                </a:solidFill>
-                <a:latin typeface="Aptos" pitchFamily="34" charset="0"/>
-                <a:ea typeface="Aptos" pitchFamily="34" charset="-122"/>
-                <a:cs typeface="Aptos" pitchFamily="34" charset="-120"/>
-              </a:rPr>
-              <a:t>Ön işleme adımları: resize, normalizasyon, augmentation veya veri temizleme.</a:t>
-            </a:r>
-            <a:endParaRPr lang="en-US" sz="1550" dirty="0"/>
-          </a:p>
-          <a:p>
-            <a:r>
-              <a:rPr lang="en-US" sz="1550" dirty="0">
-                <a:solidFill>
-                  <a:srgbClr val="111827"/>
-                </a:solidFill>
-                <a:latin typeface="Aptos" pitchFamily="34" charset="0"/>
-                <a:ea typeface="Aptos" pitchFamily="34" charset="-122"/>
-                <a:cs typeface="Aptos" pitchFamily="34" charset="-120"/>
-              </a:rPr>
-              <a:t>Eğitim ayarları: epoch, batch size, optimizer, learning rate, loss function.</a:t>
-            </a:r>
-            <a:endParaRPr lang="en-US" sz="1550" dirty="0"/>
-          </a:p>
-          <a:p>
-            <a:r>
-              <a:rPr lang="en-US" sz="1550" dirty="0">
-                <a:solidFill>
-                  <a:srgbClr val="111827"/>
-                </a:solidFill>
-                <a:latin typeface="Aptos" pitchFamily="34" charset="0"/>
-                <a:ea typeface="Aptos" pitchFamily="34" charset="-122"/>
-                <a:cs typeface="Aptos" pitchFamily="34" charset="-120"/>
-              </a:rPr>
-              <a:t>Kullanılan metrikler: accuracy, precision, recall, F1-score, confusion matrix vb.</a:t>
-            </a:r>
-            <a:endParaRPr lang="en-US" sz="1550" dirty="0"/>
-          </a:p>
-          <a:p>
-            <a:r>
-              <a:rPr lang="en-US" sz="1550" dirty="0">
-                <a:solidFill>
-                  <a:srgbClr val="111827"/>
-                </a:solidFill>
-                <a:latin typeface="Aptos" pitchFamily="34" charset="0"/>
-                <a:ea typeface="Aptos" pitchFamily="34" charset="-122"/>
-                <a:cs typeface="Aptos" pitchFamily="34" charset="-120"/>
-              </a:rPr>
-              <a:t>Çalışma ortamı veya donanım bilgisi: Colab, Kaggle, GPU türü, yaklaşık eğitim süresi.</a:t>
+            <a:pPr marL="285750" indent="-285750">
+              <a:buFont typeface="Arial" panose="020B0604020202020204" pitchFamily="34" charset="0"/>
+              <a:buChar char="•"/>
+            </a:pPr>
+            <a:r>
+              <a:rPr lang="tr-TR" sz="1600" dirty="0"/>
+              <a:t>Görüntüler 224×224 boyutuna yeniden ölçeklendirilmiştir. </a:t>
+            </a:r>
+          </a:p>
+          <a:p>
+            <a:pPr marL="285750" indent="-285750">
+              <a:buFont typeface="Arial" panose="020B0604020202020204" pitchFamily="34" charset="0"/>
+              <a:buChar char="•"/>
+            </a:pPr>
+            <a:r>
+              <a:rPr lang="tr-TR" sz="1600" dirty="0"/>
+              <a:t>Eğitim aşamasında Random Resized Crop, Horizontal Flip ve Color Jitter veri artırma teknikleri uygulanmıştır. </a:t>
+            </a:r>
+          </a:p>
+          <a:p>
+            <a:pPr marL="285750" indent="-285750">
+              <a:buFont typeface="Arial" panose="020B0604020202020204" pitchFamily="34" charset="0"/>
+              <a:buChar char="•"/>
+            </a:pPr>
+            <a:r>
+              <a:rPr lang="tr-TR" sz="1600" dirty="0"/>
+              <a:t>Modeller 50 epoch boyunca, batch size 32 olacak şekilde eğitilmiştir. </a:t>
+            </a:r>
+          </a:p>
+          <a:p>
+            <a:pPr marL="285750" indent="-285750">
+              <a:buFont typeface="Arial" panose="020B0604020202020204" pitchFamily="34" charset="0"/>
+              <a:buChar char="•"/>
+            </a:pPr>
+            <a:r>
+              <a:rPr lang="tr-TR" sz="1600" dirty="0"/>
+              <a:t>Optimizasyon için AdamW optimizer, 1×10⁻⁴ öğrenme oranı ve 1×10⁻⁴ weight decay kullanılmıştır. </a:t>
+            </a:r>
+          </a:p>
+          <a:p>
+            <a:pPr marL="285750" indent="-285750">
+              <a:buFont typeface="Arial" panose="020B0604020202020204" pitchFamily="34" charset="0"/>
+              <a:buChar char="•"/>
+            </a:pPr>
+            <a:r>
+              <a:rPr lang="tr-TR" sz="1600" dirty="0"/>
+              <a:t>Kayıp fonksiyonu olarak Cross-Entropy Loss tercih edilmiştir. </a:t>
+            </a:r>
+          </a:p>
+          <a:p>
+            <a:pPr marL="285750" indent="-285750">
+              <a:buFont typeface="Arial" panose="020B0604020202020204" pitchFamily="34" charset="0"/>
+              <a:buChar char="•"/>
+            </a:pPr>
+            <a:r>
+              <a:rPr lang="tr-TR" sz="1600" dirty="0"/>
+              <a:t>Performans değerlendirmesinde Accuracy, Precision, Recall, Macro-F1 Score ve Confusion Matrix metrikleri kullanılmıştır. </a:t>
+            </a:r>
+          </a:p>
+          <a:p>
+            <a:pPr marL="285750" indent="-285750">
+              <a:buFont typeface="Arial" panose="020B0604020202020204" pitchFamily="34" charset="0"/>
+              <a:buChar char="•"/>
+            </a:pPr>
+            <a:r>
+              <a:rPr lang="tr-TR" sz="1600" dirty="0"/>
+              <a:t>Eğitimler NVIDIA RTX 3060 GPU üzerinde gerçekleştirilmiş, erken durdurma (Early Stopping) ve öğrenme oranı azaltma (ReduceLROnPlateau) stratejileri uygulanmıştır.</a:t>
             </a:r>
             <a:endParaRPr lang="en-US" sz="1550" dirty="0"/>
           </a:p>
@@ -3932,6 +3879,13 @@
             <a:prstDash val="solid"/>
           </a:ln>
         </p:spPr>
+        <p:txBody>
+          <a:bodyPr/>
+          <a:lstStyle/>
+          <a:p>
+            <a:endParaRPr lang="tr-TR"/>
+          </a:p>
+        </p:txBody>
       </p:sp>
       <p:sp>
         <p:nvSpPr>
@@ -3956,7 +3910,7 @@
           </a:bodyPr>
           <a:lstStyle/>
           <a:p>
-            <a:pPr indent="0" marL="0">
+            <a:pPr marL="0" indent="0">
               <a:buNone/>
             </a:pPr>
             <a:r>
@@ -3990,6 +3944,7 @@
         <a:solidFill>
           <a:srgbClr val="F8FAFC"/>
         </a:solidFill>
+        <a:effectLst/>
       </p:bgPr>
     </p:bg>
     <p:spTree>
@@ -4030,6 +3985,13 @@
             <a:prstDash val="solid"/>
           </a:ln>
         </p:spPr>
+        <p:txBody>
+          <a:bodyPr/>
+          <a:lstStyle/>
+          <a:p>
+            <a:endParaRPr lang="tr-TR"/>
+          </a:p>
+        </p:txBody>
       </p:sp>
       <p:sp>
         <p:nvSpPr>
@@ -4052,7 +4014,7 @@
           <a:bodyPr wrap="square" lIns="0" tIns="0" rIns="0" bIns="0" rtlCol="0" anchor="ctr"/>
           <a:lstStyle/>
           <a:p>
-            <a:pPr indent="0" marL="0">
+            <a:pPr marL="0" indent="0">
               <a:buNone/>
             </a:pPr>
             <a:r>
@@ -4091,7 +4053,7 @@
           <a:bodyPr wrap="square" lIns="0" tIns="0" rIns="0" bIns="0" rtlCol="0" anchor="ctr"/>
           <a:lstStyle/>
           <a:p>
-            <a:pPr indent="0" marL="0">
+            <a:pPr marL="0" indent="0">
               <a:buNone/>
             </a:pPr>
             <a:r>
@@ -4131,6 +4093,13 @@
             <a:prstDash val="solid"/>
           </a:ln>
         </p:spPr>
+        <p:txBody>
+          <a:bodyPr/>
+          <a:lstStyle/>
+          <a:p>
+            <a:endParaRPr lang="tr-TR"/>
+          </a:p>
+        </p:txBody>
       </p:sp>
       <p:sp>
         <p:nvSpPr>
@@ -4153,7 +4122,7 @@
           <a:bodyPr wrap="square" lIns="0" tIns="0" rIns="0" bIns="0" rtlCol="0" anchor="ctr"/>
           <a:lstStyle/>
           <a:p>
-            <a:pPr indent="0" marL="0">
+            <a:pPr marL="0" indent="0">
               <a:buNone/>
             </a:pPr>
             <a:r>
@@ -4192,7 +4161,7 @@
           <a:bodyPr wrap="square" lIns="0" tIns="0" rIns="0" bIns="0" rtlCol="0" anchor="ctr"/>
           <a:lstStyle/>
           <a:p>
-            <a:pPr algn="r" indent="0" marL="0">
+            <a:pPr marL="0" indent="0" algn="r">
               <a:buNone/>
             </a:pPr>
             <a:r>
@@ -4316,6 +4285,13 @@
             <a:prstDash val="solid"/>
           </a:ln>
         </p:spPr>
+        <p:txBody>
+          <a:bodyPr/>
+          <a:lstStyle/>
+          <a:p>
+            <a:endParaRPr lang="tr-TR"/>
+          </a:p>
+        </p:txBody>
       </p:sp>
       <p:sp>
         <p:nvSpPr>
@@ -4340,7 +4316,7 @@
           </a:bodyPr>
           <a:lstStyle/>
           <a:p>
-            <a:pPr indent="0" marL="0">
+            <a:pPr marL="0" indent="0">
               <a:buNone/>
             </a:pPr>
             <a:r>
@@ -4374,6 +4350,7 @@
         <a:solidFill>
           <a:srgbClr val="F8FAFC"/>
         </a:solidFill>
+        <a:effectLst/>
       </p:bgPr>
     </p:bg>
     <p:spTree>
@@ -4414,6 +4391,13 @@
             <a:prstDash val="solid"/>
           </a:ln>
         </p:spPr>
+        <p:txBody>
+          <a:bodyPr/>
+          <a:lstStyle/>
+          <a:p>
+            <a:endParaRPr lang="tr-TR"/>
+          </a:p>
+        </p:txBody>
       </p:sp>
       <p:sp>
         <p:nvSpPr>
@@ -4436,7 +4420,7 @@
           <a:bodyPr wrap="square" lIns="0" tIns="0" rIns="0" bIns="0" rtlCol="0" anchor="ctr"/>
           <a:lstStyle/>
           <a:p>
-            <a:pPr indent="0" marL="0">
+            <a:pPr marL="0" indent="0">
               <a:buNone/>
             </a:pPr>
             <a:r>
@@ -4475,7 +4459,7 @@
           <a:bodyPr wrap="square" lIns="0" tIns="0" rIns="0" bIns="0" rtlCol="0" anchor="ctr"/>
           <a:lstStyle/>
           <a:p>
-            <a:pPr indent="0" marL="0">
+            <a:pPr marL="0" indent="0">
               <a:buNone/>
             </a:pPr>
             <a:r>
@@ -4515,6 +4499,13 @@
             <a:prstDash val="solid"/>
           </a:ln>
         </p:spPr>
+        <p:txBody>
+          <a:bodyPr/>
+          <a:lstStyle/>
+          <a:p>
+            <a:endParaRPr lang="tr-TR"/>
+          </a:p>
+        </p:txBody>
       </p:sp>
       <p:sp>
         <p:nvSpPr>
@@ -4537,7 +4528,7 @@
           <a:bodyPr wrap="square" lIns="0" tIns="0" rIns="0" bIns="0" rtlCol="0" anchor="ctr"/>
           <a:lstStyle/>
           <a:p>
-            <a:pPr indent="0" marL="0">
+            <a:pPr marL="0" indent="0">
               <a:buNone/>
             </a:pPr>
             <a:r>
@@ -4576,7 +4567,7 @@
           <a:bodyPr wrap="square" lIns="0" tIns="0" rIns="0" bIns="0" rtlCol="0" anchor="ctr"/>
           <a:lstStyle/>
           <a:p>
-            <a:pPr algn="r" indent="0" marL="0">
+            <a:pPr marL="0" indent="0" algn="r">
               <a:buNone/>
             </a:pPr>
             <a:r>
@@ -4700,6 +4691,13 @@
             <a:prstDash val="solid"/>
           </a:ln>
         </p:spPr>
+        <p:txBody>
+          <a:bodyPr/>
+          <a:lstStyle/>
+          <a:p>
+            <a:endParaRPr lang="tr-TR"/>
+          </a:p>
+        </p:txBody>
       </p:sp>
       <p:sp>
         <p:nvSpPr>
@@ -4724,7 +4722,7 @@
           </a:bodyPr>
           <a:lstStyle/>
           <a:p>
-            <a:pPr indent="0" marL="0">
+            <a:pPr marL="0" indent="0">
               <a:buNone/>
             </a:pPr>
             <a:r>
@@ -4758,6 +4756,7 @@
         <a:solidFill>
           <a:srgbClr val="F8FAFC"/>
         </a:solidFill>
+        <a:effectLst/>
       </p:bgPr>
     </p:bg>
     <p:spTree>
@@ -4798,6 +4797,13 @@
             <a:prstDash val="solid"/>
           </a:ln>
         </p:spPr>
+        <p:txBody>
+          <a:bodyPr/>
+          <a:lstStyle/>
+          <a:p>
+            <a:endParaRPr lang="tr-TR"/>
+          </a:p>
+        </p:txBody>
       </p:sp>
       <p:sp>
         <p:nvSpPr>
@@ -4820,7 +4826,7 @@
           <a:bodyPr wrap="square" lIns="0" tIns="0" rIns="0" bIns="0" rtlCol="0" anchor="ctr"/>
           <a:lstStyle/>
           <a:p>
-            <a:pPr indent="0" marL="0">
+            <a:pPr marL="0" indent="0">
               <a:buNone/>
             </a:pPr>
             <a:r>
@@ -4859,7 +4865,7 @@
           <a:bodyPr wrap="square" lIns="0" tIns="0" rIns="0" bIns="0" rtlCol="0" anchor="ctr"/>
           <a:lstStyle/>
           <a:p>
-            <a:pPr indent="0" marL="0">
+            <a:pPr marL="0" indent="0">
               <a:buNone/>
             </a:pPr>
             <a:r>
@@ -4899,6 +4905,13 @@
             <a:prstDash val="solid"/>
           </a:ln>
         </p:spPr>
+        <p:txBody>
+          <a:bodyPr/>
+          <a:lstStyle/>
+          <a:p>
+            <a:endParaRPr lang="tr-TR"/>
+          </a:p>
+        </p:txBody>
       </p:sp>
       <p:sp>
         <p:nvSpPr>
@@ -4921,7 +4934,7 @@
           <a:bodyPr wrap="square" lIns="0" tIns="0" rIns="0" bIns="0" rtlCol="0" anchor="ctr"/>
           <a:lstStyle/>
           <a:p>
-            <a:pPr indent="0" marL="0">
+            <a:pPr marL="0" indent="0">
               <a:buNone/>
             </a:pPr>
             <a:r>
@@ -4960,7 +4973,7 @@
           <a:bodyPr wrap="square" lIns="0" tIns="0" rIns="0" bIns="0" rtlCol="0" anchor="ctr"/>
           <a:lstStyle/>
           <a:p>
-            <a:pPr algn="r" indent="0" marL="0">
+            <a:pPr marL="0" indent="0" algn="r">
               <a:buNone/>
             </a:pPr>
             <a:r>
@@ -5084,6 +5097,13 @@
             <a:prstDash val="solid"/>
           </a:ln>
         </p:spPr>
+        <p:txBody>
+          <a:bodyPr/>
+          <a:lstStyle/>
+          <a:p>
+            <a:endParaRPr lang="tr-TR"/>
+          </a:p>
+        </p:txBody>
       </p:sp>
       <p:sp>
         <p:nvSpPr>
@@ -5108,7 +5128,7 @@
           </a:bodyPr>
           <a:lstStyle/>
           <a:p>
-            <a:pPr indent="0" marL="0">
+            <a:pPr marL="0" indent="0">
               <a:buNone/>
             </a:pPr>
             <a:r>
@@ -5142,6 +5162,7 @@
         <a:solidFill>
           <a:srgbClr val="F8FAFC"/>
         </a:solidFill>
+        <a:effectLst/>
       </p:bgPr>
     </p:bg>
     <p:spTree>
@@ -5182,6 +5203,13 @@
             <a:prstDash val="solid"/>
           </a:ln>
         </p:spPr>
+        <p:txBody>
+          <a:bodyPr/>
+          <a:lstStyle/>
+          <a:p>
+            <a:endParaRPr lang="tr-TR"/>
+          </a:p>
+        </p:txBody>
       </p:sp>
       <p:sp>
         <p:nvSpPr>
@@ -5204,7 +5232,7 @@
           <a:bodyPr wrap="square" lIns="0" tIns="0" rIns="0" bIns="0" rtlCol="0" anchor="ctr"/>
           <a:lstStyle/>
           <a:p>
-            <a:pPr indent="0" marL="0">
+            <a:pPr marL="0" indent="0">
               <a:buNone/>
             </a:pPr>
             <a:r>
@@ -5243,7 +5271,7 @@
           <a:bodyPr wrap="square" lIns="0" tIns="0" rIns="0" bIns="0" rtlCol="0" anchor="ctr"/>
           <a:lstStyle/>
           <a:p>
-            <a:pPr indent="0" marL="0">
+            <a:pPr marL="0" indent="0">
               <a:buNone/>
             </a:pPr>
             <a:r>
@@ -5283,6 +5311,13 @@
             <a:prstDash val="solid"/>
           </a:ln>
         </p:spPr>
+        <p:txBody>
+          <a:bodyPr/>
+          <a:lstStyle/>
+          <a:p>
+            <a:endParaRPr lang="tr-TR"/>
+          </a:p>
+        </p:txBody>
       </p:sp>
       <p:sp>
         <p:nvSpPr>
@@ -5305,7 +5340,7 @@
           <a:bodyPr wrap="square" lIns="0" tIns="0" rIns="0" bIns="0" rtlCol="0" anchor="ctr"/>
           <a:lstStyle/>
           <a:p>
-            <a:pPr indent="0" marL="0">
+            <a:pPr marL="0" indent="0">
               <a:buNone/>
             </a:pPr>
             <a:r>
@@ -5344,7 +5379,7 @@
           <a:bodyPr wrap="square" lIns="0" tIns="0" rIns="0" bIns="0" rtlCol="0" anchor="ctr"/>
           <a:lstStyle/>
           <a:p>
-            <a:pPr algn="r" indent="0" marL="0">
+            <a:pPr marL="0" indent="0" algn="r">
               <a:buNone/>
             </a:pPr>
             <a:r>
@@ -5468,6 +5503,13 @@
             <a:prstDash val="solid"/>
           </a:ln>
         </p:spPr>
+        <p:txBody>
+          <a:bodyPr/>
+          <a:lstStyle/>
+          <a:p>
+            <a:endParaRPr lang="tr-TR"/>
+          </a:p>
+        </p:txBody>
       </p:sp>
       <p:sp>
         <p:nvSpPr>
@@ -5492,7 +5534,7 @@
           </a:bodyPr>
           <a:lstStyle/>
           <a:p>
-            <a:pPr indent="0" marL="0">
+            <a:pPr marL="0" indent="0">
               <a:buNone/>
             </a:pPr>
             <a:r>
@@ -5811,4 +5853,319 @@
     </a:ext>
   </a:extLst>
 </a:theme>
+</file>
+
+<file path=ppt/theme/theme2.xml><?xml version="1.0" encoding="utf-8"?>
+<a:theme xmlns:a="http://schemas.openxmlformats.org/drawingml/2006/main" name="Office Theme">
+  <a:themeElements>
+    <a:clrScheme name="Office">
+      <a:dk1>
+        <a:sysClr val="windowText" lastClr="000000"/>
+      </a:dk1>
+      <a:lt1>
+        <a:sysClr val="window" lastClr="FFFFFF"/>
+      </a:lt1>
+      <a:dk2>
+        <a:srgbClr val="0E2841"/>
+      </a:dk2>
+      <a:lt2>
+        <a:srgbClr val="E8E8E8"/>
+      </a:lt2>
+      <a:accent1>
+        <a:srgbClr val="156082"/>
+      </a:accent1>
+      <a:accent2>
+        <a:srgbClr val="E97132"/>
+      </a:accent2>
+      <a:accent3>
+        <a:srgbClr val="196B24"/>
+      </a:accent3>
+      <a:accent4>
+        <a:srgbClr val="0F9ED5"/>
+      </a:accent4>
+      <a:accent5>
+        <a:srgbClr val="A02B93"/>
+      </a:accent5>
+      <a:accent6>
+        <a:srgbClr val="4EA72E"/>
+      </a:accent6>
+      <a:hlink>
+        <a:srgbClr val="467886"/>
+      </a:hlink>
+      <a:folHlink>
+        <a:srgbClr val="96607D"/>
+      </a:folHlink>
+    </a:clrScheme>
+    <a:fontScheme name="Office">
+      <a:majorFont>
+        <a:latin typeface="Aptos Display" panose="02110004020202020204"/>
+        <a:ea typeface=""/>
+        <a:cs typeface=""/>
+        <a:font script="Jpan" typeface="游ゴシック Light"/>
+        <a:font script="Hang" typeface="맑은 고딕"/>
+        <a:font script="Hans" typeface="等线 Light"/>
+        <a:font script="Hant" typeface="新細明體"/>
+        <a:font script="Arab" typeface="Times New Roman"/>
+        <a:font script="Hebr" typeface="Times New Roman"/>
+        <a:font script="Thai" typeface="Angsana New"/>
+        <a:font script="Ethi" typeface="Nyala"/>
+        <a:font script="Beng" typeface="Vrinda"/>
+        <a:font script="Gujr" typeface="Shruti"/>
+        <a:font script="Khmr" typeface="MoolBoran"/>
+        <a:font script="Knda" typeface="Tunga"/>
+        <a:font script="Guru" typeface="Raavi"/>
+        <a:font script="Cans" typeface="Euphemia"/>
+        <a:font script="Cher" typeface="Plantagenet Cherokee"/>
+        <a:font script="Yiii" typeface="Microsoft Yi Baiti"/>
+        <a:font script="Tibt" typeface="Microsoft Himalaya"/>
+        <a:font script="Thaa" typeface="MV Boli"/>
+        <a:font script="Deva" typeface="Mangal"/>
+        <a:font script="Telu" typeface="Gautami"/>
+        <a:font script="Taml" typeface="Latha"/>
+        <a:font script="Syrc" typeface="Estrangelo Edessa"/>
+        <a:font script="Orya" typeface="Kalinga"/>
+        <a:font script="Mlym" typeface="Kartika"/>
+        <a:font script="Laoo" typeface="DokChampa"/>
+        <a:font script="Sinh" typeface="Iskoola Pota"/>
+        <a:font script="Mong" typeface="Mongolian Baiti"/>
+        <a:font script="Viet" typeface="Times New Roman"/>
+        <a:font script="Uigh" typeface="Microsoft Uighur"/>
+        <a:font script="Geor" typeface="Sylfaen"/>
+        <a:font script="Armn" typeface="Arial"/>
+        <a:font script="Bugi" typeface="Leelawadee UI"/>
+        <a:font script="Bopo" typeface="Microsoft JhengHei"/>
+        <a:font script="Java" typeface="Javanese Text"/>
+        <a:font script="Lisu" typeface="Segoe UI"/>
+        <a:font script="Mymr" typeface="Myanmar Text"/>
+        <a:font script="Nkoo" typeface="Ebrima"/>
+        <a:font script="Olck" typeface="Nirmala UI"/>
+        <a:font script="Osma" typeface="Ebrima"/>
+        <a:font script="Phag" typeface="Phagspa"/>
+        <a:font script="Syrn" typeface="Estrangelo Edessa"/>
+        <a:font script="Syrj" typeface="Estrangelo Edessa"/>
+        <a:font script="Syre" typeface="Estrangelo Edessa"/>
+        <a:font script="Sora" typeface="Nirmala UI"/>
+        <a:font script="Tale" typeface="Microsoft Tai Le"/>
+        <a:font script="Talu" typeface="Microsoft New Tai Lue"/>
+        <a:font script="Tfng" typeface="Ebrima"/>
+      </a:majorFont>
+      <a:minorFont>
+        <a:latin typeface="Aptos" panose="02110004020202020204"/>
+        <a:ea typeface=""/>
+        <a:cs typeface=""/>
+        <a:font script="Jpan" typeface="游ゴシック"/>
+        <a:font script="Hang" typeface="맑은 고딕"/>
+        <a:font script="Hans" typeface="等线"/>
+        <a:font script="Hant" typeface="新細明體"/>
+        <a:font script="Arab" typeface="Arial"/>
+        <a:font script="Hebr" typeface="Arial"/>
+        <a:font script="Thai" typeface="Cordia New"/>
+        <a:font script="Ethi" typeface="Nyala"/>
+        <a:font script="Beng" typeface="Vrinda"/>
+        <a:font script="Gujr" typeface="Shruti"/>
+        <a:font script="Khmr" typeface="DaunPenh"/>
+        <a:font script="Knda" typeface="Tunga"/>
+        <a:font script="Guru" typeface="Raavi"/>
+        <a:font script="Cans" typeface="Euphemia"/>
+        <a:font script="Cher" typeface="Plantagenet Cherokee"/>
+        <a:font script="Yiii" typeface="Microsoft Yi Baiti"/>
+        <a:font script="Tibt" typeface="Microsoft Himalaya"/>
+        <a:font script="Thaa" typeface="MV Boli"/>
+        <a:font script="Deva" typeface="Mangal"/>
+        <a:font script="Telu" typeface="Gautami"/>
+        <a:font script="Taml" typeface="Latha"/>
+        <a:font script="Syrc" typeface="Estrangelo Edessa"/>
+        <a:font script="Orya" typeface="Kalinga"/>
+        <a:font script="Mlym" typeface="Kartika"/>
+        <a:font script="Laoo" typeface="DokChampa"/>
+        <a:font script="Sinh" typeface="Iskoola Pota"/>
+        <a:font script="Mong" typeface="Mongolian Baiti"/>
+        <a:font script="Viet" typeface="Arial"/>
+        <a:font script="Uigh" typeface="Microsoft Uighur"/>
+        <a:font script="Geor" typeface="Sylfaen"/>
+        <a:font script="Armn" typeface="Arial"/>
+        <a:font script="Bugi" typeface="Leelawadee UI"/>
+        <a:font script="Bopo" typeface="Microsoft JhengHei"/>
+        <a:font script="Java" typeface="Javanese Text"/>
+        <a:font script="Lisu" typeface="Segoe UI"/>
+        <a:font script="Mymr" typeface="Myanmar Text"/>
+        <a:font script="Nkoo" typeface="Ebrima"/>
+        <a:font script="Olck" typeface="Nirmala UI"/>
+        <a:font script="Osma" typeface="Ebrima"/>
+        <a:font script="Phag" typeface="Phagspa"/>
+        <a:font script="Syrn" typeface="Estrangelo Edessa"/>
+        <a:font script="Syrj" typeface="Estrangelo Edessa"/>
+        <a:font script="Syre" typeface="Estrangelo Edessa"/>
+        <a:font script="Sora" typeface="Nirmala UI"/>
+        <a:font script="Tale" typeface="Microsoft Tai Le"/>
+        <a:font script="Talu" typeface="Microsoft New Tai Lue"/>
+        <a:font script="Tfng" typeface="Ebrima"/>
+      </a:minorFont>
+    </a:fontScheme>
+    <a:fmtScheme name="Office">
+      <a:fillStyleLst>
+        <a:solidFill>
+          <a:schemeClr val="phClr"/>
+        </a:solidFill>
+        <a:gradFill rotWithShape="1">
+          <a:gsLst>
+            <a:gs pos="0">
+              <a:schemeClr val="phClr">
+                <a:lumMod val="110000"/>
+                <a:satMod val="105000"/>
+                <a:tint val="67000"/>
+              </a:schemeClr>
+            </a:gs>
+            <a:gs pos="50000">
+              <a:schemeClr val="phClr">
+                <a:lumMod val="105000"/>
+                <a:satMod val="103000"/>
+                <a:tint val="73000"/>
+              </a:schemeClr>
+            </a:gs>
+            <a:gs pos="100000">
+              <a:schemeClr val="phClr">
+                <a:lumMod val="105000"/>
+                <a:satMod val="109000"/>
+                <a:tint val="81000"/>
+              </a:schemeClr>
+            </a:gs>
+          </a:gsLst>
+          <a:lin ang="5400000" scaled="0"/>
+        </a:gradFill>
+        <a:gradFill rotWithShape="1">
+          <a:gsLst>
+            <a:gs pos="0">
+              <a:schemeClr val="phClr">
+                <a:satMod val="103000"/>
+                <a:lumMod val="102000"/>
+                <a:tint val="94000"/>
+              </a:schemeClr>
+            </a:gs>
+            <a:gs pos="50000">
+              <a:schemeClr val="phClr">
+                <a:satMod val="110000"/>
+                <a:lumMod val="100000"/>
+                <a:shade val="100000"/>
+              </a:schemeClr>
+            </a:gs>
+            <a:gs pos="100000">
+              <a:schemeClr val="phClr">
+                <a:lumMod val="99000"/>
+                <a:satMod val="120000"/>
+                <a:shade val="78000"/>
+              </a:schemeClr>
+            </a:gs>
+          </a:gsLst>
+          <a:lin ang="5400000" scaled="0"/>
+        </a:gradFill>
+      </a:fillStyleLst>
+      <a:lnStyleLst>
+        <a:ln w="12700" cap="flat" cmpd="sng" algn="ctr">
+          <a:solidFill>
+            <a:schemeClr val="phClr"/>
+          </a:solidFill>
+          <a:prstDash val="solid"/>
+          <a:miter lim="800000"/>
+        </a:ln>
+        <a:ln w="19050" cap="flat" cmpd="sng" algn="ctr">
+          <a:solidFill>
+            <a:schemeClr val="phClr"/>
+          </a:solidFill>
+          <a:prstDash val="solid"/>
+          <a:miter lim="800000"/>
+        </a:ln>
+        <a:ln w="25400" cap="flat" cmpd="sng" algn="ctr">
+          <a:solidFill>
+            <a:schemeClr val="phClr"/>
+          </a:solidFill>
+          <a:prstDash val="solid"/>
+          <a:miter lim="800000"/>
+        </a:ln>
+      </a:lnStyleLst>
+      <a:effectStyleLst>
+        <a:effectStyle>
+          <a:effectLst/>
+        </a:effectStyle>
+        <a:effectStyle>
+          <a:effectLst/>
+        </a:effectStyle>
+        <a:effectStyle>
+          <a:effectLst>
+            <a:outerShdw blurRad="57150" dist="19050" dir="5400000" algn="ctr" rotWithShape="0">
+              <a:srgbClr val="000000">
+                <a:alpha val="63000"/>
+              </a:srgbClr>
+            </a:outerShdw>
+          </a:effectLst>
+        </a:effectStyle>
+      </a:effectStyleLst>
+      <a:bgFillStyleLst>
+        <a:solidFill>
+          <a:schemeClr val="phClr"/>
+        </a:solidFill>
+        <a:solidFill>
+          <a:schemeClr val="phClr">
+            <a:tint val="95000"/>
+            <a:satMod val="170000"/>
+          </a:schemeClr>
+        </a:solidFill>
+        <a:gradFill rotWithShape="1">
+          <a:gsLst>
+            <a:gs pos="0">
+              <a:schemeClr val="phClr">
+                <a:tint val="93000"/>
+                <a:satMod val="150000"/>
+                <a:shade val="98000"/>
+                <a:lumMod val="102000"/>
+              </a:schemeClr>
+            </a:gs>
+            <a:gs pos="50000">
+              <a:schemeClr val="phClr">
+                <a:tint val="98000"/>
+                <a:satMod val="130000"/>
+                <a:shade val="90000"/>
+                <a:lumMod val="103000"/>
+              </a:schemeClr>
+            </a:gs>
+            <a:gs pos="100000">
+              <a:schemeClr val="phClr">
+                <a:shade val="63000"/>
+                <a:satMod val="120000"/>
+              </a:schemeClr>
+            </a:gs>
+          </a:gsLst>
+          <a:lin ang="5400000" scaled="0"/>
+        </a:gradFill>
+      </a:bgFillStyleLst>
+    </a:fmtScheme>
+  </a:themeElements>
+  <a:objectDefaults>
+    <a:lnDef>
+      <a:spPr/>
+      <a:bodyPr/>
+      <a:lstStyle/>
+      <a:style>
+        <a:lnRef idx="2">
+          <a:schemeClr val="accent1"/>
+        </a:lnRef>
+        <a:fillRef idx="0">
+          <a:schemeClr val="accent1"/>
+        </a:fillRef>
+        <a:effectRef idx="1">
+          <a:schemeClr val="accent1"/>
+        </a:effectRef>
+        <a:fontRef idx="minor">
+          <a:schemeClr val="tx1"/>
+        </a:fontRef>
+      </a:style>
+    </a:lnDef>
+  </a:objectDefaults>
+  <a:extraClrSchemeLst/>
+  <a:extLst>
+    <a:ext uri="{05A4C25C-085E-4340-85A3-A5531E510DB2}">
+      <thm15:themeFamily xmlns:thm15="http://schemas.microsoft.com/office/thememl/2012/main" name="Office Theme" id="{2E142A2C-CD16-42D6-873A-C26D2A0506FA}" vid="{1BDDFF52-6CD6-40A5-AB3C-68EB2F1E4D0A}"/>
+    </a:ext>
+  </a:extLst>
+</a:theme>
 </file>
--- a/Final_Makale_Sunum_Sablonu.pptx
+++ b/Final_Makale_Sunum_Sablonu.pptx
@@ -5,7 +5,7 @@
     <p:sldMasterId id="2147483648" r:id="rId1"/>
   </p:sldMasterIdLst>
   <p:notesMasterIdLst>
-    <p:notesMasterId r:id="rId12"/>
+    <p:notesMasterId r:id="rId14"/>
   </p:notesMasterIdLst>
   <p:sldIdLst>
     <p:sldId id="256" r:id="rId2"/>
@@ -14,10 +14,12 @@
     <p:sldId id="259" r:id="rId5"/>
     <p:sldId id="260" r:id="rId6"/>
     <p:sldId id="261" r:id="rId7"/>
-    <p:sldId id="262" r:id="rId8"/>
-    <p:sldId id="263" r:id="rId9"/>
-    <p:sldId id="264" r:id="rId10"/>
-    <p:sldId id="265" r:id="rId11"/>
+    <p:sldId id="267" r:id="rId8"/>
+    <p:sldId id="268" r:id="rId9"/>
+    <p:sldId id="262" r:id="rId10"/>
+    <p:sldId id="263" r:id="rId11"/>
+    <p:sldId id="264" r:id="rId12"/>
+    <p:sldId id="265" r:id="rId13"/>
   </p:sldIdLst>
   <p:sldSz cx="12192000" cy="6858000"/>
   <p:notesSz cx="6858000" cy="12192000"/>
@@ -414,6 +416,174 @@
 </p:notes>
 </file>
 
+<file path=ppt/notesSlides/notesSlide11.xml><?xml version="1.0" encoding="utf-8"?>
+<p:notes xmlns:a="http://schemas.openxmlformats.org/drawingml/2006/main" xmlns:r="http://schemas.openxmlformats.org/officeDocument/2006/relationships" xmlns:p="http://schemas.openxmlformats.org/presentationml/2006/main">
+  <p:cSld>
+    <p:spTree>
+      <p:nvGrpSpPr>
+        <p:cNvPr id="1" name=""/>
+        <p:cNvGrpSpPr/>
+        <p:nvPr/>
+      </p:nvGrpSpPr>
+      <p:grpSpPr>
+        <a:xfrm>
+          <a:off x="0" y="0"/>
+          <a:ext cx="0" cy="0"/>
+          <a:chOff x="0" y="0"/>
+          <a:chExt cx="0" cy="0"/>
+        </a:xfrm>
+      </p:grpSpPr>
+      <p:sp>
+        <p:nvSpPr>
+          <p:cNvPr id="2" name="Slide Image Placeholder 1"/>
+          <p:cNvSpPr>
+            <a:spLocks noGrp="1" noRot="1" noChangeAspect="1"/>
+          </p:cNvSpPr>
+          <p:nvPr>
+            <p:ph type="sldImg"/>
+          </p:nvPr>
+        </p:nvSpPr>
+        <p:spPr/>
+      </p:sp>
+      <p:sp>
+        <p:nvSpPr>
+          <p:cNvPr id="3" name="Notes Placeholder 2"/>
+          <p:cNvSpPr>
+            <a:spLocks noGrp="1"/>
+          </p:cNvSpPr>
+          <p:nvPr>
+            <p:ph type="body" idx="1"/>
+          </p:nvPr>
+        </p:nvSpPr>
+        <p:spPr/>
+        <p:txBody>
+          <a:bodyPr/>
+          <a:lstStyle/>
+          <a:p>
+            <a:endParaRPr lang="en-US" dirty="0"/>
+          </a:p>
+        </p:txBody>
+      </p:sp>
+      <p:sp>
+        <p:nvSpPr>
+          <p:cNvPr id="4" name="Slide Number Placeholder 3"/>
+          <p:cNvSpPr>
+            <a:spLocks noGrp="1"/>
+          </p:cNvSpPr>
+          <p:nvPr>
+            <p:ph type="sldNum" sz="quarter" idx="10"/>
+          </p:nvPr>
+        </p:nvSpPr>
+        <p:spPr/>
+        <p:txBody>
+          <a:bodyPr/>
+          <a:lstStyle/>
+          <a:p>
+            <a:fld id="{F7021451-1387-4CA6-816F-3879F97B5CBC}" type="slidenum">
+              <a:rPr lang="en-US"/>
+              <a:t>11</a:t>
+            </a:fld>
+            <a:endParaRPr lang="en-US"/>
+          </a:p>
+        </p:txBody>
+      </p:sp>
+    </p:spTree>
+    <p:extLst>
+      <p:ext uri="{BB962C8B-B14F-4D97-AF65-F5344CB8AC3E}">
+        <p14:creationId xmlns:p14="http://schemas.microsoft.com/office/powerpoint/2010/main" val="1024086991"/>
+      </p:ext>
+    </p:extLst>
+  </p:cSld>
+  <p:clrMapOvr>
+    <a:masterClrMapping/>
+  </p:clrMapOvr>
+</p:notes>
+</file>
+
+<file path=ppt/notesSlides/notesSlide12.xml><?xml version="1.0" encoding="utf-8"?>
+<p:notes xmlns:a="http://schemas.openxmlformats.org/drawingml/2006/main" xmlns:r="http://schemas.openxmlformats.org/officeDocument/2006/relationships" xmlns:p="http://schemas.openxmlformats.org/presentationml/2006/main">
+  <p:cSld>
+    <p:spTree>
+      <p:nvGrpSpPr>
+        <p:cNvPr id="1" name=""/>
+        <p:cNvGrpSpPr/>
+        <p:nvPr/>
+      </p:nvGrpSpPr>
+      <p:grpSpPr>
+        <a:xfrm>
+          <a:off x="0" y="0"/>
+          <a:ext cx="0" cy="0"/>
+          <a:chOff x="0" y="0"/>
+          <a:chExt cx="0" cy="0"/>
+        </a:xfrm>
+      </p:grpSpPr>
+      <p:sp>
+        <p:nvSpPr>
+          <p:cNvPr id="2" name="Slide Image Placeholder 1"/>
+          <p:cNvSpPr>
+            <a:spLocks noGrp="1" noRot="1" noChangeAspect="1"/>
+          </p:cNvSpPr>
+          <p:nvPr>
+            <p:ph type="sldImg"/>
+          </p:nvPr>
+        </p:nvSpPr>
+        <p:spPr/>
+      </p:sp>
+      <p:sp>
+        <p:nvSpPr>
+          <p:cNvPr id="3" name="Notes Placeholder 2"/>
+          <p:cNvSpPr>
+            <a:spLocks noGrp="1"/>
+          </p:cNvSpPr>
+          <p:nvPr>
+            <p:ph type="body" idx="1"/>
+          </p:nvPr>
+        </p:nvSpPr>
+        <p:spPr/>
+        <p:txBody>
+          <a:bodyPr/>
+          <a:lstStyle/>
+          <a:p>
+            <a:endParaRPr lang="en-US" dirty="0"/>
+          </a:p>
+        </p:txBody>
+      </p:sp>
+      <p:sp>
+        <p:nvSpPr>
+          <p:cNvPr id="4" name="Slide Number Placeholder 3"/>
+          <p:cNvSpPr>
+            <a:spLocks noGrp="1"/>
+          </p:cNvSpPr>
+          <p:nvPr>
+            <p:ph type="sldNum" sz="quarter" idx="10"/>
+          </p:nvPr>
+        </p:nvSpPr>
+        <p:spPr/>
+        <p:txBody>
+          <a:bodyPr/>
+          <a:lstStyle/>
+          <a:p>
+            <a:fld id="{F7021451-1387-4CA6-816F-3879F97B5CBC}" type="slidenum">
+              <a:rPr lang="en-US"/>
+              <a:t>12</a:t>
+            </a:fld>
+            <a:endParaRPr lang="en-US"/>
+          </a:p>
+        </p:txBody>
+      </p:sp>
+    </p:spTree>
+    <p:extLst>
+      <p:ext uri="{BB962C8B-B14F-4D97-AF65-F5344CB8AC3E}">
+        <p14:creationId xmlns:p14="http://schemas.microsoft.com/office/powerpoint/2010/main" val="1024086991"/>
+      </p:ext>
+    </p:extLst>
+  </p:cSld>
+  <p:clrMapOvr>
+    <a:masterClrMapping/>
+  </p:clrMapOvr>
+</p:notes>
+</file>
+
 <file path=ppt/notesSlides/notesSlide2.xml><?xml version="1.0" encoding="utf-8"?>
 <p:notes xmlns:a="http://schemas.openxmlformats.org/drawingml/2006/main" xmlns:r="http://schemas.openxmlformats.org/officeDocument/2006/relationships" xmlns:p="http://schemas.openxmlformats.org/presentationml/2006/main">
   <p:cSld>
@@ -839,7 +1009,13 @@
   <p:cSld>
     <p:spTree>
       <p:nvGrpSpPr>
-        <p:cNvPr id="1" name=""/>
+        <p:cNvPr id="1" name="">
+          <a:extLst>
+            <a:ext uri="{FF2B5EF4-FFF2-40B4-BE49-F238E27FC236}">
+              <a16:creationId xmlns:a16="http://schemas.microsoft.com/office/drawing/2014/main" id="{57F45D1E-85D5-6959-5F3F-B1B07C6F0354}"/>
+            </a:ext>
+          </a:extLst>
+        </p:cNvPr>
         <p:cNvGrpSpPr/>
         <p:nvPr/>
       </p:nvGrpSpPr>
@@ -853,7 +1029,13 @@
       </p:grpSpPr>
       <p:sp>
         <p:nvSpPr>
-          <p:cNvPr id="2" name="Slide Image Placeholder 1"/>
+          <p:cNvPr id="2" name="Slide Image Placeholder 1">
+            <a:extLst>
+              <a:ext uri="{FF2B5EF4-FFF2-40B4-BE49-F238E27FC236}">
+                <a16:creationId xmlns:a16="http://schemas.microsoft.com/office/drawing/2014/main" id="{A7C79A9B-E3BB-2140-9124-2250968EE587}"/>
+              </a:ext>
+            </a:extLst>
+          </p:cNvPr>
           <p:cNvSpPr>
             <a:spLocks noGrp="1" noRot="1" noChangeAspect="1"/>
           </p:cNvSpPr>
@@ -865,7 +1047,13 @@
       </p:sp>
       <p:sp>
         <p:nvSpPr>
-          <p:cNvPr id="3" name="Notes Placeholder 2"/>
+          <p:cNvPr id="3" name="Notes Placeholder 2">
+            <a:extLst>
+              <a:ext uri="{FF2B5EF4-FFF2-40B4-BE49-F238E27FC236}">
+                <a16:creationId xmlns:a16="http://schemas.microsoft.com/office/drawing/2014/main" id="{05F10BBB-EADE-6D5A-98DC-8F474F67E02B}"/>
+              </a:ext>
+            </a:extLst>
+          </p:cNvPr>
           <p:cNvSpPr>
             <a:spLocks noGrp="1"/>
           </p:cNvSpPr>
@@ -884,7 +1072,13 @@
       </p:sp>
       <p:sp>
         <p:nvSpPr>
-          <p:cNvPr id="4" name="Slide Number Placeholder 3"/>
+          <p:cNvPr id="4" name="Slide Number Placeholder 3">
+            <a:extLst>
+              <a:ext uri="{FF2B5EF4-FFF2-40B4-BE49-F238E27FC236}">
+                <a16:creationId xmlns:a16="http://schemas.microsoft.com/office/drawing/2014/main" id="{31EC5613-E46D-8DD9-2934-B67550A9DBAF}"/>
+              </a:ext>
+            </a:extLst>
+          </p:cNvPr>
           <p:cNvSpPr>
             <a:spLocks noGrp="1"/>
           </p:cNvSpPr>
@@ -908,7 +1102,7 @@
     </p:spTree>
     <p:extLst>
       <p:ext uri="{BB962C8B-B14F-4D97-AF65-F5344CB8AC3E}">
-        <p14:creationId xmlns:p14="http://schemas.microsoft.com/office/powerpoint/2010/main" val="1024086991"/>
+        <p14:creationId xmlns:p14="http://schemas.microsoft.com/office/powerpoint/2010/main" val="2326265697"/>
       </p:ext>
     </p:extLst>
   </p:cSld>
@@ -923,7 +1117,13 @@
   <p:cSld>
     <p:spTree>
       <p:nvGrpSpPr>
-        <p:cNvPr id="1" name=""/>
+        <p:cNvPr id="1" name="">
+          <a:extLst>
+            <a:ext uri="{FF2B5EF4-FFF2-40B4-BE49-F238E27FC236}">
+              <a16:creationId xmlns:a16="http://schemas.microsoft.com/office/drawing/2014/main" id="{09620E6E-86E2-374B-205B-B72AB2DFB211}"/>
+            </a:ext>
+          </a:extLst>
+        </p:cNvPr>
         <p:cNvGrpSpPr/>
         <p:nvPr/>
       </p:nvGrpSpPr>
@@ -937,7 +1137,13 @@
       </p:grpSpPr>
       <p:sp>
         <p:nvSpPr>
-          <p:cNvPr id="2" name="Slide Image Placeholder 1"/>
+          <p:cNvPr id="2" name="Slide Image Placeholder 1">
+            <a:extLst>
+              <a:ext uri="{FF2B5EF4-FFF2-40B4-BE49-F238E27FC236}">
+                <a16:creationId xmlns:a16="http://schemas.microsoft.com/office/drawing/2014/main" id="{2CD490B8-6CC1-5857-8C3C-ED496E4405C0}"/>
+              </a:ext>
+            </a:extLst>
+          </p:cNvPr>
           <p:cNvSpPr>
             <a:spLocks noGrp="1" noRot="1" noChangeAspect="1"/>
           </p:cNvSpPr>
@@ -949,7 +1155,13 @@
       </p:sp>
       <p:sp>
         <p:nvSpPr>
-          <p:cNvPr id="3" name="Notes Placeholder 2"/>
+          <p:cNvPr id="3" name="Notes Placeholder 2">
+            <a:extLst>
+              <a:ext uri="{FF2B5EF4-FFF2-40B4-BE49-F238E27FC236}">
+                <a16:creationId xmlns:a16="http://schemas.microsoft.com/office/drawing/2014/main" id="{6BA5414B-54C6-A126-8E6B-3CC9D197DAA3}"/>
+              </a:ext>
+            </a:extLst>
+          </p:cNvPr>
           <p:cNvSpPr>
             <a:spLocks noGrp="1"/>
           </p:cNvSpPr>
@@ -968,7 +1180,13 @@
       </p:sp>
       <p:sp>
         <p:nvSpPr>
-          <p:cNvPr id="4" name="Slide Number Placeholder 3"/>
+          <p:cNvPr id="4" name="Slide Number Placeholder 3">
+            <a:extLst>
+              <a:ext uri="{FF2B5EF4-FFF2-40B4-BE49-F238E27FC236}">
+                <a16:creationId xmlns:a16="http://schemas.microsoft.com/office/drawing/2014/main" id="{BE71CD17-DB86-A641-5312-37008A49B6FB}"/>
+              </a:ext>
+            </a:extLst>
+          </p:cNvPr>
           <p:cNvSpPr>
             <a:spLocks noGrp="1"/>
           </p:cNvSpPr>
@@ -992,7 +1210,7 @@
     </p:spTree>
     <p:extLst>
       <p:ext uri="{BB962C8B-B14F-4D97-AF65-F5344CB8AC3E}">
-        <p14:creationId xmlns:p14="http://schemas.microsoft.com/office/powerpoint/2010/main" val="1024086991"/>
+        <p14:creationId xmlns:p14="http://schemas.microsoft.com/office/powerpoint/2010/main" val="1654970390"/>
       </p:ext>
     </p:extLst>
   </p:cSld>
@@ -1803,9 +2021,6 @@
           <a:bodyPr wrap="square" lIns="0" tIns="0" rIns="0" bIns="0" rtlCol="0" anchor="ctr"/>
           <a:lstStyle/>
           <a:p>
-            <a:pPr marL="0" indent="0">
-              <a:buNone/>
-            </a:pPr>
             <a:r>
               <a:rPr lang="en-US" sz="850" dirty="0">
                 <a:solidFill>
@@ -1815,7 +2030,18 @@
                 <a:ea typeface="Aptos" pitchFamily="34" charset="-122"/>
                 <a:cs typeface="Aptos" pitchFamily="34" charset="-120"/>
               </a:rPr>
-              <a:t>Final Makale/Bildiri Sunumu  •  1/10</a:t>
+              <a:t>Final Makale/Bildiri Sunumu  •  1 /1</a:t>
+            </a:r>
+            <a:r>
+              <a:rPr lang="tr-TR" sz="850" dirty="0">
+                <a:solidFill>
+                  <a:srgbClr val="6B7280"/>
+                </a:solidFill>
+                <a:latin typeface="Aptos" pitchFamily="34" charset="0"/>
+                <a:ea typeface="Aptos" pitchFamily="34" charset="-122"/>
+                <a:cs typeface="Aptos" pitchFamily="34" charset="-120"/>
+              </a:rPr>
+              <a:t>2</a:t>
             </a:r>
             <a:endParaRPr lang="en-US" sz="850" dirty="0"/>
           </a:p>
@@ -1869,6 +2095,965 @@
 </file>
 
 <file path=ppt/slides/slide10.xml><?xml version="1.0" encoding="utf-8"?>
+<p:sld xmlns:a="http://schemas.openxmlformats.org/drawingml/2006/main" xmlns:r="http://schemas.openxmlformats.org/officeDocument/2006/relationships" xmlns:p="http://schemas.openxmlformats.org/presentationml/2006/main">
+  <p:cSld name="Slide 8">
+    <p:bg>
+      <p:bgPr>
+        <a:solidFill>
+          <a:srgbClr val="F8FAFC"/>
+        </a:solidFill>
+        <a:effectLst/>
+      </p:bgPr>
+    </p:bg>
+    <p:spTree>
+      <p:nvGrpSpPr>
+        <p:cNvPr id="1" name=""/>
+        <p:cNvGrpSpPr/>
+        <p:nvPr/>
+      </p:nvGrpSpPr>
+      <p:grpSpPr>
+        <a:xfrm>
+          <a:off x="0" y="0"/>
+          <a:ext cx="0" cy="0"/>
+          <a:chOff x="0" y="0"/>
+          <a:chExt cx="0" cy="0"/>
+        </a:xfrm>
+      </p:grpSpPr>
+      <p:sp>
+        <p:nvSpPr>
+          <p:cNvPr id="2" name="Shape 0"/>
+          <p:cNvSpPr/>
+          <p:nvPr/>
+        </p:nvSpPr>
+        <p:spPr>
+          <a:xfrm>
+            <a:off x="0" y="0"/>
+            <a:ext cx="12191695" cy="146304"/>
+          </a:xfrm>
+          <a:prstGeom prst="rect">
+            <a:avLst/>
+          </a:prstGeom>
+          <a:solidFill>
+            <a:srgbClr val="1E2A5A"/>
+          </a:solidFill>
+          <a:ln w="12700">
+            <a:solidFill>
+              <a:srgbClr val="1E2A5A"/>
+            </a:solidFill>
+            <a:prstDash val="solid"/>
+          </a:ln>
+        </p:spPr>
+        <p:txBody>
+          <a:bodyPr/>
+          <a:lstStyle/>
+          <a:p>
+            <a:endParaRPr lang="tr-TR"/>
+          </a:p>
+        </p:txBody>
+      </p:sp>
+      <p:sp>
+        <p:nvSpPr>
+          <p:cNvPr id="3" name="Text 1"/>
+          <p:cNvSpPr/>
+          <p:nvPr/>
+        </p:nvSpPr>
+        <p:spPr>
+          <a:xfrm>
+            <a:off x="594360" y="438912"/>
+            <a:ext cx="8138160" cy="384048"/>
+          </a:xfrm>
+          <a:prstGeom prst="rect">
+            <a:avLst/>
+          </a:prstGeom>
+          <a:noFill/>
+          <a:ln/>
+        </p:spPr>
+        <p:txBody>
+          <a:bodyPr wrap="square" lIns="0" tIns="0" rIns="0" bIns="0" rtlCol="0" anchor="ctr"/>
+          <a:lstStyle/>
+          <a:p>
+            <a:pPr marL="0" indent="0">
+              <a:buNone/>
+            </a:pPr>
+            <a:r>
+              <a:rPr lang="tr-TR" sz="2400" b="1" dirty="0">
+                <a:solidFill>
+                  <a:srgbClr val="1E2A5A"/>
+                </a:solidFill>
+                <a:latin typeface="Aptos Display" pitchFamily="34" charset="0"/>
+                <a:ea typeface="Aptos Display" pitchFamily="34" charset="-122"/>
+                <a:cs typeface="Aptos Display" pitchFamily="34" charset="-120"/>
+              </a:rPr>
+              <a:t>9</a:t>
+            </a:r>
+            <a:r>
+              <a:rPr lang="en-US" sz="2400" b="1" dirty="0">
+                <a:solidFill>
+                  <a:srgbClr val="1E2A5A"/>
+                </a:solidFill>
+                <a:latin typeface="Aptos Display" pitchFamily="34" charset="0"/>
+                <a:ea typeface="Aptos Display" pitchFamily="34" charset="-122"/>
+                <a:cs typeface="Aptos Display" pitchFamily="34" charset="-120"/>
+              </a:rPr>
+              <a:t>. Literatürle İlişki</a:t>
+            </a:r>
+            <a:endParaRPr lang="en-US" sz="2400" dirty="0"/>
+          </a:p>
+        </p:txBody>
+      </p:sp>
+      <p:sp>
+        <p:nvSpPr>
+          <p:cNvPr id="4" name="Text 2"/>
+          <p:cNvSpPr/>
+          <p:nvPr/>
+        </p:nvSpPr>
+        <p:spPr>
+          <a:xfrm>
+            <a:off x="612648" y="896112"/>
+            <a:ext cx="9966960" cy="256032"/>
+          </a:xfrm>
+          <a:prstGeom prst="rect">
+            <a:avLst/>
+          </a:prstGeom>
+          <a:noFill/>
+          <a:ln/>
+        </p:spPr>
+        <p:txBody>
+          <a:bodyPr wrap="square" lIns="0" tIns="0" rIns="0" bIns="0" rtlCol="0" anchor="ctr"/>
+          <a:lstStyle/>
+          <a:p>
+            <a:pPr marL="0" indent="0">
+              <a:buNone/>
+            </a:pPr>
+            <a:r>
+              <a:rPr lang="en-US" sz="1050" i="1" dirty="0">
+                <a:solidFill>
+                  <a:srgbClr val="6B7280"/>
+                </a:solidFill>
+                <a:latin typeface="Aptos" pitchFamily="34" charset="0"/>
+                <a:ea typeface="Aptos" pitchFamily="34" charset="-122"/>
+                <a:cs typeface="Aptos" pitchFamily="34" charset="-120"/>
+              </a:rPr>
+              <a:t>Kendi sonucunuzu literatür içinde konumlandırın.</a:t>
+            </a:r>
+            <a:endParaRPr lang="en-US" sz="1050" dirty="0"/>
+          </a:p>
+        </p:txBody>
+      </p:sp>
+      <p:sp>
+        <p:nvSpPr>
+          <p:cNvPr id="5" name="Shape 3"/>
+          <p:cNvSpPr/>
+          <p:nvPr/>
+        </p:nvSpPr>
+        <p:spPr>
+          <a:xfrm>
+            <a:off x="594360" y="1261872"/>
+            <a:ext cx="10972800" cy="0"/>
+          </a:xfrm>
+          <a:prstGeom prst="line">
+            <a:avLst/>
+          </a:prstGeom>
+          <a:noFill/>
+          <a:ln w="9525">
+            <a:solidFill>
+              <a:srgbClr val="CBD5E1"/>
+            </a:solidFill>
+            <a:prstDash val="solid"/>
+          </a:ln>
+        </p:spPr>
+        <p:txBody>
+          <a:bodyPr/>
+          <a:lstStyle/>
+          <a:p>
+            <a:endParaRPr lang="tr-TR"/>
+          </a:p>
+        </p:txBody>
+      </p:sp>
+      <p:sp>
+        <p:nvSpPr>
+          <p:cNvPr id="6" name="Text 4"/>
+          <p:cNvSpPr/>
+          <p:nvPr/>
+        </p:nvSpPr>
+        <p:spPr>
+          <a:xfrm>
+            <a:off x="594360" y="6510528"/>
+            <a:ext cx="5029200" cy="201168"/>
+          </a:xfrm>
+          <a:prstGeom prst="rect">
+            <a:avLst/>
+          </a:prstGeom>
+          <a:noFill/>
+          <a:ln/>
+        </p:spPr>
+        <p:txBody>
+          <a:bodyPr wrap="square" lIns="0" tIns="0" rIns="0" bIns="0" rtlCol="0" anchor="ctr"/>
+          <a:lstStyle/>
+          <a:p>
+            <a:r>
+              <a:rPr lang="en-US" sz="850" dirty="0">
+                <a:solidFill>
+                  <a:srgbClr val="6B7280"/>
+                </a:solidFill>
+                <a:latin typeface="Aptos" pitchFamily="34" charset="0"/>
+                <a:ea typeface="Aptos" pitchFamily="34" charset="-122"/>
+                <a:cs typeface="Aptos" pitchFamily="34" charset="-120"/>
+              </a:rPr>
+              <a:t>Final Makale/Bildiri Sunumu  •  </a:t>
+            </a:r>
+            <a:r>
+              <a:rPr lang="tr-TR" sz="850" dirty="0">
+                <a:solidFill>
+                  <a:srgbClr val="6B7280"/>
+                </a:solidFill>
+                <a:latin typeface="Aptos" pitchFamily="34" charset="0"/>
+                <a:ea typeface="Aptos" pitchFamily="34" charset="-122"/>
+                <a:cs typeface="Aptos" pitchFamily="34" charset="-120"/>
+              </a:rPr>
+              <a:t>10</a:t>
+            </a:r>
+            <a:r>
+              <a:rPr lang="en-US" sz="850" dirty="0">
+                <a:solidFill>
+                  <a:srgbClr val="6B7280"/>
+                </a:solidFill>
+                <a:latin typeface="Aptos" pitchFamily="34" charset="0"/>
+                <a:ea typeface="Aptos" pitchFamily="34" charset="-122"/>
+                <a:cs typeface="Aptos" pitchFamily="34" charset="-120"/>
+              </a:rPr>
+              <a:t> /1</a:t>
+            </a:r>
+            <a:r>
+              <a:rPr lang="tr-TR" sz="850" dirty="0">
+                <a:solidFill>
+                  <a:srgbClr val="6B7280"/>
+                </a:solidFill>
+                <a:latin typeface="Aptos" pitchFamily="34" charset="0"/>
+                <a:ea typeface="Aptos" pitchFamily="34" charset="-122"/>
+                <a:cs typeface="Aptos" pitchFamily="34" charset="-120"/>
+              </a:rPr>
+              <a:t>2</a:t>
+            </a:r>
+            <a:endParaRPr lang="en-US" sz="850" dirty="0"/>
+          </a:p>
+        </p:txBody>
+      </p:sp>
+      <p:sp>
+        <p:nvSpPr>
+          <p:cNvPr id="7" name="Text 5"/>
+          <p:cNvSpPr/>
+          <p:nvPr/>
+        </p:nvSpPr>
+        <p:spPr>
+          <a:xfrm>
+            <a:off x="6995160" y="6510528"/>
+            <a:ext cx="4572000" cy="201168"/>
+          </a:xfrm>
+          <a:prstGeom prst="rect">
+            <a:avLst/>
+          </a:prstGeom>
+          <a:noFill/>
+          <a:ln/>
+        </p:spPr>
+        <p:txBody>
+          <a:bodyPr wrap="square" lIns="0" tIns="0" rIns="0" bIns="0" rtlCol="0" anchor="ctr"/>
+          <a:lstStyle/>
+          <a:p>
+            <a:pPr marL="0" indent="0" algn="r">
+              <a:buNone/>
+            </a:pPr>
+            <a:r>
+              <a:rPr lang="en-US" sz="850" dirty="0">
+                <a:solidFill>
+                  <a:srgbClr val="6B7280"/>
+                </a:solidFill>
+                <a:latin typeface="Aptos" pitchFamily="34" charset="0"/>
+                <a:ea typeface="Aptos" pitchFamily="34" charset="-122"/>
+                <a:cs typeface="Aptos" pitchFamily="34" charset="-120"/>
+              </a:rPr>
+              <a:t>İleri Bilgisayarlı Görme ve Derin Öğrenme</a:t>
+            </a:r>
+            <a:endParaRPr lang="en-US" sz="850" dirty="0"/>
+          </a:p>
+        </p:txBody>
+      </p:sp>
+      <p:sp>
+        <p:nvSpPr>
+          <p:cNvPr id="8" name="Text 6"/>
+          <p:cNvSpPr/>
+          <p:nvPr/>
+        </p:nvSpPr>
+        <p:spPr>
+          <a:xfrm>
+            <a:off x="749808" y="1600200"/>
+            <a:ext cx="10378440" cy="3200400"/>
+          </a:xfrm>
+          <a:prstGeom prst="rect">
+            <a:avLst/>
+          </a:prstGeom>
+          <a:noFill/>
+          <a:ln/>
+        </p:spPr>
+        <p:txBody>
+          <a:bodyPr wrap="square" lIns="254" tIns="254" rIns="254" bIns="254" rtlCol="0" anchor="ctr">
+            <a:normAutofit/>
+          </a:bodyPr>
+          <a:lstStyle/>
+          <a:p>
+            <a:pPr marL="285750" indent="-285750">
+              <a:buFont typeface="Arial" panose="020B0604020202020204" pitchFamily="34" charset="0"/>
+              <a:buChar char="•"/>
+            </a:pPr>
+            <a:r>
+              <a:rPr lang="tr-TR" sz="1600" dirty="0"/>
+              <a:t>Swin Transformer literatürde ~%82.3 BA (Ayas) </a:t>
+            </a:r>
+          </a:p>
+          <a:p>
+            <a:pPr marL="285750" indent="-285750">
+              <a:buFont typeface="Arial" panose="020B0604020202020204" pitchFamily="34" charset="0"/>
+              <a:buChar char="•"/>
+            </a:pPr>
+            <a:r>
+              <a:rPr lang="tr-TR" sz="1600" dirty="0"/>
+              <a:t>Bu çalışma: </a:t>
+            </a:r>
+            <a:r>
+              <a:rPr lang="tr-TR" sz="1600" b="1" dirty="0"/>
+              <a:t>%82.4 BA</a:t>
+            </a:r>
+            <a:r>
+              <a:rPr lang="tr-TR" sz="1600" dirty="0"/>
+              <a:t> – %89~ Accuracy</a:t>
+            </a:r>
+          </a:p>
+          <a:p>
+            <a:pPr marL="285750" indent="-285750">
+              <a:buFont typeface="Arial" panose="020B0604020202020204" pitchFamily="34" charset="0"/>
+              <a:buChar char="•"/>
+            </a:pPr>
+            <a:r>
+              <a:rPr lang="tr-TR" sz="1600" dirty="0"/>
+              <a:t>CNN tabanlı çalışmalar: Bazı hibrit modeller %93+ Accuracy </a:t>
+            </a:r>
+          </a:p>
+          <a:p>
+            <a:pPr marL="285750" indent="-285750">
+              <a:buFont typeface="Arial" panose="020B0604020202020204" pitchFamily="34" charset="0"/>
+              <a:buChar char="•"/>
+            </a:pPr>
+            <a:r>
+              <a:rPr lang="tr-TR" sz="1600" dirty="0"/>
+              <a:t>Farklar Nedenleri</a:t>
+            </a:r>
+          </a:p>
+          <a:p>
+            <a:pPr marL="742950" lvl="1" indent="-285750">
+              <a:buFont typeface="Arial" panose="020B0604020202020204" pitchFamily="34" charset="0"/>
+              <a:buChar char="•"/>
+            </a:pPr>
+            <a:r>
+              <a:rPr lang="tr-TR" sz="1600" dirty="0"/>
+              <a:t>veri split </a:t>
+            </a:r>
+          </a:p>
+          <a:p>
+            <a:pPr marL="742950" lvl="1" indent="-285750">
+              <a:buFont typeface="Arial" panose="020B0604020202020204" pitchFamily="34" charset="0"/>
+              <a:buChar char="•"/>
+            </a:pPr>
+            <a:r>
+              <a:rPr lang="tr-TR" sz="1600" dirty="0"/>
+              <a:t>augmentation </a:t>
+            </a:r>
+          </a:p>
+          <a:p>
+            <a:pPr marL="742950" lvl="1" indent="-285750">
+              <a:buFont typeface="Arial" panose="020B0604020202020204" pitchFamily="34" charset="0"/>
+              <a:buChar char="•"/>
+            </a:pPr>
+            <a:r>
+              <a:rPr lang="tr-TR" sz="1600" dirty="0"/>
+              <a:t>model kapasitesi </a:t>
+            </a:r>
+          </a:p>
+          <a:p>
+            <a:pPr marL="742950" lvl="1" indent="-285750">
+              <a:buFont typeface="Arial" panose="020B0604020202020204" pitchFamily="34" charset="0"/>
+              <a:buChar char="•"/>
+            </a:pPr>
+            <a:r>
+              <a:rPr lang="tr-TR" sz="1600" dirty="0"/>
+              <a:t>training protocol</a:t>
+            </a:r>
+          </a:p>
+        </p:txBody>
+      </p:sp>
+      <p:sp>
+        <p:nvSpPr>
+          <p:cNvPr id="9" name="Shape 7"/>
+          <p:cNvSpPr/>
+          <p:nvPr/>
+        </p:nvSpPr>
+        <p:spPr>
+          <a:xfrm>
+            <a:off x="749808" y="5074920"/>
+            <a:ext cx="10378440" cy="713232"/>
+          </a:xfrm>
+          <a:prstGeom prst="rect">
+            <a:avLst/>
+          </a:prstGeom>
+          <a:solidFill>
+            <a:srgbClr val="EEF2F7"/>
+          </a:solidFill>
+          <a:ln w="12700">
+            <a:solidFill>
+              <a:srgbClr val="CBD5E1">
+                <a:alpha val="80000"/>
+              </a:srgbClr>
+            </a:solidFill>
+            <a:prstDash val="solid"/>
+          </a:ln>
+        </p:spPr>
+        <p:txBody>
+          <a:bodyPr/>
+          <a:lstStyle/>
+          <a:p>
+            <a:endParaRPr lang="tr-TR"/>
+          </a:p>
+        </p:txBody>
+      </p:sp>
+      <p:sp>
+        <p:nvSpPr>
+          <p:cNvPr id="10" name="Text 8"/>
+          <p:cNvSpPr/>
+          <p:nvPr/>
+        </p:nvSpPr>
+        <p:spPr>
+          <a:xfrm>
+            <a:off x="987552" y="5248656"/>
+            <a:ext cx="9921240" cy="347472"/>
+          </a:xfrm>
+          <a:prstGeom prst="rect">
+            <a:avLst/>
+          </a:prstGeom>
+          <a:noFill/>
+          <a:ln/>
+        </p:spPr>
+        <p:txBody>
+          <a:bodyPr wrap="square" lIns="127" tIns="127" rIns="127" bIns="127" rtlCol="0" anchor="ctr">
+            <a:normAutofit/>
+          </a:bodyPr>
+          <a:lstStyle/>
+          <a:p>
+            <a:pPr marL="0" indent="0">
+              <a:buNone/>
+            </a:pPr>
+            <a:r>
+              <a:rPr lang="en-US" sz="1200" i="1" dirty="0">
+                <a:solidFill>
+                  <a:srgbClr val="1E2A5A"/>
+                </a:solidFill>
+                <a:latin typeface="Aptos" pitchFamily="34" charset="0"/>
+                <a:ea typeface="Aptos" pitchFamily="34" charset="-122"/>
+                <a:cs typeface="Aptos" pitchFamily="34" charset="-120"/>
+              </a:rPr>
+              <a:t>Makaledeki literatür ve tartışma bölümlerinizden seçilmiş kısa bir özet yeterlidir.</a:t>
+            </a:r>
+            <a:endParaRPr lang="en-US" sz="1200" dirty="0"/>
+          </a:p>
+        </p:txBody>
+      </p:sp>
+    </p:spTree>
+  </p:cSld>
+  <p:clrMapOvr>
+    <a:masterClrMapping/>
+  </p:clrMapOvr>
+</p:sld>
+</file>
+
+<file path=ppt/slides/slide11.xml><?xml version="1.0" encoding="utf-8"?>
+<p:sld xmlns:a="http://schemas.openxmlformats.org/drawingml/2006/main" xmlns:r="http://schemas.openxmlformats.org/officeDocument/2006/relationships" xmlns:p="http://schemas.openxmlformats.org/presentationml/2006/main">
+  <p:cSld name="Slide 9">
+    <p:bg>
+      <p:bgPr>
+        <a:solidFill>
+          <a:srgbClr val="F8FAFC"/>
+        </a:solidFill>
+        <a:effectLst/>
+      </p:bgPr>
+    </p:bg>
+    <p:spTree>
+      <p:nvGrpSpPr>
+        <p:cNvPr id="1" name=""/>
+        <p:cNvGrpSpPr/>
+        <p:nvPr/>
+      </p:nvGrpSpPr>
+      <p:grpSpPr>
+        <a:xfrm>
+          <a:off x="0" y="0"/>
+          <a:ext cx="0" cy="0"/>
+          <a:chOff x="0" y="0"/>
+          <a:chExt cx="0" cy="0"/>
+        </a:xfrm>
+      </p:grpSpPr>
+      <p:sp>
+        <p:nvSpPr>
+          <p:cNvPr id="2" name="Shape 0"/>
+          <p:cNvSpPr/>
+          <p:nvPr/>
+        </p:nvSpPr>
+        <p:spPr>
+          <a:xfrm>
+            <a:off x="0" y="0"/>
+            <a:ext cx="12191695" cy="146304"/>
+          </a:xfrm>
+          <a:prstGeom prst="rect">
+            <a:avLst/>
+          </a:prstGeom>
+          <a:solidFill>
+            <a:srgbClr val="1E2A5A"/>
+          </a:solidFill>
+          <a:ln w="12700">
+            <a:solidFill>
+              <a:srgbClr val="1E2A5A"/>
+            </a:solidFill>
+            <a:prstDash val="solid"/>
+          </a:ln>
+        </p:spPr>
+        <p:txBody>
+          <a:bodyPr/>
+          <a:lstStyle/>
+          <a:p>
+            <a:endParaRPr lang="tr-TR"/>
+          </a:p>
+        </p:txBody>
+      </p:sp>
+      <p:sp>
+        <p:nvSpPr>
+          <p:cNvPr id="3" name="Text 1"/>
+          <p:cNvSpPr/>
+          <p:nvPr/>
+        </p:nvSpPr>
+        <p:spPr>
+          <a:xfrm>
+            <a:off x="594360" y="438912"/>
+            <a:ext cx="8138160" cy="384048"/>
+          </a:xfrm>
+          <a:prstGeom prst="rect">
+            <a:avLst/>
+          </a:prstGeom>
+          <a:noFill/>
+          <a:ln/>
+        </p:spPr>
+        <p:txBody>
+          <a:bodyPr wrap="square" lIns="0" tIns="0" rIns="0" bIns="0" rtlCol="0" anchor="ctr"/>
+          <a:lstStyle/>
+          <a:p>
+            <a:pPr marL="0" indent="0">
+              <a:buNone/>
+            </a:pPr>
+            <a:r>
+              <a:rPr lang="tr-TR" sz="2400" b="1" dirty="0">
+                <a:solidFill>
+                  <a:srgbClr val="1E2A5A"/>
+                </a:solidFill>
+                <a:latin typeface="Aptos Display" pitchFamily="34" charset="0"/>
+                <a:ea typeface="Aptos Display" pitchFamily="34" charset="-122"/>
+                <a:cs typeface="Aptos Display" pitchFamily="34" charset="-120"/>
+              </a:rPr>
+              <a:t>10</a:t>
+            </a:r>
+            <a:r>
+              <a:rPr lang="en-US" sz="2400" b="1" dirty="0">
+                <a:solidFill>
+                  <a:srgbClr val="1E2A5A"/>
+                </a:solidFill>
+                <a:latin typeface="Aptos Display" pitchFamily="34" charset="0"/>
+                <a:ea typeface="Aptos Display" pitchFamily="34" charset="-122"/>
+                <a:cs typeface="Aptos Display" pitchFamily="34" charset="-120"/>
+              </a:rPr>
+              <a:t>. Tartışma ve Sınırlılıklar</a:t>
+            </a:r>
+            <a:endParaRPr lang="en-US" sz="2400" dirty="0"/>
+          </a:p>
+        </p:txBody>
+      </p:sp>
+      <p:sp>
+        <p:nvSpPr>
+          <p:cNvPr id="4" name="Text 2"/>
+          <p:cNvSpPr/>
+          <p:nvPr/>
+        </p:nvSpPr>
+        <p:spPr>
+          <a:xfrm>
+            <a:off x="612648" y="896112"/>
+            <a:ext cx="9966960" cy="256032"/>
+          </a:xfrm>
+          <a:prstGeom prst="rect">
+            <a:avLst/>
+          </a:prstGeom>
+          <a:noFill/>
+          <a:ln/>
+        </p:spPr>
+        <p:txBody>
+          <a:bodyPr wrap="square" lIns="0" tIns="0" rIns="0" bIns="0" rtlCol="0" anchor="ctr"/>
+          <a:lstStyle/>
+          <a:p>
+            <a:pPr marL="0" indent="0">
+              <a:buNone/>
+            </a:pPr>
+            <a:r>
+              <a:rPr lang="en-US" sz="1050" i="1" dirty="0">
+                <a:solidFill>
+                  <a:srgbClr val="6B7280"/>
+                </a:solidFill>
+                <a:latin typeface="Aptos" pitchFamily="34" charset="0"/>
+                <a:ea typeface="Aptos" pitchFamily="34" charset="-122"/>
+                <a:cs typeface="Aptos" pitchFamily="34" charset="-120"/>
+              </a:rPr>
+              <a:t>Çalışmanın güçlü ve sınırlı yönlerini açıkça ifade edin.</a:t>
+            </a:r>
+            <a:endParaRPr lang="en-US" sz="1050" dirty="0"/>
+          </a:p>
+        </p:txBody>
+      </p:sp>
+      <p:sp>
+        <p:nvSpPr>
+          <p:cNvPr id="5" name="Shape 3"/>
+          <p:cNvSpPr/>
+          <p:nvPr/>
+        </p:nvSpPr>
+        <p:spPr>
+          <a:xfrm>
+            <a:off x="594360" y="1261872"/>
+            <a:ext cx="10972800" cy="0"/>
+          </a:xfrm>
+          <a:prstGeom prst="line">
+            <a:avLst/>
+          </a:prstGeom>
+          <a:noFill/>
+          <a:ln w="9525">
+            <a:solidFill>
+              <a:srgbClr val="CBD5E1"/>
+            </a:solidFill>
+            <a:prstDash val="solid"/>
+          </a:ln>
+        </p:spPr>
+        <p:txBody>
+          <a:bodyPr/>
+          <a:lstStyle/>
+          <a:p>
+            <a:endParaRPr lang="tr-TR"/>
+          </a:p>
+        </p:txBody>
+      </p:sp>
+      <p:sp>
+        <p:nvSpPr>
+          <p:cNvPr id="6" name="Text 4"/>
+          <p:cNvSpPr/>
+          <p:nvPr/>
+        </p:nvSpPr>
+        <p:spPr>
+          <a:xfrm>
+            <a:off x="594360" y="6510528"/>
+            <a:ext cx="5029200" cy="201168"/>
+          </a:xfrm>
+          <a:prstGeom prst="rect">
+            <a:avLst/>
+          </a:prstGeom>
+          <a:noFill/>
+          <a:ln/>
+        </p:spPr>
+        <p:txBody>
+          <a:bodyPr wrap="square" lIns="0" tIns="0" rIns="0" bIns="0" rtlCol="0" anchor="ctr"/>
+          <a:lstStyle/>
+          <a:p>
+            <a:r>
+              <a:rPr lang="en-US" sz="850" dirty="0">
+                <a:solidFill>
+                  <a:srgbClr val="6B7280"/>
+                </a:solidFill>
+                <a:latin typeface="Aptos" pitchFamily="34" charset="0"/>
+                <a:ea typeface="Aptos" pitchFamily="34" charset="-122"/>
+                <a:cs typeface="Aptos" pitchFamily="34" charset="-120"/>
+              </a:rPr>
+              <a:t>Final Makale/Bildiri Sunumu  •  </a:t>
+            </a:r>
+            <a:r>
+              <a:rPr lang="tr-TR" sz="850" dirty="0">
+                <a:solidFill>
+                  <a:srgbClr val="6B7280"/>
+                </a:solidFill>
+                <a:latin typeface="Aptos" pitchFamily="34" charset="0"/>
+                <a:ea typeface="Aptos" pitchFamily="34" charset="-122"/>
+                <a:cs typeface="Aptos" pitchFamily="34" charset="-120"/>
+              </a:rPr>
+              <a:t>11</a:t>
+            </a:r>
+            <a:r>
+              <a:rPr lang="en-US" sz="850" dirty="0">
+                <a:solidFill>
+                  <a:srgbClr val="6B7280"/>
+                </a:solidFill>
+                <a:latin typeface="Aptos" pitchFamily="34" charset="0"/>
+                <a:ea typeface="Aptos" pitchFamily="34" charset="-122"/>
+                <a:cs typeface="Aptos" pitchFamily="34" charset="-120"/>
+              </a:rPr>
+              <a:t> /1</a:t>
+            </a:r>
+            <a:r>
+              <a:rPr lang="tr-TR" sz="850" dirty="0">
+                <a:solidFill>
+                  <a:srgbClr val="6B7280"/>
+                </a:solidFill>
+                <a:latin typeface="Aptos" pitchFamily="34" charset="0"/>
+                <a:ea typeface="Aptos" pitchFamily="34" charset="-122"/>
+                <a:cs typeface="Aptos" pitchFamily="34" charset="-120"/>
+              </a:rPr>
+              <a:t>2</a:t>
+            </a:r>
+            <a:endParaRPr lang="en-US" sz="850" dirty="0"/>
+          </a:p>
+        </p:txBody>
+      </p:sp>
+      <p:sp>
+        <p:nvSpPr>
+          <p:cNvPr id="7" name="Text 5"/>
+          <p:cNvSpPr/>
+          <p:nvPr/>
+        </p:nvSpPr>
+        <p:spPr>
+          <a:xfrm>
+            <a:off x="6995160" y="6510528"/>
+            <a:ext cx="4572000" cy="201168"/>
+          </a:xfrm>
+          <a:prstGeom prst="rect">
+            <a:avLst/>
+          </a:prstGeom>
+          <a:noFill/>
+          <a:ln/>
+        </p:spPr>
+        <p:txBody>
+          <a:bodyPr wrap="square" lIns="0" tIns="0" rIns="0" bIns="0" rtlCol="0" anchor="ctr"/>
+          <a:lstStyle/>
+          <a:p>
+            <a:pPr marL="0" indent="0" algn="r">
+              <a:buNone/>
+            </a:pPr>
+            <a:r>
+              <a:rPr lang="en-US" sz="850" dirty="0">
+                <a:solidFill>
+                  <a:srgbClr val="6B7280"/>
+                </a:solidFill>
+                <a:latin typeface="Aptos" pitchFamily="34" charset="0"/>
+                <a:ea typeface="Aptos" pitchFamily="34" charset="-122"/>
+                <a:cs typeface="Aptos" pitchFamily="34" charset="-120"/>
+              </a:rPr>
+              <a:t>İleri Bilgisayarlı Görme ve Derin Öğrenme</a:t>
+            </a:r>
+            <a:endParaRPr lang="en-US" sz="850" dirty="0"/>
+          </a:p>
+        </p:txBody>
+      </p:sp>
+      <p:sp>
+        <p:nvSpPr>
+          <p:cNvPr id="8" name="Text 6"/>
+          <p:cNvSpPr/>
+          <p:nvPr/>
+        </p:nvSpPr>
+        <p:spPr>
+          <a:xfrm>
+            <a:off x="749808" y="1600200"/>
+            <a:ext cx="10378440" cy="3200400"/>
+          </a:xfrm>
+          <a:prstGeom prst="rect">
+            <a:avLst/>
+          </a:prstGeom>
+          <a:noFill/>
+          <a:ln/>
+        </p:spPr>
+        <p:txBody>
+          <a:bodyPr wrap="square" lIns="254" tIns="254" rIns="254" bIns="254" rtlCol="0" anchor="ctr">
+            <a:normAutofit/>
+          </a:bodyPr>
+          <a:lstStyle/>
+          <a:p>
+            <a:pPr marL="285750" indent="-285750">
+              <a:buFont typeface="Arial" panose="020B0604020202020204" pitchFamily="34" charset="0"/>
+              <a:buChar char="•"/>
+            </a:pPr>
+            <a:r>
+              <a:rPr lang="tr-TR" sz="1600" b="1" dirty="0"/>
+              <a:t>Güçlü yönler:</a:t>
+            </a:r>
+            <a:endParaRPr lang="tr-TR" sz="1600" dirty="0"/>
+          </a:p>
+          <a:p>
+            <a:pPr marL="742950" lvl="1" indent="-285750">
+              <a:buFont typeface="Arial" panose="020B0604020202020204" pitchFamily="34" charset="0"/>
+              <a:buChar char="•"/>
+            </a:pPr>
+            <a:r>
+              <a:rPr lang="tr-TR" sz="1600" dirty="0"/>
+              <a:t>Tüm modeller aynı koşulda karşılaştırıldı </a:t>
+            </a:r>
+          </a:p>
+          <a:p>
+            <a:pPr marL="742950" lvl="1" indent="-285750">
+              <a:buFont typeface="Arial" panose="020B0604020202020204" pitchFamily="34" charset="0"/>
+              <a:buChar char="•"/>
+            </a:pPr>
+            <a:r>
+              <a:rPr lang="tr-TR" sz="1600" dirty="0"/>
+              <a:t>Adil benchmarking yapıldı </a:t>
+            </a:r>
+          </a:p>
+          <a:p>
+            <a:pPr marL="285750" indent="-285750">
+              <a:buFont typeface="Arial" panose="020B0604020202020204" pitchFamily="34" charset="0"/>
+              <a:buChar char="•"/>
+            </a:pPr>
+            <a:endParaRPr lang="tr-TR" sz="1600" b="1" dirty="0"/>
+          </a:p>
+          <a:p>
+            <a:pPr marL="285750" indent="-285750">
+              <a:buFont typeface="Arial" panose="020B0604020202020204" pitchFamily="34" charset="0"/>
+              <a:buChar char="•"/>
+            </a:pPr>
+            <a:r>
+              <a:rPr lang="tr-TR" sz="1600" b="1" dirty="0"/>
+              <a:t>Sınırlılıklar:</a:t>
+            </a:r>
+            <a:endParaRPr lang="tr-TR" sz="1600" dirty="0"/>
+          </a:p>
+          <a:p>
+            <a:pPr marL="742950" lvl="1" indent="-285750">
+              <a:buFont typeface="Arial" panose="020B0604020202020204" pitchFamily="34" charset="0"/>
+              <a:buChar char="•"/>
+            </a:pPr>
+            <a:r>
+              <a:rPr lang="tr-TR" sz="1600" dirty="0"/>
+              <a:t>Tek seed </a:t>
+            </a:r>
+          </a:p>
+          <a:p>
+            <a:pPr marL="742950" lvl="1" indent="-285750">
+              <a:buFont typeface="Arial" panose="020B0604020202020204" pitchFamily="34" charset="0"/>
+              <a:buChar char="•"/>
+            </a:pPr>
+            <a:r>
+              <a:rPr lang="tr-TR" sz="1600" dirty="0"/>
+              <a:t>50 epoch limit </a:t>
+            </a:r>
+          </a:p>
+          <a:p>
+            <a:pPr marL="742950" lvl="1" indent="-285750">
+              <a:buFont typeface="Arial" panose="020B0604020202020204" pitchFamily="34" charset="0"/>
+              <a:buChar char="•"/>
+            </a:pPr>
+            <a:r>
+              <a:rPr lang="tr-TR" sz="1600" dirty="0"/>
+              <a:t>Class imbalance (NV baskın) </a:t>
+            </a:r>
+          </a:p>
+          <a:p>
+            <a:pPr marL="742950" lvl="1" indent="-285750">
+              <a:buFont typeface="Arial" panose="020B0604020202020204" pitchFamily="34" charset="0"/>
+              <a:buChar char="•"/>
+            </a:pPr>
+            <a:r>
+              <a:rPr lang="tr-TR" sz="1600" dirty="0"/>
+              <a:t>Sadece ImageNet pretrained modeller</a:t>
+            </a:r>
+          </a:p>
+        </p:txBody>
+      </p:sp>
+      <p:sp>
+        <p:nvSpPr>
+          <p:cNvPr id="9" name="Shape 7"/>
+          <p:cNvSpPr/>
+          <p:nvPr/>
+        </p:nvSpPr>
+        <p:spPr>
+          <a:xfrm>
+            <a:off x="749808" y="5074920"/>
+            <a:ext cx="10378440" cy="713232"/>
+          </a:xfrm>
+          <a:prstGeom prst="rect">
+            <a:avLst/>
+          </a:prstGeom>
+          <a:solidFill>
+            <a:srgbClr val="EEF2F7"/>
+          </a:solidFill>
+          <a:ln w="12700">
+            <a:solidFill>
+              <a:srgbClr val="CBD5E1">
+                <a:alpha val="80000"/>
+              </a:srgbClr>
+            </a:solidFill>
+            <a:prstDash val="solid"/>
+          </a:ln>
+        </p:spPr>
+        <p:txBody>
+          <a:bodyPr/>
+          <a:lstStyle/>
+          <a:p>
+            <a:endParaRPr lang="tr-TR"/>
+          </a:p>
+        </p:txBody>
+      </p:sp>
+      <p:sp>
+        <p:nvSpPr>
+          <p:cNvPr id="10" name="Text 8"/>
+          <p:cNvSpPr/>
+          <p:nvPr/>
+        </p:nvSpPr>
+        <p:spPr>
+          <a:xfrm>
+            <a:off x="987552" y="5248656"/>
+            <a:ext cx="9921240" cy="347472"/>
+          </a:xfrm>
+          <a:prstGeom prst="rect">
+            <a:avLst/>
+          </a:prstGeom>
+          <a:noFill/>
+          <a:ln/>
+        </p:spPr>
+        <p:txBody>
+          <a:bodyPr wrap="square" lIns="127" tIns="127" rIns="127" bIns="127" rtlCol="0" anchor="ctr">
+            <a:normAutofit/>
+          </a:bodyPr>
+          <a:lstStyle/>
+          <a:p>
+            <a:pPr marL="0" indent="0">
+              <a:buNone/>
+            </a:pPr>
+            <a:r>
+              <a:rPr lang="en-US" sz="1200" i="1" dirty="0">
+                <a:solidFill>
+                  <a:srgbClr val="1E2A5A"/>
+                </a:solidFill>
+                <a:latin typeface="Aptos" pitchFamily="34" charset="0"/>
+                <a:ea typeface="Aptos" pitchFamily="34" charset="-122"/>
+                <a:cs typeface="Aptos" pitchFamily="34" charset="-120"/>
+              </a:rPr>
+              <a:t>Sınırlılık yazmak çalışmayı zayıflatmaz; aksine akademik olgunluk gösterir.</a:t>
+            </a:r>
+            <a:endParaRPr lang="en-US" sz="1200" dirty="0"/>
+          </a:p>
+        </p:txBody>
+      </p:sp>
+    </p:spTree>
+  </p:cSld>
+  <p:clrMapOvr>
+    <a:masterClrMapping/>
+  </p:clrMapOvr>
+</p:sld>
+</file>
+
+<file path=ppt/slides/slide12.xml><?xml version="1.0" encoding="utf-8"?>
 <p:sld xmlns:a="http://schemas.openxmlformats.org/drawingml/2006/main" xmlns:r="http://schemas.openxmlformats.org/officeDocument/2006/relationships" xmlns:p="http://schemas.openxmlformats.org/presentationml/2006/main">
   <p:cSld name="Slide 10">
     <p:bg>
@@ -1950,7 +3135,7 @@
               <a:buNone/>
             </a:pPr>
             <a:r>
-              <a:rPr lang="en-US" sz="2400" b="1" dirty="0">
+              <a:rPr lang="tr-TR" sz="2400" b="1" dirty="0">
                 <a:solidFill>
                   <a:srgbClr val="1E2A5A"/>
                 </a:solidFill>
@@ -1958,7 +3143,18 @@
                 <a:ea typeface="Aptos Display" pitchFamily="34" charset="-122"/>
                 <a:cs typeface="Aptos Display" pitchFamily="34" charset="-120"/>
               </a:rPr>
-              <a:t>9. Sonuç ve Kaynaklar</a:t>
+              <a:t>11</a:t>
+            </a:r>
+            <a:r>
+              <a:rPr lang="en-US" sz="2400" b="1" dirty="0">
+                <a:solidFill>
+                  <a:srgbClr val="1E2A5A"/>
+                </a:solidFill>
+                <a:latin typeface="Aptos Display" pitchFamily="34" charset="0"/>
+                <a:ea typeface="Aptos Display" pitchFamily="34" charset="-122"/>
+                <a:cs typeface="Aptos Display" pitchFamily="34" charset="-120"/>
+              </a:rPr>
+              <a:t>. Sonuç ve Kaynaklar</a:t>
             </a:r>
             <a:endParaRPr lang="en-US" sz="2400" dirty="0"/>
           </a:p>
@@ -2066,38 +3262,10 @@
                 <a:ea typeface="Aptos" pitchFamily="34" charset="-122"/>
                 <a:cs typeface="Aptos" pitchFamily="34" charset="-120"/>
               </a:rPr>
-              <a:t>Final Makale/Bildiri Sunumu  •  10/10</a:t>
-            </a:r>
-            <a:endParaRPr lang="en-US" sz="850" dirty="0"/>
-          </a:p>
-        </p:txBody>
-      </p:sp>
-      <p:sp>
-        <p:nvSpPr>
-          <p:cNvPr id="7" name="Text 5"/>
-          <p:cNvSpPr/>
-          <p:nvPr/>
-        </p:nvSpPr>
-        <p:spPr>
-          <a:xfrm>
-            <a:off x="6995160" y="6510528"/>
-            <a:ext cx="4572000" cy="201168"/>
-          </a:xfrm>
-          <a:prstGeom prst="rect">
-            <a:avLst/>
-          </a:prstGeom>
-          <a:noFill/>
-          <a:ln/>
-        </p:spPr>
-        <p:txBody>
-          <a:bodyPr wrap="square" lIns="0" tIns="0" rIns="0" bIns="0" rtlCol="0" anchor="ctr"/>
-          <a:lstStyle/>
-          <a:p>
-            <a:pPr marL="0" indent="0" algn="r">
-              <a:buNone/>
-            </a:pPr>
-            <a:r>
-              <a:rPr lang="en-US" sz="850" dirty="0">
+              <a:t>Final Makale/Bildiri Sunumu  •  1</a:t>
+            </a:r>
+            <a:r>
+              <a:rPr lang="tr-TR" sz="850" dirty="0">
                 <a:solidFill>
                   <a:srgbClr val="6B7280"/>
                 </a:solidFill>
@@ -2105,6 +3273,67 @@
                 <a:ea typeface="Aptos" pitchFamily="34" charset="-122"/>
                 <a:cs typeface="Aptos" pitchFamily="34" charset="-120"/>
               </a:rPr>
+              <a:t>2</a:t>
+            </a:r>
+            <a:r>
+              <a:rPr lang="en-US" sz="850" dirty="0">
+                <a:solidFill>
+                  <a:srgbClr val="6B7280"/>
+                </a:solidFill>
+                <a:latin typeface="Aptos" pitchFamily="34" charset="0"/>
+                <a:ea typeface="Aptos" pitchFamily="34" charset="-122"/>
+                <a:cs typeface="Aptos" pitchFamily="34" charset="-120"/>
+              </a:rPr>
+              <a:t>/1</a:t>
+            </a:r>
+            <a:r>
+              <a:rPr lang="tr-TR" sz="850" dirty="0">
+                <a:solidFill>
+                  <a:srgbClr val="6B7280"/>
+                </a:solidFill>
+                <a:latin typeface="Aptos" pitchFamily="34" charset="0"/>
+                <a:ea typeface="Aptos" pitchFamily="34" charset="-122"/>
+                <a:cs typeface="Aptos" pitchFamily="34" charset="-120"/>
+              </a:rPr>
+              <a:t>2</a:t>
+            </a:r>
+            <a:endParaRPr lang="en-US" sz="850" dirty="0"/>
+          </a:p>
+        </p:txBody>
+      </p:sp>
+      <p:sp>
+        <p:nvSpPr>
+          <p:cNvPr id="7" name="Text 5"/>
+          <p:cNvSpPr/>
+          <p:nvPr/>
+        </p:nvSpPr>
+        <p:spPr>
+          <a:xfrm>
+            <a:off x="6995160" y="6510528"/>
+            <a:ext cx="4572000" cy="201168"/>
+          </a:xfrm>
+          <a:prstGeom prst="rect">
+            <a:avLst/>
+          </a:prstGeom>
+          <a:noFill/>
+          <a:ln/>
+        </p:spPr>
+        <p:txBody>
+          <a:bodyPr wrap="square" lIns="0" tIns="0" rIns="0" bIns="0" rtlCol="0" anchor="ctr"/>
+          <a:lstStyle/>
+          <a:p>
+            <a:pPr marL="0" indent="0" algn="r">
+              <a:buNone/>
+            </a:pPr>
+            <a:r>
+              <a:rPr lang="en-US" sz="850" dirty="0">
+                <a:solidFill>
+                  <a:srgbClr val="6B7280"/>
+                </a:solidFill>
+                <a:latin typeface="Aptos" pitchFamily="34" charset="0"/>
+                <a:ea typeface="Aptos" pitchFamily="34" charset="-122"/>
+                <a:cs typeface="Aptos" pitchFamily="34" charset="-120"/>
+              </a:rPr>
               <a:t>İleri Bilgisayarlı Görme ve Derin Öğrenme</a:t>
             </a:r>
             <a:endParaRPr lang="en-US" sz="850" dirty="0"/>
@@ -2134,58 +3363,43 @@
           </a:bodyPr>
           <a:lstStyle/>
           <a:p>
-            <a:r>
-              <a:rPr lang="en-US" sz="1550" dirty="0">
-                <a:solidFill>
-                  <a:srgbClr val="111827"/>
-                </a:solidFill>
-                <a:latin typeface="Aptos" pitchFamily="34" charset="0"/>
-                <a:ea typeface="Aptos" pitchFamily="34" charset="-122"/>
-                <a:cs typeface="Aptos" pitchFamily="34" charset="-120"/>
-              </a:rPr>
-              <a:t>Çalışmanın en önemli sonucu veya çıkarımı.</a:t>
-            </a:r>
-            <a:endParaRPr lang="en-US" sz="1550" dirty="0"/>
-          </a:p>
-          <a:p>
-            <a:r>
-              <a:rPr lang="en-US" sz="1550" dirty="0">
-                <a:solidFill>
-                  <a:srgbClr val="111827"/>
-                </a:solidFill>
-                <a:latin typeface="Aptos" pitchFamily="34" charset="0"/>
-                <a:ea typeface="Aptos" pitchFamily="34" charset="-122"/>
-                <a:cs typeface="Aptos" pitchFamily="34" charset="-120"/>
-              </a:rPr>
-              <a:t>Gelecekte yapılabilecek bir geliştirme önerisi.</a:t>
-            </a:r>
-            <a:endParaRPr lang="en-US" sz="1550" dirty="0"/>
-          </a:p>
-          <a:p>
-            <a:r>
-              <a:rPr lang="en-US" sz="1550" dirty="0">
-                <a:solidFill>
-                  <a:srgbClr val="111827"/>
-                </a:solidFill>
-                <a:latin typeface="Aptos" pitchFamily="34" charset="0"/>
-                <a:ea typeface="Aptos" pitchFamily="34" charset="-122"/>
-                <a:cs typeface="Aptos" pitchFamily="34" charset="-120"/>
-              </a:rPr>
-              <a:t>Kullanılan veri kümesi, temel makaleler, model/kütüphane ve dokümantasyon kaynakları.</a:t>
-            </a:r>
-            <a:endParaRPr lang="en-US" sz="1550" dirty="0"/>
-          </a:p>
-          <a:p>
-            <a:r>
-              <a:rPr lang="en-US" sz="1550" dirty="0">
-                <a:solidFill>
-                  <a:srgbClr val="111827"/>
-                </a:solidFill>
-                <a:latin typeface="Aptos" pitchFamily="34" charset="0"/>
-                <a:ea typeface="Aptos" pitchFamily="34" charset="-122"/>
-                <a:cs typeface="Aptos" pitchFamily="34" charset="-120"/>
-              </a:rPr>
-              <a:t>Kaynak sayısı fazlaysa, bu slayt ikiye bölünebilir veya kaynaklar ek slayta taşınabilir.</a:t>
+            <a:pPr marL="285750" indent="-285750">
+              <a:buFont typeface="Arial" panose="020B0604020202020204" pitchFamily="34" charset="0"/>
+              <a:buChar char="•"/>
+            </a:pPr>
+            <a:r>
+              <a:rPr lang="tr-TR" sz="1600" dirty="0"/>
+              <a:t>ISIC2019 dataset</a:t>
+            </a:r>
+          </a:p>
+          <a:p>
+            <a:pPr marL="285750" indent="-285750">
+              <a:buFont typeface="Arial" panose="020B0604020202020204" pitchFamily="34" charset="0"/>
+              <a:buChar char="•"/>
+            </a:pPr>
+            <a:r>
+              <a:rPr lang="tr-TR" sz="1600" dirty="0"/>
+              <a:t>Vision Transformer literature (ViT, Swin, DeiT vs.)</a:t>
+            </a:r>
+          </a:p>
+          <a:p>
+            <a:pPr marL="285750" indent="-285750">
+              <a:buFont typeface="Arial" panose="020B0604020202020204" pitchFamily="34" charset="0"/>
+              <a:buChar char="•"/>
+            </a:pPr>
+            <a:r>
+              <a:rPr lang="tr-TR" sz="1600" dirty="0"/>
+              <a:t>PyTorch + timm library</a:t>
+            </a:r>
+          </a:p>
+          <a:p>
+            <a:pPr marL="285750" indent="-285750">
+              <a:buFont typeface="Arial" panose="020B0604020202020204" pitchFamily="34" charset="0"/>
+              <a:buChar char="•"/>
+            </a:pPr>
+            <a:r>
+              <a:rPr lang="tr-TR" sz="1600" dirty="0"/>
+              <a:t>IEEE / arXiv papers</a:t>
             </a:r>
             <a:endParaRPr lang="en-US" sz="1550" dirty="0"/>
           </a:p>
@@ -2460,9 +3674,6 @@
           <a:bodyPr wrap="square" lIns="0" tIns="0" rIns="0" bIns="0" rtlCol="0" anchor="ctr"/>
           <a:lstStyle/>
           <a:p>
-            <a:pPr marL="0" indent="0">
-              <a:buNone/>
-            </a:pPr>
             <a:r>
               <a:rPr lang="en-US" sz="850" dirty="0">
                 <a:solidFill>
@@ -2472,7 +3683,18 @@
                 <a:ea typeface="Aptos" pitchFamily="34" charset="-122"/>
                 <a:cs typeface="Aptos" pitchFamily="34" charset="-120"/>
               </a:rPr>
-              <a:t>Final Makale/Bildiri Sunumu  •  2/10</a:t>
+              <a:t>Final Makale/Bildiri Sunumu  •  2 /1</a:t>
+            </a:r>
+            <a:r>
+              <a:rPr lang="tr-TR" sz="850" dirty="0">
+                <a:solidFill>
+                  <a:srgbClr val="6B7280"/>
+                </a:solidFill>
+                <a:latin typeface="Aptos" pitchFamily="34" charset="0"/>
+                <a:ea typeface="Aptos" pitchFamily="34" charset="-122"/>
+                <a:cs typeface="Aptos" pitchFamily="34" charset="-120"/>
+              </a:rPr>
+              <a:t>2</a:t>
             </a:r>
             <a:endParaRPr lang="en-US" sz="850" dirty="0"/>
           </a:p>
@@ -2851,9 +4073,6 @@
           <a:bodyPr wrap="square" lIns="0" tIns="0" rIns="0" bIns="0" rtlCol="0" anchor="ctr"/>
           <a:lstStyle/>
           <a:p>
-            <a:pPr marL="0" indent="0">
-              <a:buNone/>
-            </a:pPr>
             <a:r>
               <a:rPr lang="en-US" sz="850" dirty="0">
                 <a:solidFill>
@@ -2863,7 +4082,18 @@
                 <a:ea typeface="Aptos" pitchFamily="34" charset="-122"/>
                 <a:cs typeface="Aptos" pitchFamily="34" charset="-120"/>
               </a:rPr>
-              <a:t>Final Makale/Bildiri Sunumu  •  3/10</a:t>
+              <a:t>Final Makale/Bildiri Sunumu  •  3 /1</a:t>
+            </a:r>
+            <a:r>
+              <a:rPr lang="tr-TR" sz="850" dirty="0">
+                <a:solidFill>
+                  <a:srgbClr val="6B7280"/>
+                </a:solidFill>
+                <a:latin typeface="Aptos" pitchFamily="34" charset="0"/>
+                <a:ea typeface="Aptos" pitchFamily="34" charset="-122"/>
+                <a:cs typeface="Aptos" pitchFamily="34" charset="-120"/>
+              </a:rPr>
+              <a:t>2</a:t>
             </a:r>
             <a:endParaRPr lang="en-US" sz="850" dirty="0"/>
           </a:p>
@@ -3300,9 +4530,6 @@
           <a:bodyPr wrap="square" lIns="0" tIns="0" rIns="0" bIns="0" rtlCol="0" anchor="ctr"/>
           <a:lstStyle/>
           <a:p>
-            <a:pPr marL="0" indent="0">
-              <a:buNone/>
-            </a:pPr>
             <a:r>
               <a:rPr lang="en-US" sz="850" dirty="0">
                 <a:solidFill>
@@ -3312,7 +4539,18 @@
                 <a:ea typeface="Aptos" pitchFamily="34" charset="-122"/>
                 <a:cs typeface="Aptos" pitchFamily="34" charset="-120"/>
               </a:rPr>
-              <a:t>Final Makale/Bildiri Sunumu  •  4/10</a:t>
+              <a:t>Final Makale/Bildiri Sunumu  •  4 /1</a:t>
+            </a:r>
+            <a:r>
+              <a:rPr lang="tr-TR" sz="850" dirty="0">
+                <a:solidFill>
+                  <a:srgbClr val="6B7280"/>
+                </a:solidFill>
+                <a:latin typeface="Aptos" pitchFamily="34" charset="0"/>
+                <a:ea typeface="Aptos" pitchFamily="34" charset="-122"/>
+                <a:cs typeface="Aptos" pitchFamily="34" charset="-120"/>
+              </a:rPr>
+              <a:t>2</a:t>
             </a:r>
             <a:endParaRPr lang="en-US" sz="850" dirty="0"/>
           </a:p>
@@ -3701,9 +4939,6 @@
           <a:bodyPr wrap="square" lIns="0" tIns="0" rIns="0" bIns="0" rtlCol="0" anchor="ctr"/>
           <a:lstStyle/>
           <a:p>
-            <a:pPr marL="0" indent="0">
-              <a:buNone/>
-            </a:pPr>
             <a:r>
               <a:rPr lang="en-US" sz="850" dirty="0">
                 <a:solidFill>
@@ -3713,7 +4948,18 @@
                 <a:ea typeface="Aptos" pitchFamily="34" charset="-122"/>
                 <a:cs typeface="Aptos" pitchFamily="34" charset="-120"/>
               </a:rPr>
-              <a:t>Final Makale/Bildiri Sunumu  •  5/10</a:t>
+              <a:t>Final Makale/Bildiri Sunumu  •  5 /1</a:t>
+            </a:r>
+            <a:r>
+              <a:rPr lang="tr-TR" sz="850" dirty="0">
+                <a:solidFill>
+                  <a:srgbClr val="6B7280"/>
+                </a:solidFill>
+                <a:latin typeface="Aptos" pitchFamily="34" charset="0"/>
+                <a:ea typeface="Aptos" pitchFamily="34" charset="-122"/>
+                <a:cs typeface="Aptos" pitchFamily="34" charset="-120"/>
+              </a:rPr>
+              <a:t>2</a:t>
             </a:r>
             <a:endParaRPr lang="en-US" sz="850" dirty="0"/>
           </a:p>
@@ -4026,7 +5272,29 @@
                 <a:ea typeface="Aptos Display" pitchFamily="34" charset="-122"/>
                 <a:cs typeface="Aptos Display" pitchFamily="34" charset="-120"/>
               </a:rPr>
-              <a:t>5. Bulgular</a:t>
+              <a:t>5. </a:t>
+            </a:r>
+            <a:r>
+              <a:rPr lang="en-US" sz="2400" b="1" dirty="0" err="1">
+                <a:solidFill>
+                  <a:srgbClr val="1E2A5A"/>
+                </a:solidFill>
+                <a:latin typeface="Aptos Display" pitchFamily="34" charset="0"/>
+                <a:ea typeface="Aptos Display" pitchFamily="34" charset="-122"/>
+                <a:cs typeface="Aptos Display" pitchFamily="34" charset="-120"/>
+              </a:rPr>
+              <a:t>Bulgular</a:t>
+            </a:r>
+            <a:r>
+              <a:rPr lang="tr-TR" sz="2400" b="1" dirty="0">
+                <a:solidFill>
+                  <a:srgbClr val="1E2A5A"/>
+                </a:solidFill>
+                <a:latin typeface="Aptos Display" pitchFamily="34" charset="0"/>
+                <a:ea typeface="Aptos Display" pitchFamily="34" charset="-122"/>
+                <a:cs typeface="Aptos Display" pitchFamily="34" charset="-120"/>
+              </a:rPr>
+              <a:t> - 1</a:t>
             </a:r>
             <a:endParaRPr lang="en-US" sz="2400" dirty="0"/>
           </a:p>
@@ -4122,9 +5390,6 @@
           <a:bodyPr wrap="square" lIns="0" tIns="0" rIns="0" bIns="0" rtlCol="0" anchor="ctr"/>
           <a:lstStyle/>
           <a:p>
-            <a:pPr marL="0" indent="0">
-              <a:buNone/>
-            </a:pPr>
             <a:r>
               <a:rPr lang="en-US" sz="850" dirty="0">
                 <a:solidFill>
@@ -4134,38 +5399,10 @@
                 <a:ea typeface="Aptos" pitchFamily="34" charset="-122"/>
                 <a:cs typeface="Aptos" pitchFamily="34" charset="-120"/>
               </a:rPr>
-              <a:t>Final Makale/Bildiri Sunumu  •  6/10</a:t>
-            </a:r>
-            <a:endParaRPr lang="en-US" sz="850" dirty="0"/>
-          </a:p>
-        </p:txBody>
-      </p:sp>
-      <p:sp>
-        <p:nvSpPr>
-          <p:cNvPr id="7" name="Text 5"/>
-          <p:cNvSpPr/>
-          <p:nvPr/>
-        </p:nvSpPr>
-        <p:spPr>
-          <a:xfrm>
-            <a:off x="6995160" y="6510528"/>
-            <a:ext cx="4572000" cy="201168"/>
-          </a:xfrm>
-          <a:prstGeom prst="rect">
-            <a:avLst/>
-          </a:prstGeom>
-          <a:noFill/>
-          <a:ln/>
-        </p:spPr>
-        <p:txBody>
-          <a:bodyPr wrap="square" lIns="0" tIns="0" rIns="0" bIns="0" rtlCol="0" anchor="ctr"/>
-          <a:lstStyle/>
-          <a:p>
-            <a:pPr marL="0" indent="0" algn="r">
-              <a:buNone/>
-            </a:pPr>
-            <a:r>
-              <a:rPr lang="en-US" sz="850" dirty="0">
+              <a:t>Final Makale/Bildiri Sunumu  •  6 /1</a:t>
+            </a:r>
+            <a:r>
+              <a:rPr lang="tr-TR" sz="850" dirty="0">
                 <a:solidFill>
                   <a:srgbClr val="6B7280"/>
                 </a:solidFill>
@@ -4173,6 +5410,45 @@
                 <a:ea typeface="Aptos" pitchFamily="34" charset="-122"/>
                 <a:cs typeface="Aptos" pitchFamily="34" charset="-120"/>
               </a:rPr>
+              <a:t>2</a:t>
+            </a:r>
+            <a:endParaRPr lang="en-US" sz="850" dirty="0"/>
+          </a:p>
+        </p:txBody>
+      </p:sp>
+      <p:sp>
+        <p:nvSpPr>
+          <p:cNvPr id="7" name="Text 5"/>
+          <p:cNvSpPr/>
+          <p:nvPr/>
+        </p:nvSpPr>
+        <p:spPr>
+          <a:xfrm>
+            <a:off x="6995160" y="6510528"/>
+            <a:ext cx="4572000" cy="201168"/>
+          </a:xfrm>
+          <a:prstGeom prst="rect">
+            <a:avLst/>
+          </a:prstGeom>
+          <a:noFill/>
+          <a:ln/>
+        </p:spPr>
+        <p:txBody>
+          <a:bodyPr wrap="square" lIns="0" tIns="0" rIns="0" bIns="0" rtlCol="0" anchor="ctr"/>
+          <a:lstStyle/>
+          <a:p>
+            <a:pPr marL="0" indent="0" algn="r">
+              <a:buNone/>
+            </a:pPr>
+            <a:r>
+              <a:rPr lang="en-US" sz="850" dirty="0">
+                <a:solidFill>
+                  <a:srgbClr val="6B7280"/>
+                </a:solidFill>
+                <a:latin typeface="Aptos" pitchFamily="34" charset="0"/>
+                <a:ea typeface="Aptos" pitchFamily="34" charset="-122"/>
+                <a:cs typeface="Aptos" pitchFamily="34" charset="-120"/>
+              </a:rPr>
               <a:t>İleri Bilgisayarlı Görme ve Derin Öğrenme</a:t>
             </a:r>
             <a:endParaRPr lang="en-US" sz="850" dirty="0"/>
@@ -4202,58 +5478,91 @@
           </a:bodyPr>
           <a:lstStyle/>
           <a:p>
-            <a:r>
-              <a:rPr lang="en-US" sz="1550" dirty="0">
-                <a:solidFill>
-                  <a:srgbClr val="111827"/>
-                </a:solidFill>
-                <a:latin typeface="Aptos" pitchFamily="34" charset="0"/>
-                <a:ea typeface="Aptos" pitchFamily="34" charset="-122"/>
-                <a:cs typeface="Aptos" pitchFamily="34" charset="-120"/>
-              </a:rPr>
-              <a:t>Elde edilen temel performans sonuçları.</a:t>
-            </a:r>
-            <a:endParaRPr lang="en-US" sz="1550" dirty="0"/>
-          </a:p>
-          <a:p>
-            <a:r>
-              <a:rPr lang="en-US" sz="1550" dirty="0">
-                <a:solidFill>
-                  <a:srgbClr val="111827"/>
-                </a:solidFill>
-                <a:latin typeface="Aptos" pitchFamily="34" charset="0"/>
-                <a:ea typeface="Aptos" pitchFamily="34" charset="-122"/>
-                <a:cs typeface="Aptos" pitchFamily="34" charset="-120"/>
-              </a:rPr>
-              <a:t>Eğitim/doğrulama grafikleri veya confusion matrix gibi destekleyici çıktılar.</a:t>
-            </a:r>
-            <a:endParaRPr lang="en-US" sz="1550" dirty="0"/>
-          </a:p>
-          <a:p>
-            <a:r>
-              <a:rPr lang="en-US" sz="1550" dirty="0">
-                <a:solidFill>
-                  <a:srgbClr val="111827"/>
-                </a:solidFill>
-                <a:latin typeface="Aptos" pitchFamily="34" charset="0"/>
-                <a:ea typeface="Aptos" pitchFamily="34" charset="-122"/>
-                <a:cs typeface="Aptos" pitchFamily="34" charset="-120"/>
-              </a:rPr>
-              <a:t>Varsa önceki ödevlerden gelen sonuçlarla birlikte düzenlenmiş karşılaştırma tablosu.</a:t>
-            </a:r>
-            <a:endParaRPr lang="en-US" sz="1550" dirty="0"/>
-          </a:p>
-          <a:p>
-            <a:r>
-              <a:rPr lang="en-US" sz="1550" dirty="0">
-                <a:solidFill>
-                  <a:srgbClr val="111827"/>
-                </a:solidFill>
-                <a:latin typeface="Aptos" pitchFamily="34" charset="0"/>
-                <a:ea typeface="Aptos" pitchFamily="34" charset="-122"/>
-                <a:cs typeface="Aptos" pitchFamily="34" charset="-120"/>
-              </a:rPr>
-              <a:t>Sonuçların yalnızca sayısal değer olarak verilmemesi; kısa yorumla desteklenmesi.</a:t>
+            <a:pPr marL="285750" indent="-285750">
+              <a:buFont typeface="Arial" panose="020B0604020202020204" pitchFamily="34" charset="0"/>
+              <a:buChar char="•"/>
+            </a:pPr>
+            <a:r>
+              <a:rPr lang="tr-TR" sz="1600" dirty="0"/>
+              <a:t>ISIC2019 üzerinde 9 ViT modeli test edildi </a:t>
+            </a:r>
+          </a:p>
+          <a:p>
+            <a:pPr marL="285750" indent="-285750">
+              <a:buFont typeface="Arial" panose="020B0604020202020204" pitchFamily="34" charset="0"/>
+              <a:buChar char="•"/>
+            </a:pPr>
+            <a:r>
+              <a:rPr lang="tr-TR" sz="1600" dirty="0"/>
+              <a:t>En iyi model: </a:t>
+            </a:r>
+            <a:r>
+              <a:rPr lang="tr-TR" sz="1600" b="1" dirty="0"/>
+              <a:t>Swin-Small</a:t>
+            </a:r>
+          </a:p>
+          <a:p>
+            <a:pPr marL="742950" lvl="1" indent="-285750">
+              <a:buFont typeface="Arial" panose="020B0604020202020204" pitchFamily="34" charset="0"/>
+              <a:buChar char="•"/>
+            </a:pPr>
+            <a:r>
+              <a:rPr lang="tr-TR" sz="1600" dirty="0"/>
+              <a:t>Accuracy: </a:t>
+            </a:r>
+            <a:r>
+              <a:rPr lang="tr-TR" sz="1600" b="1" dirty="0"/>
+              <a:t>%88.93</a:t>
+            </a:r>
+            <a:r>
+              <a:rPr lang="tr-TR" sz="1600" dirty="0"/>
+              <a:t> </a:t>
+            </a:r>
+          </a:p>
+          <a:p>
+            <a:pPr marL="742950" lvl="1" indent="-285750">
+              <a:buFont typeface="Arial" panose="020B0604020202020204" pitchFamily="34" charset="0"/>
+              <a:buChar char="•"/>
+            </a:pPr>
+            <a:r>
+              <a:rPr lang="tr-TR" sz="1600" dirty="0"/>
+              <a:t>Macro-F1: </a:t>
+            </a:r>
+            <a:r>
+              <a:rPr lang="tr-TR" sz="1600" b="1" dirty="0"/>
+              <a:t>0.8435</a:t>
+            </a:r>
+            <a:r>
+              <a:rPr lang="tr-TR" sz="1600" dirty="0"/>
+              <a:t> </a:t>
+            </a:r>
+          </a:p>
+          <a:p>
+            <a:pPr marL="285750" indent="-285750">
+              <a:buFont typeface="Arial" panose="020B0604020202020204" pitchFamily="34" charset="0"/>
+              <a:buChar char="•"/>
+            </a:pPr>
+            <a:r>
+              <a:rPr lang="tr-TR" sz="1600" dirty="0"/>
+              <a:t>En zayıf: </a:t>
+            </a:r>
+            <a:r>
+              <a:rPr lang="tr-TR" sz="1600" b="1" dirty="0"/>
+              <a:t>MobileViT-XS</a:t>
+            </a:r>
+            <a:r>
+              <a:rPr lang="tr-TR" sz="1600" dirty="0"/>
+              <a:t> </a:t>
+            </a:r>
+          </a:p>
+          <a:p>
+            <a:pPr marL="285750" indent="-285750">
+              <a:buFont typeface="Arial" panose="020B0604020202020204" pitchFamily="34" charset="0"/>
+              <a:buChar char="•"/>
+            </a:pPr>
+            <a:r>
+              <a:rPr lang="tr-TR" sz="1600" dirty="0"/>
+              <a:t>Genel olarak ViT modelleri güçlü performans gösterdi MEL ↔ NV en çok karışan sınıflar</a:t>
             </a:r>
             <a:endParaRPr lang="en-US" sz="1550" dirty="0"/>
           </a:p>
@@ -4343,6 +5652,876 @@
 </file>
 
 <file path=ppt/slides/slide7.xml><?xml version="1.0" encoding="utf-8"?>
+<p:sld xmlns:a="http://schemas.openxmlformats.org/drawingml/2006/main" xmlns:r="http://schemas.openxmlformats.org/officeDocument/2006/relationships" xmlns:p="http://schemas.openxmlformats.org/presentationml/2006/main">
+  <p:cSld>
+    <p:bg>
+      <p:bgPr>
+        <a:solidFill>
+          <a:srgbClr val="F8FAFC"/>
+        </a:solidFill>
+        <a:effectLst/>
+      </p:bgPr>
+    </p:bg>
+    <p:spTree>
+      <p:nvGrpSpPr>
+        <p:cNvPr id="1" name="">
+          <a:extLst>
+            <a:ext uri="{FF2B5EF4-FFF2-40B4-BE49-F238E27FC236}">
+              <a16:creationId xmlns:a16="http://schemas.microsoft.com/office/drawing/2014/main" id="{6DC11289-9FAE-05D1-69F7-B2D7C7B698F5}"/>
+            </a:ext>
+          </a:extLst>
+        </p:cNvPr>
+        <p:cNvGrpSpPr/>
+        <p:nvPr/>
+      </p:nvGrpSpPr>
+      <p:grpSpPr>
+        <a:xfrm>
+          <a:off x="0" y="0"/>
+          <a:ext cx="0" cy="0"/>
+          <a:chOff x="0" y="0"/>
+          <a:chExt cx="0" cy="0"/>
+        </a:xfrm>
+      </p:grpSpPr>
+      <p:sp>
+        <p:nvSpPr>
+          <p:cNvPr id="2" name="Shape 0">
+            <a:extLst>
+              <a:ext uri="{FF2B5EF4-FFF2-40B4-BE49-F238E27FC236}">
+                <a16:creationId xmlns:a16="http://schemas.microsoft.com/office/drawing/2014/main" id="{7D080AD5-962A-9871-1520-D1AE245D0823}"/>
+              </a:ext>
+            </a:extLst>
+          </p:cNvPr>
+          <p:cNvSpPr/>
+          <p:nvPr/>
+        </p:nvSpPr>
+        <p:spPr>
+          <a:xfrm>
+            <a:off x="0" y="0"/>
+            <a:ext cx="12191695" cy="146304"/>
+          </a:xfrm>
+          <a:prstGeom prst="rect">
+            <a:avLst/>
+          </a:prstGeom>
+          <a:solidFill>
+            <a:srgbClr val="1E2A5A"/>
+          </a:solidFill>
+          <a:ln w="12700">
+            <a:solidFill>
+              <a:srgbClr val="1E2A5A"/>
+            </a:solidFill>
+            <a:prstDash val="solid"/>
+          </a:ln>
+        </p:spPr>
+        <p:txBody>
+          <a:bodyPr/>
+          <a:lstStyle/>
+          <a:p>
+            <a:endParaRPr lang="tr-TR"/>
+          </a:p>
+        </p:txBody>
+      </p:sp>
+      <p:sp>
+        <p:nvSpPr>
+          <p:cNvPr id="3" name="Text 1">
+            <a:extLst>
+              <a:ext uri="{FF2B5EF4-FFF2-40B4-BE49-F238E27FC236}">
+                <a16:creationId xmlns:a16="http://schemas.microsoft.com/office/drawing/2014/main" id="{3AE12428-4462-C0D5-F993-334758C62007}"/>
+              </a:ext>
+            </a:extLst>
+          </p:cNvPr>
+          <p:cNvSpPr/>
+          <p:nvPr/>
+        </p:nvSpPr>
+        <p:spPr>
+          <a:xfrm>
+            <a:off x="594360" y="438912"/>
+            <a:ext cx="8138160" cy="384048"/>
+          </a:xfrm>
+          <a:prstGeom prst="rect">
+            <a:avLst/>
+          </a:prstGeom>
+          <a:noFill/>
+          <a:ln/>
+        </p:spPr>
+        <p:txBody>
+          <a:bodyPr wrap="square" lIns="0" tIns="0" rIns="0" bIns="0" rtlCol="0" anchor="ctr"/>
+          <a:lstStyle/>
+          <a:p>
+            <a:pPr marL="0" indent="0">
+              <a:buNone/>
+            </a:pPr>
+            <a:r>
+              <a:rPr lang="tr-TR" sz="2400" b="1" dirty="0">
+                <a:solidFill>
+                  <a:srgbClr val="1E2A5A"/>
+                </a:solidFill>
+                <a:latin typeface="Aptos Display" pitchFamily="34" charset="0"/>
+                <a:ea typeface="Aptos Display" pitchFamily="34" charset="-122"/>
+                <a:cs typeface="Aptos Display" pitchFamily="34" charset="-120"/>
+              </a:rPr>
+              <a:t>6</a:t>
+            </a:r>
+            <a:r>
+              <a:rPr lang="en-US" sz="2400" b="1" dirty="0">
+                <a:solidFill>
+                  <a:srgbClr val="1E2A5A"/>
+                </a:solidFill>
+                <a:latin typeface="Aptos Display" pitchFamily="34" charset="0"/>
+                <a:ea typeface="Aptos Display" pitchFamily="34" charset="-122"/>
+                <a:cs typeface="Aptos Display" pitchFamily="34" charset="-120"/>
+              </a:rPr>
+              <a:t>. </a:t>
+            </a:r>
+            <a:r>
+              <a:rPr lang="en-US" sz="2400" b="1" dirty="0" err="1">
+                <a:solidFill>
+                  <a:srgbClr val="1E2A5A"/>
+                </a:solidFill>
+                <a:latin typeface="Aptos Display" pitchFamily="34" charset="0"/>
+                <a:ea typeface="Aptos Display" pitchFamily="34" charset="-122"/>
+                <a:cs typeface="Aptos Display" pitchFamily="34" charset="-120"/>
+              </a:rPr>
+              <a:t>Bulgular</a:t>
+            </a:r>
+            <a:r>
+              <a:rPr lang="tr-TR" sz="2400" b="1" dirty="0">
+                <a:solidFill>
+                  <a:srgbClr val="1E2A5A"/>
+                </a:solidFill>
+                <a:latin typeface="Aptos Display" pitchFamily="34" charset="0"/>
+                <a:ea typeface="Aptos Display" pitchFamily="34" charset="-122"/>
+                <a:cs typeface="Aptos Display" pitchFamily="34" charset="-120"/>
+              </a:rPr>
+              <a:t> - 2</a:t>
+            </a:r>
+            <a:endParaRPr lang="en-US" sz="2400" dirty="0"/>
+          </a:p>
+        </p:txBody>
+      </p:sp>
+      <p:sp>
+        <p:nvSpPr>
+          <p:cNvPr id="4" name="Text 2">
+            <a:extLst>
+              <a:ext uri="{FF2B5EF4-FFF2-40B4-BE49-F238E27FC236}">
+                <a16:creationId xmlns:a16="http://schemas.microsoft.com/office/drawing/2014/main" id="{C79FEC7C-5B6E-FD6F-8C23-1AECE0A6EA89}"/>
+              </a:ext>
+            </a:extLst>
+          </p:cNvPr>
+          <p:cNvSpPr/>
+          <p:nvPr/>
+        </p:nvSpPr>
+        <p:spPr>
+          <a:xfrm>
+            <a:off x="612648" y="896112"/>
+            <a:ext cx="9966960" cy="256032"/>
+          </a:xfrm>
+          <a:prstGeom prst="rect">
+            <a:avLst/>
+          </a:prstGeom>
+          <a:noFill/>
+          <a:ln/>
+        </p:spPr>
+        <p:txBody>
+          <a:bodyPr wrap="square" lIns="0" tIns="0" rIns="0" bIns="0" rtlCol="0" anchor="ctr"/>
+          <a:lstStyle/>
+          <a:p>
+            <a:pPr marL="0" indent="0">
+              <a:buNone/>
+            </a:pPr>
+            <a:r>
+              <a:rPr lang="en-US" sz="1050" i="1" dirty="0">
+                <a:solidFill>
+                  <a:srgbClr val="6B7280"/>
+                </a:solidFill>
+                <a:latin typeface="Aptos" pitchFamily="34" charset="0"/>
+                <a:ea typeface="Aptos" pitchFamily="34" charset="-122"/>
+                <a:cs typeface="Aptos" pitchFamily="34" charset="-120"/>
+              </a:rPr>
+              <a:t>Ana sonuçları tablo, grafik veya kısa metinle sunun.</a:t>
+            </a:r>
+            <a:endParaRPr lang="en-US" sz="1050" dirty="0"/>
+          </a:p>
+        </p:txBody>
+      </p:sp>
+      <p:sp>
+        <p:nvSpPr>
+          <p:cNvPr id="5" name="Shape 3">
+            <a:extLst>
+              <a:ext uri="{FF2B5EF4-FFF2-40B4-BE49-F238E27FC236}">
+                <a16:creationId xmlns:a16="http://schemas.microsoft.com/office/drawing/2014/main" id="{DD378D05-A88F-F20A-D78C-D1B4E140FAB9}"/>
+              </a:ext>
+            </a:extLst>
+          </p:cNvPr>
+          <p:cNvSpPr/>
+          <p:nvPr/>
+        </p:nvSpPr>
+        <p:spPr>
+          <a:xfrm>
+            <a:off x="594360" y="1261872"/>
+            <a:ext cx="10972800" cy="0"/>
+          </a:xfrm>
+          <a:prstGeom prst="line">
+            <a:avLst/>
+          </a:prstGeom>
+          <a:noFill/>
+          <a:ln w="9525">
+            <a:solidFill>
+              <a:srgbClr val="CBD5E1"/>
+            </a:solidFill>
+            <a:prstDash val="solid"/>
+          </a:ln>
+        </p:spPr>
+        <p:txBody>
+          <a:bodyPr/>
+          <a:lstStyle/>
+          <a:p>
+            <a:endParaRPr lang="tr-TR"/>
+          </a:p>
+        </p:txBody>
+      </p:sp>
+      <p:sp>
+        <p:nvSpPr>
+          <p:cNvPr id="6" name="Text 4">
+            <a:extLst>
+              <a:ext uri="{FF2B5EF4-FFF2-40B4-BE49-F238E27FC236}">
+                <a16:creationId xmlns:a16="http://schemas.microsoft.com/office/drawing/2014/main" id="{0089F43E-BD9B-79A9-7E81-7DC987CB101D}"/>
+              </a:ext>
+            </a:extLst>
+          </p:cNvPr>
+          <p:cNvSpPr/>
+          <p:nvPr/>
+        </p:nvSpPr>
+        <p:spPr>
+          <a:xfrm>
+            <a:off x="594360" y="6510528"/>
+            <a:ext cx="5029200" cy="201168"/>
+          </a:xfrm>
+          <a:prstGeom prst="rect">
+            <a:avLst/>
+          </a:prstGeom>
+          <a:noFill/>
+          <a:ln/>
+        </p:spPr>
+        <p:txBody>
+          <a:bodyPr wrap="square" lIns="0" tIns="0" rIns="0" bIns="0" rtlCol="0" anchor="ctr"/>
+          <a:lstStyle/>
+          <a:p>
+            <a:r>
+              <a:rPr lang="en-US" sz="850" dirty="0">
+                <a:solidFill>
+                  <a:srgbClr val="6B7280"/>
+                </a:solidFill>
+                <a:latin typeface="Aptos" pitchFamily="34" charset="0"/>
+                <a:ea typeface="Aptos" pitchFamily="34" charset="-122"/>
+                <a:cs typeface="Aptos" pitchFamily="34" charset="-120"/>
+              </a:rPr>
+              <a:t>Final Makale/Bildiri Sunumu  •  </a:t>
+            </a:r>
+            <a:r>
+              <a:rPr lang="tr-TR" sz="850" dirty="0">
+                <a:solidFill>
+                  <a:srgbClr val="6B7280"/>
+                </a:solidFill>
+                <a:latin typeface="Aptos" pitchFamily="34" charset="0"/>
+                <a:ea typeface="Aptos" pitchFamily="34" charset="-122"/>
+                <a:cs typeface="Aptos" pitchFamily="34" charset="-120"/>
+              </a:rPr>
+              <a:t>7</a:t>
+            </a:r>
+            <a:r>
+              <a:rPr lang="en-US" sz="850" dirty="0">
+                <a:solidFill>
+                  <a:srgbClr val="6B7280"/>
+                </a:solidFill>
+                <a:latin typeface="Aptos" pitchFamily="34" charset="0"/>
+                <a:ea typeface="Aptos" pitchFamily="34" charset="-122"/>
+                <a:cs typeface="Aptos" pitchFamily="34" charset="-120"/>
+              </a:rPr>
+              <a:t> /1</a:t>
+            </a:r>
+            <a:r>
+              <a:rPr lang="tr-TR" sz="850" dirty="0">
+                <a:solidFill>
+                  <a:srgbClr val="6B7280"/>
+                </a:solidFill>
+                <a:latin typeface="Aptos" pitchFamily="34" charset="0"/>
+                <a:ea typeface="Aptos" pitchFamily="34" charset="-122"/>
+                <a:cs typeface="Aptos" pitchFamily="34" charset="-120"/>
+              </a:rPr>
+              <a:t>2</a:t>
+            </a:r>
+            <a:endParaRPr lang="en-US" sz="850" dirty="0"/>
+          </a:p>
+        </p:txBody>
+      </p:sp>
+      <p:sp>
+        <p:nvSpPr>
+          <p:cNvPr id="7" name="Text 5">
+            <a:extLst>
+              <a:ext uri="{FF2B5EF4-FFF2-40B4-BE49-F238E27FC236}">
+                <a16:creationId xmlns:a16="http://schemas.microsoft.com/office/drawing/2014/main" id="{63B3E9EA-DE04-0639-310C-D4CE0886807E}"/>
+              </a:ext>
+            </a:extLst>
+          </p:cNvPr>
+          <p:cNvSpPr/>
+          <p:nvPr/>
+        </p:nvSpPr>
+        <p:spPr>
+          <a:xfrm>
+            <a:off x="6995160" y="6510528"/>
+            <a:ext cx="4572000" cy="201168"/>
+          </a:xfrm>
+          <a:prstGeom prst="rect">
+            <a:avLst/>
+          </a:prstGeom>
+          <a:noFill/>
+          <a:ln/>
+        </p:spPr>
+        <p:txBody>
+          <a:bodyPr wrap="square" lIns="0" tIns="0" rIns="0" bIns="0" rtlCol="0" anchor="ctr"/>
+          <a:lstStyle/>
+          <a:p>
+            <a:pPr marL="0" indent="0" algn="r">
+              <a:buNone/>
+            </a:pPr>
+            <a:r>
+              <a:rPr lang="en-US" sz="850" dirty="0">
+                <a:solidFill>
+                  <a:srgbClr val="6B7280"/>
+                </a:solidFill>
+                <a:latin typeface="Aptos" pitchFamily="34" charset="0"/>
+                <a:ea typeface="Aptos" pitchFamily="34" charset="-122"/>
+                <a:cs typeface="Aptos" pitchFamily="34" charset="-120"/>
+              </a:rPr>
+              <a:t>İleri Bilgisayarlı Görme ve Derin Öğrenme</a:t>
+            </a:r>
+            <a:endParaRPr lang="en-US" sz="850" dirty="0"/>
+          </a:p>
+        </p:txBody>
+      </p:sp>
+      <p:sp>
+        <p:nvSpPr>
+          <p:cNvPr id="8" name="Text 6">
+            <a:extLst>
+              <a:ext uri="{FF2B5EF4-FFF2-40B4-BE49-F238E27FC236}">
+                <a16:creationId xmlns:a16="http://schemas.microsoft.com/office/drawing/2014/main" id="{1D2F096B-46BB-6999-B0E2-4FA54F284F3E}"/>
+              </a:ext>
+            </a:extLst>
+          </p:cNvPr>
+          <p:cNvSpPr/>
+          <p:nvPr/>
+        </p:nvSpPr>
+        <p:spPr>
+          <a:xfrm>
+            <a:off x="749808" y="1600200"/>
+            <a:ext cx="10378440" cy="3200400"/>
+          </a:xfrm>
+          <a:prstGeom prst="rect">
+            <a:avLst/>
+          </a:prstGeom>
+          <a:noFill/>
+          <a:ln/>
+        </p:spPr>
+        <p:txBody>
+          <a:bodyPr wrap="square" lIns="254" tIns="254" rIns="254" bIns="254" rtlCol="0" anchor="ctr">
+            <a:normAutofit/>
+          </a:bodyPr>
+          <a:lstStyle/>
+          <a:p>
+            <a:endParaRPr lang="en-US" sz="1550" dirty="0"/>
+          </a:p>
+        </p:txBody>
+      </p:sp>
+      <p:pic>
+        <p:nvPicPr>
+          <p:cNvPr id="11" name="Picture 10">
+            <a:extLst>
+              <a:ext uri="{FF2B5EF4-FFF2-40B4-BE49-F238E27FC236}">
+                <a16:creationId xmlns:a16="http://schemas.microsoft.com/office/drawing/2014/main" id="{F3842B5A-D022-4B27-2F71-EC37951C9269}"/>
+              </a:ext>
+            </a:extLst>
+          </p:cNvPr>
+          <p:cNvPicPr>
+            <a:picLocks noChangeAspect="1"/>
+          </p:cNvPicPr>
+          <p:nvPr/>
+        </p:nvPicPr>
+        <p:blipFill>
+          <a:blip r:embed="rId3"/>
+          <a:stretch>
+            <a:fillRect/>
+          </a:stretch>
+        </p:blipFill>
+        <p:spPr>
+          <a:xfrm>
+            <a:off x="612648" y="1381434"/>
+            <a:ext cx="6581782" cy="4907036"/>
+          </a:xfrm>
+          <a:prstGeom prst="rect">
+            <a:avLst/>
+          </a:prstGeom>
+        </p:spPr>
+      </p:pic>
+    </p:spTree>
+    <p:extLst>
+      <p:ext uri="{BB962C8B-B14F-4D97-AF65-F5344CB8AC3E}">
+        <p14:creationId xmlns:p14="http://schemas.microsoft.com/office/powerpoint/2010/main" val="2593739947"/>
+      </p:ext>
+    </p:extLst>
+  </p:cSld>
+  <p:clrMapOvr>
+    <a:masterClrMapping/>
+  </p:clrMapOvr>
+</p:sld>
+</file>
+
+<file path=ppt/slides/slide8.xml><?xml version="1.0" encoding="utf-8"?>
+<p:sld xmlns:a="http://schemas.openxmlformats.org/drawingml/2006/main" xmlns:r="http://schemas.openxmlformats.org/officeDocument/2006/relationships" xmlns:p="http://schemas.openxmlformats.org/presentationml/2006/main">
+  <p:cSld>
+    <p:bg>
+      <p:bgPr>
+        <a:solidFill>
+          <a:srgbClr val="F8FAFC"/>
+        </a:solidFill>
+        <a:effectLst/>
+      </p:bgPr>
+    </p:bg>
+    <p:spTree>
+      <p:nvGrpSpPr>
+        <p:cNvPr id="1" name="">
+          <a:extLst>
+            <a:ext uri="{FF2B5EF4-FFF2-40B4-BE49-F238E27FC236}">
+              <a16:creationId xmlns:a16="http://schemas.microsoft.com/office/drawing/2014/main" id="{4E5AB49D-CA84-1A43-1FF6-76522EA96451}"/>
+            </a:ext>
+          </a:extLst>
+        </p:cNvPr>
+        <p:cNvGrpSpPr/>
+        <p:nvPr/>
+      </p:nvGrpSpPr>
+      <p:grpSpPr>
+        <a:xfrm>
+          <a:off x="0" y="0"/>
+          <a:ext cx="0" cy="0"/>
+          <a:chOff x="0" y="0"/>
+          <a:chExt cx="0" cy="0"/>
+        </a:xfrm>
+      </p:grpSpPr>
+      <p:sp>
+        <p:nvSpPr>
+          <p:cNvPr id="2" name="Shape 0">
+            <a:extLst>
+              <a:ext uri="{FF2B5EF4-FFF2-40B4-BE49-F238E27FC236}">
+                <a16:creationId xmlns:a16="http://schemas.microsoft.com/office/drawing/2014/main" id="{353DCE8E-F538-0594-DBA3-FFF5D1F2DFA5}"/>
+              </a:ext>
+            </a:extLst>
+          </p:cNvPr>
+          <p:cNvSpPr/>
+          <p:nvPr/>
+        </p:nvSpPr>
+        <p:spPr>
+          <a:xfrm>
+            <a:off x="0" y="0"/>
+            <a:ext cx="12191695" cy="146304"/>
+          </a:xfrm>
+          <a:prstGeom prst="rect">
+            <a:avLst/>
+          </a:prstGeom>
+          <a:solidFill>
+            <a:srgbClr val="1E2A5A"/>
+          </a:solidFill>
+          <a:ln w="12700">
+            <a:solidFill>
+              <a:srgbClr val="1E2A5A"/>
+            </a:solidFill>
+            <a:prstDash val="solid"/>
+          </a:ln>
+        </p:spPr>
+        <p:txBody>
+          <a:bodyPr/>
+          <a:lstStyle/>
+          <a:p>
+            <a:endParaRPr lang="tr-TR"/>
+          </a:p>
+        </p:txBody>
+      </p:sp>
+      <p:sp>
+        <p:nvSpPr>
+          <p:cNvPr id="3" name="Text 1">
+            <a:extLst>
+              <a:ext uri="{FF2B5EF4-FFF2-40B4-BE49-F238E27FC236}">
+                <a16:creationId xmlns:a16="http://schemas.microsoft.com/office/drawing/2014/main" id="{0420AA58-E412-3F69-16BD-90B602B12AE3}"/>
+              </a:ext>
+            </a:extLst>
+          </p:cNvPr>
+          <p:cNvSpPr/>
+          <p:nvPr/>
+        </p:nvSpPr>
+        <p:spPr>
+          <a:xfrm>
+            <a:off x="594360" y="438912"/>
+            <a:ext cx="8138160" cy="384048"/>
+          </a:xfrm>
+          <a:prstGeom prst="rect">
+            <a:avLst/>
+          </a:prstGeom>
+          <a:noFill/>
+          <a:ln/>
+        </p:spPr>
+        <p:txBody>
+          <a:bodyPr wrap="square" lIns="0" tIns="0" rIns="0" bIns="0" rtlCol="0" anchor="ctr"/>
+          <a:lstStyle/>
+          <a:p>
+            <a:pPr marL="0" indent="0">
+              <a:buNone/>
+            </a:pPr>
+            <a:r>
+              <a:rPr lang="tr-TR" sz="2400" b="1" dirty="0">
+                <a:solidFill>
+                  <a:srgbClr val="1E2A5A"/>
+                </a:solidFill>
+                <a:latin typeface="Aptos Display" pitchFamily="34" charset="0"/>
+                <a:ea typeface="Aptos Display" pitchFamily="34" charset="-122"/>
+                <a:cs typeface="Aptos Display" pitchFamily="34" charset="-120"/>
+              </a:rPr>
+              <a:t>7</a:t>
+            </a:r>
+            <a:r>
+              <a:rPr lang="en-US" sz="2400" b="1" dirty="0">
+                <a:solidFill>
+                  <a:srgbClr val="1E2A5A"/>
+                </a:solidFill>
+                <a:latin typeface="Aptos Display" pitchFamily="34" charset="0"/>
+                <a:ea typeface="Aptos Display" pitchFamily="34" charset="-122"/>
+                <a:cs typeface="Aptos Display" pitchFamily="34" charset="-120"/>
+              </a:rPr>
+              <a:t>. </a:t>
+            </a:r>
+            <a:r>
+              <a:rPr lang="en-US" sz="2400" b="1" dirty="0" err="1">
+                <a:solidFill>
+                  <a:srgbClr val="1E2A5A"/>
+                </a:solidFill>
+                <a:latin typeface="Aptos Display" pitchFamily="34" charset="0"/>
+                <a:ea typeface="Aptos Display" pitchFamily="34" charset="-122"/>
+                <a:cs typeface="Aptos Display" pitchFamily="34" charset="-120"/>
+              </a:rPr>
+              <a:t>Bulgular</a:t>
+            </a:r>
+            <a:r>
+              <a:rPr lang="tr-TR" sz="2400" b="1" dirty="0">
+                <a:solidFill>
+                  <a:srgbClr val="1E2A5A"/>
+                </a:solidFill>
+                <a:latin typeface="Aptos Display" pitchFamily="34" charset="0"/>
+                <a:ea typeface="Aptos Display" pitchFamily="34" charset="-122"/>
+                <a:cs typeface="Aptos Display" pitchFamily="34" charset="-120"/>
+              </a:rPr>
+              <a:t> - 3</a:t>
+            </a:r>
+            <a:endParaRPr lang="en-US" sz="2400" dirty="0"/>
+          </a:p>
+        </p:txBody>
+      </p:sp>
+      <p:sp>
+        <p:nvSpPr>
+          <p:cNvPr id="4" name="Text 2">
+            <a:extLst>
+              <a:ext uri="{FF2B5EF4-FFF2-40B4-BE49-F238E27FC236}">
+                <a16:creationId xmlns:a16="http://schemas.microsoft.com/office/drawing/2014/main" id="{45553BDB-A2CE-DD4D-2673-4B2264A21CA9}"/>
+              </a:ext>
+            </a:extLst>
+          </p:cNvPr>
+          <p:cNvSpPr/>
+          <p:nvPr/>
+        </p:nvSpPr>
+        <p:spPr>
+          <a:xfrm>
+            <a:off x="612648" y="896112"/>
+            <a:ext cx="9966960" cy="256032"/>
+          </a:xfrm>
+          <a:prstGeom prst="rect">
+            <a:avLst/>
+          </a:prstGeom>
+          <a:noFill/>
+          <a:ln/>
+        </p:spPr>
+        <p:txBody>
+          <a:bodyPr wrap="square" lIns="0" tIns="0" rIns="0" bIns="0" rtlCol="0" anchor="ctr"/>
+          <a:lstStyle/>
+          <a:p>
+            <a:pPr marL="0" indent="0">
+              <a:buNone/>
+            </a:pPr>
+            <a:r>
+              <a:rPr lang="en-US" sz="1050" i="1" dirty="0">
+                <a:solidFill>
+                  <a:srgbClr val="6B7280"/>
+                </a:solidFill>
+                <a:latin typeface="Aptos" pitchFamily="34" charset="0"/>
+                <a:ea typeface="Aptos" pitchFamily="34" charset="-122"/>
+                <a:cs typeface="Aptos" pitchFamily="34" charset="-120"/>
+              </a:rPr>
+              <a:t>Ana sonuçları tablo, grafik veya kısa metinle sunun.</a:t>
+            </a:r>
+            <a:endParaRPr lang="en-US" sz="1050" dirty="0"/>
+          </a:p>
+        </p:txBody>
+      </p:sp>
+      <p:sp>
+        <p:nvSpPr>
+          <p:cNvPr id="5" name="Shape 3">
+            <a:extLst>
+              <a:ext uri="{FF2B5EF4-FFF2-40B4-BE49-F238E27FC236}">
+                <a16:creationId xmlns:a16="http://schemas.microsoft.com/office/drawing/2014/main" id="{1988580B-2608-9DDA-4230-9DEC7F3582F3}"/>
+              </a:ext>
+            </a:extLst>
+          </p:cNvPr>
+          <p:cNvSpPr/>
+          <p:nvPr/>
+        </p:nvSpPr>
+        <p:spPr>
+          <a:xfrm>
+            <a:off x="594360" y="1261872"/>
+            <a:ext cx="10972800" cy="0"/>
+          </a:xfrm>
+          <a:prstGeom prst="line">
+            <a:avLst/>
+          </a:prstGeom>
+          <a:noFill/>
+          <a:ln w="9525">
+            <a:solidFill>
+              <a:srgbClr val="CBD5E1"/>
+            </a:solidFill>
+            <a:prstDash val="solid"/>
+          </a:ln>
+        </p:spPr>
+        <p:txBody>
+          <a:bodyPr/>
+          <a:lstStyle/>
+          <a:p>
+            <a:endParaRPr lang="tr-TR"/>
+          </a:p>
+        </p:txBody>
+      </p:sp>
+      <p:sp>
+        <p:nvSpPr>
+          <p:cNvPr id="6" name="Text 4">
+            <a:extLst>
+              <a:ext uri="{FF2B5EF4-FFF2-40B4-BE49-F238E27FC236}">
+                <a16:creationId xmlns:a16="http://schemas.microsoft.com/office/drawing/2014/main" id="{D49A2D7D-FD4A-92C8-922D-47080B193A2D}"/>
+              </a:ext>
+            </a:extLst>
+          </p:cNvPr>
+          <p:cNvSpPr/>
+          <p:nvPr/>
+        </p:nvSpPr>
+        <p:spPr>
+          <a:xfrm>
+            <a:off x="594360" y="6510528"/>
+            <a:ext cx="5029200" cy="201168"/>
+          </a:xfrm>
+          <a:prstGeom prst="rect">
+            <a:avLst/>
+          </a:prstGeom>
+          <a:noFill/>
+          <a:ln/>
+        </p:spPr>
+        <p:txBody>
+          <a:bodyPr wrap="square" lIns="0" tIns="0" rIns="0" bIns="0" rtlCol="0" anchor="ctr"/>
+          <a:lstStyle/>
+          <a:p>
+            <a:r>
+              <a:rPr lang="en-US" sz="850" dirty="0">
+                <a:solidFill>
+                  <a:srgbClr val="6B7280"/>
+                </a:solidFill>
+                <a:latin typeface="Aptos" pitchFamily="34" charset="0"/>
+                <a:ea typeface="Aptos" pitchFamily="34" charset="-122"/>
+                <a:cs typeface="Aptos" pitchFamily="34" charset="-120"/>
+              </a:rPr>
+              <a:t>Final Makale/Bildiri </a:t>
+            </a:r>
+            <a:r>
+              <a:rPr lang="en-US" sz="850" dirty="0" err="1">
+                <a:solidFill>
+                  <a:srgbClr val="6B7280"/>
+                </a:solidFill>
+                <a:latin typeface="Aptos" pitchFamily="34" charset="0"/>
+                <a:ea typeface="Aptos" pitchFamily="34" charset="-122"/>
+                <a:cs typeface="Aptos" pitchFamily="34" charset="-120"/>
+              </a:rPr>
+              <a:t>Sunumu</a:t>
+            </a:r>
+            <a:r>
+              <a:rPr lang="en-US" sz="850" dirty="0">
+                <a:solidFill>
+                  <a:srgbClr val="6B7280"/>
+                </a:solidFill>
+                <a:latin typeface="Aptos" pitchFamily="34" charset="0"/>
+                <a:ea typeface="Aptos" pitchFamily="34" charset="-122"/>
+                <a:cs typeface="Aptos" pitchFamily="34" charset="-120"/>
+              </a:rPr>
+              <a:t>  •  </a:t>
+            </a:r>
+            <a:r>
+              <a:rPr lang="tr-TR" sz="850" dirty="0">
+                <a:solidFill>
+                  <a:srgbClr val="6B7280"/>
+                </a:solidFill>
+                <a:latin typeface="Aptos" pitchFamily="34" charset="0"/>
+                <a:ea typeface="Aptos" pitchFamily="34" charset="-122"/>
+                <a:cs typeface="Aptos" pitchFamily="34" charset="-120"/>
+              </a:rPr>
+              <a:t>8</a:t>
+            </a:r>
+            <a:r>
+              <a:rPr lang="en-US" sz="850" dirty="0">
+                <a:solidFill>
+                  <a:srgbClr val="6B7280"/>
+                </a:solidFill>
+                <a:latin typeface="Aptos" pitchFamily="34" charset="0"/>
+                <a:ea typeface="Aptos" pitchFamily="34" charset="-122"/>
+                <a:cs typeface="Aptos" pitchFamily="34" charset="-120"/>
+              </a:rPr>
+              <a:t> /1</a:t>
+            </a:r>
+            <a:r>
+              <a:rPr lang="tr-TR" sz="850" dirty="0">
+                <a:solidFill>
+                  <a:srgbClr val="6B7280"/>
+                </a:solidFill>
+                <a:latin typeface="Aptos" pitchFamily="34" charset="0"/>
+                <a:ea typeface="Aptos" pitchFamily="34" charset="-122"/>
+                <a:cs typeface="Aptos" pitchFamily="34" charset="-120"/>
+              </a:rPr>
+              <a:t>2</a:t>
+            </a:r>
+            <a:endParaRPr lang="en-US" sz="850" dirty="0"/>
+          </a:p>
+        </p:txBody>
+      </p:sp>
+      <p:sp>
+        <p:nvSpPr>
+          <p:cNvPr id="7" name="Text 5">
+            <a:extLst>
+              <a:ext uri="{FF2B5EF4-FFF2-40B4-BE49-F238E27FC236}">
+                <a16:creationId xmlns:a16="http://schemas.microsoft.com/office/drawing/2014/main" id="{544ABDEA-16A7-29BB-1E55-0C1DD466B77F}"/>
+              </a:ext>
+            </a:extLst>
+          </p:cNvPr>
+          <p:cNvSpPr/>
+          <p:nvPr/>
+        </p:nvSpPr>
+        <p:spPr>
+          <a:xfrm>
+            <a:off x="6995160" y="6510528"/>
+            <a:ext cx="4572000" cy="201168"/>
+          </a:xfrm>
+          <a:prstGeom prst="rect">
+            <a:avLst/>
+          </a:prstGeom>
+          <a:noFill/>
+          <a:ln/>
+        </p:spPr>
+        <p:txBody>
+          <a:bodyPr wrap="square" lIns="0" tIns="0" rIns="0" bIns="0" rtlCol="0" anchor="ctr"/>
+          <a:lstStyle/>
+          <a:p>
+            <a:pPr marL="0" indent="0" algn="r">
+              <a:buNone/>
+            </a:pPr>
+            <a:r>
+              <a:rPr lang="en-US" sz="850" dirty="0">
+                <a:solidFill>
+                  <a:srgbClr val="6B7280"/>
+                </a:solidFill>
+                <a:latin typeface="Aptos" pitchFamily="34" charset="0"/>
+                <a:ea typeface="Aptos" pitchFamily="34" charset="-122"/>
+                <a:cs typeface="Aptos" pitchFamily="34" charset="-120"/>
+              </a:rPr>
+              <a:t>İleri Bilgisayarlı Görme ve Derin Öğrenme</a:t>
+            </a:r>
+            <a:endParaRPr lang="en-US" sz="850" dirty="0"/>
+          </a:p>
+        </p:txBody>
+      </p:sp>
+      <p:sp>
+        <p:nvSpPr>
+          <p:cNvPr id="8" name="Text 6">
+            <a:extLst>
+              <a:ext uri="{FF2B5EF4-FFF2-40B4-BE49-F238E27FC236}">
+                <a16:creationId xmlns:a16="http://schemas.microsoft.com/office/drawing/2014/main" id="{B7C0B6D9-AD74-9BC0-8717-9F53A3116C75}"/>
+              </a:ext>
+            </a:extLst>
+          </p:cNvPr>
+          <p:cNvSpPr/>
+          <p:nvPr/>
+        </p:nvSpPr>
+        <p:spPr>
+          <a:xfrm>
+            <a:off x="749808" y="1600200"/>
+            <a:ext cx="10378440" cy="3200400"/>
+          </a:xfrm>
+          <a:prstGeom prst="rect">
+            <a:avLst/>
+          </a:prstGeom>
+          <a:noFill/>
+          <a:ln/>
+        </p:spPr>
+        <p:txBody>
+          <a:bodyPr wrap="square" lIns="254" tIns="254" rIns="254" bIns="254" rtlCol="0" anchor="ctr">
+            <a:normAutofit/>
+          </a:bodyPr>
+          <a:lstStyle/>
+          <a:p>
+            <a:endParaRPr lang="en-US" sz="1550" dirty="0"/>
+          </a:p>
+        </p:txBody>
+      </p:sp>
+      <p:pic>
+        <p:nvPicPr>
+          <p:cNvPr id="9" name="Picture 8">
+            <a:extLst>
+              <a:ext uri="{FF2B5EF4-FFF2-40B4-BE49-F238E27FC236}">
+                <a16:creationId xmlns:a16="http://schemas.microsoft.com/office/drawing/2014/main" id="{6D511F52-43A0-DAFD-E0DA-71500BA05D66}"/>
+              </a:ext>
+            </a:extLst>
+          </p:cNvPr>
+          <p:cNvPicPr>
+            <a:picLocks noChangeAspect="1"/>
+          </p:cNvPicPr>
+          <p:nvPr/>
+        </p:nvPicPr>
+        <p:blipFill>
+          <a:blip r:embed="rId3"/>
+          <a:stretch>
+            <a:fillRect/>
+          </a:stretch>
+        </p:blipFill>
+        <p:spPr>
+          <a:xfrm>
+            <a:off x="612648" y="1369701"/>
+            <a:ext cx="9859820" cy="4970790"/>
+          </a:xfrm>
+          <a:prstGeom prst="rect">
+            <a:avLst/>
+          </a:prstGeom>
+        </p:spPr>
+      </p:pic>
+    </p:spTree>
+    <p:extLst>
+      <p:ext uri="{BB962C8B-B14F-4D97-AF65-F5344CB8AC3E}">
+        <p14:creationId xmlns:p14="http://schemas.microsoft.com/office/powerpoint/2010/main" val="2312415918"/>
+      </p:ext>
+    </p:extLst>
+  </p:cSld>
+  <p:clrMapOvr>
+    <a:masterClrMapping/>
+  </p:clrMapOvr>
+</p:sld>
+</file>
+
+<file path=ppt/slides/slide9.xml><?xml version="1.0" encoding="utf-8"?>
 <p:sld xmlns:a="http://schemas.openxmlformats.org/drawingml/2006/main" xmlns:r="http://schemas.openxmlformats.org/officeDocument/2006/relationships" xmlns:p="http://schemas.openxmlformats.org/presentationml/2006/main">
   <p:cSld name="Slide 7">
     <p:bg>
@@ -4424,7 +6603,7 @@
               <a:buNone/>
             </a:pPr>
             <a:r>
-              <a:rPr lang="en-US" sz="2400" b="1" dirty="0">
+              <a:rPr lang="tr-TR" sz="2400" b="1" dirty="0">
                 <a:solidFill>
                   <a:srgbClr val="1E2A5A"/>
                 </a:solidFill>
@@ -4432,7 +6611,18 @@
                 <a:ea typeface="Aptos Display" pitchFamily="34" charset="-122"/>
                 <a:cs typeface="Aptos Display" pitchFamily="34" charset="-120"/>
               </a:rPr>
-              <a:t>6. Analiz ve Yorum</a:t>
+              <a:t>8</a:t>
+            </a:r>
+            <a:r>
+              <a:rPr lang="en-US" sz="2400" b="1" dirty="0">
+                <a:solidFill>
+                  <a:srgbClr val="1E2A5A"/>
+                </a:solidFill>
+                <a:latin typeface="Aptos Display" pitchFamily="34" charset="0"/>
+                <a:ea typeface="Aptos Display" pitchFamily="34" charset="-122"/>
+                <a:cs typeface="Aptos Display" pitchFamily="34" charset="-120"/>
+              </a:rPr>
+              <a:t>. Analiz ve Yorum</a:t>
             </a:r>
             <a:endParaRPr lang="en-US" sz="2400" dirty="0"/>
           </a:p>
@@ -4528,9 +6718,6 @@
           <a:bodyPr wrap="square" lIns="0" tIns="0" rIns="0" bIns="0" rtlCol="0" anchor="ctr"/>
           <a:lstStyle/>
           <a:p>
-            <a:pPr marL="0" indent="0">
-              <a:buNone/>
-            </a:pPr>
             <a:r>
               <a:rPr lang="en-US" sz="850" dirty="0">
                 <a:solidFill>
@@ -4540,38 +6727,10 @@
                 <a:ea typeface="Aptos" pitchFamily="34" charset="-122"/>
                 <a:cs typeface="Aptos" pitchFamily="34" charset="-120"/>
               </a:rPr>
-              <a:t>Final Makale/Bildiri Sunumu  •  7/10</a:t>
-            </a:r>
-            <a:endParaRPr lang="en-US" sz="850" dirty="0"/>
-          </a:p>
-        </p:txBody>
-      </p:sp>
-      <p:sp>
-        <p:nvSpPr>
-          <p:cNvPr id="7" name="Text 5"/>
-          <p:cNvSpPr/>
-          <p:nvPr/>
-        </p:nvSpPr>
-        <p:spPr>
-          <a:xfrm>
-            <a:off x="6995160" y="6510528"/>
-            <a:ext cx="4572000" cy="201168"/>
-          </a:xfrm>
-          <a:prstGeom prst="rect">
-            <a:avLst/>
-          </a:prstGeom>
-          <a:noFill/>
-          <a:ln/>
-        </p:spPr>
-        <p:txBody>
-          <a:bodyPr wrap="square" lIns="0" tIns="0" rIns="0" bIns="0" rtlCol="0" anchor="ctr"/>
-          <a:lstStyle/>
-          <a:p>
-            <a:pPr marL="0" indent="0" algn="r">
-              <a:buNone/>
-            </a:pPr>
-            <a:r>
-              <a:rPr lang="en-US" sz="850" dirty="0">
+              <a:t>Final Makale/Bildiri Sunumu  •  </a:t>
+            </a:r>
+            <a:r>
+              <a:rPr lang="tr-TR" sz="850" dirty="0">
                 <a:solidFill>
                   <a:srgbClr val="6B7280"/>
                 </a:solidFill>
@@ -4579,6 +6738,67 @@
                 <a:ea typeface="Aptos" pitchFamily="34" charset="-122"/>
                 <a:cs typeface="Aptos" pitchFamily="34" charset="-120"/>
               </a:rPr>
+              <a:t>9</a:t>
+            </a:r>
+            <a:r>
+              <a:rPr lang="en-US" sz="850" dirty="0">
+                <a:solidFill>
+                  <a:srgbClr val="6B7280"/>
+                </a:solidFill>
+                <a:latin typeface="Aptos" pitchFamily="34" charset="0"/>
+                <a:ea typeface="Aptos" pitchFamily="34" charset="-122"/>
+                <a:cs typeface="Aptos" pitchFamily="34" charset="-120"/>
+              </a:rPr>
+              <a:t> /1</a:t>
+            </a:r>
+            <a:r>
+              <a:rPr lang="tr-TR" sz="850" dirty="0">
+                <a:solidFill>
+                  <a:srgbClr val="6B7280"/>
+                </a:solidFill>
+                <a:latin typeface="Aptos" pitchFamily="34" charset="0"/>
+                <a:ea typeface="Aptos" pitchFamily="34" charset="-122"/>
+                <a:cs typeface="Aptos" pitchFamily="34" charset="-120"/>
+              </a:rPr>
+              <a:t>2</a:t>
+            </a:r>
+            <a:endParaRPr lang="en-US" sz="850" dirty="0"/>
+          </a:p>
+        </p:txBody>
+      </p:sp>
+      <p:sp>
+        <p:nvSpPr>
+          <p:cNvPr id="7" name="Text 5"/>
+          <p:cNvSpPr/>
+          <p:nvPr/>
+        </p:nvSpPr>
+        <p:spPr>
+          <a:xfrm>
+            <a:off x="6995160" y="6510528"/>
+            <a:ext cx="4572000" cy="201168"/>
+          </a:xfrm>
+          <a:prstGeom prst="rect">
+            <a:avLst/>
+          </a:prstGeom>
+          <a:noFill/>
+          <a:ln/>
+        </p:spPr>
+        <p:txBody>
+          <a:bodyPr wrap="square" lIns="0" tIns="0" rIns="0" bIns="0" rtlCol="0" anchor="ctr"/>
+          <a:lstStyle/>
+          <a:p>
+            <a:pPr marL="0" indent="0" algn="r">
+              <a:buNone/>
+            </a:pPr>
+            <a:r>
+              <a:rPr lang="en-US" sz="850" dirty="0">
+                <a:solidFill>
+                  <a:srgbClr val="6B7280"/>
+                </a:solidFill>
+                <a:latin typeface="Aptos" pitchFamily="34" charset="0"/>
+                <a:ea typeface="Aptos" pitchFamily="34" charset="-122"/>
+                <a:cs typeface="Aptos" pitchFamily="34" charset="-120"/>
+              </a:rPr>
               <a:t>İleri Bilgisayarlı Görme ve Derin Öğrenme</a:t>
             </a:r>
             <a:endParaRPr lang="en-US" sz="850" dirty="0"/>
@@ -4608,60 +6828,34 @@
           </a:bodyPr>
           <a:lstStyle/>
           <a:p>
-            <a:r>
-              <a:rPr lang="en-US" sz="1550" dirty="0">
-                <a:solidFill>
-                  <a:srgbClr val="111827"/>
-                </a:solidFill>
-                <a:latin typeface="Aptos" pitchFamily="34" charset="0"/>
-                <a:ea typeface="Aptos" pitchFamily="34" charset="-122"/>
-                <a:cs typeface="Aptos" pitchFamily="34" charset="-120"/>
-              </a:rPr>
-              <a:t>Seçtiğiniz ana karşılaştırma veya analiz ne gösteriyor?</a:t>
-            </a:r>
-            <a:endParaRPr lang="en-US" sz="1550" dirty="0"/>
-          </a:p>
-          <a:p>
-            <a:r>
-              <a:rPr lang="en-US" sz="1550" dirty="0">
-                <a:solidFill>
-                  <a:srgbClr val="111827"/>
-                </a:solidFill>
-                <a:latin typeface="Aptos" pitchFamily="34" charset="0"/>
-                <a:ea typeface="Aptos" pitchFamily="34" charset="-122"/>
-                <a:cs typeface="Aptos" pitchFamily="34" charset="-120"/>
-              </a:rPr>
-              <a:t>Sonuçlardaki artış, düşüş veya farkların olası nedenleri nelerdir?</a:t>
-            </a:r>
-            <a:endParaRPr lang="en-US" sz="1550" dirty="0"/>
-          </a:p>
-          <a:p>
-            <a:r>
-              <a:rPr lang="en-US" sz="1550" dirty="0">
-                <a:solidFill>
-                  <a:srgbClr val="111827"/>
-                </a:solidFill>
-                <a:latin typeface="Aptos" pitchFamily="34" charset="0"/>
-                <a:ea typeface="Aptos" pitchFamily="34" charset="-122"/>
-                <a:cs typeface="Aptos" pitchFamily="34" charset="-120"/>
-              </a:rPr>
-              <a:t>Performans, eğitim süresi, veri zorluğu veya model seçimi arasında nasıl bir denge var?</a:t>
-            </a:r>
-            <a:endParaRPr lang="en-US" sz="1550" dirty="0"/>
-          </a:p>
-          <a:p>
-            <a:r>
-              <a:rPr lang="en-US" sz="1550" dirty="0">
-                <a:solidFill>
-                  <a:srgbClr val="111827"/>
-                </a:solidFill>
-                <a:latin typeface="Aptos" pitchFamily="34" charset="0"/>
-                <a:ea typeface="Aptos" pitchFamily="34" charset="-122"/>
-                <a:cs typeface="Aptos" pitchFamily="34" charset="-120"/>
-              </a:rPr>
-              <a:t>Hata analizi yapılmışsa, en çok karışan sınıflar ve muhtemel nedenler.</a:t>
-            </a:r>
-            <a:endParaRPr lang="en-US" sz="1550" dirty="0"/>
+            <a:pPr marL="285750" indent="-285750">
+              <a:buFont typeface="Arial" panose="020B0604020202020204" pitchFamily="34" charset="0"/>
+              <a:buChar char="•"/>
+            </a:pPr>
+            <a:r>
+              <a:rPr lang="tr-TR" sz="1600" dirty="0"/>
+              <a:t>Swin-Small başarısı: Hiyerarşik attention → daha iyi genelleme </a:t>
+            </a:r>
+          </a:p>
+          <a:p>
+            <a:pPr marL="285750" indent="-285750">
+              <a:buFont typeface="Arial" panose="020B0604020202020204" pitchFamily="34" charset="0"/>
+              <a:buChar char="•"/>
+            </a:pPr>
+            <a:r>
+              <a:rPr lang="tr-TR" sz="1600" dirty="0"/>
+              <a:t>MobileViT düşük performans: Mobil odaklı → düşük temsil kapasitesi (en düşük GAP) </a:t>
+            </a:r>
+          </a:p>
+          <a:p>
+            <a:pPr marL="285750" indent="-285750">
+              <a:buFont typeface="Arial" panose="020B0604020202020204" pitchFamily="34" charset="0"/>
+              <a:buChar char="•"/>
+            </a:pPr>
+            <a:r>
+              <a:rPr lang="tr-TR" sz="1600" dirty="0"/>
+              <a:t>MaxViT / ViT / DeiT: Dengeli ama Swin kadar güçlü değil</a:t>
+            </a:r>
           </a:p>
         </p:txBody>
       </p:sp>
@@ -4735,818 +6929,6 @@
                 <a:cs typeface="Aptos" pitchFamily="34" charset="-120"/>
               </a:rPr>
               <a:t>Buradaki maddeler örnektir; çalışmanızın türüne göre uygun olanları kullanın.</a:t>
-            </a:r>
-            <a:endParaRPr lang="en-US" sz="1200" dirty="0"/>
-          </a:p>
-        </p:txBody>
-      </p:sp>
-    </p:spTree>
-  </p:cSld>
-  <p:clrMapOvr>
-    <a:masterClrMapping/>
-  </p:clrMapOvr>
-</p:sld>
-</file>
-
-<file path=ppt/slides/slide8.xml><?xml version="1.0" encoding="utf-8"?>
-<p:sld xmlns:a="http://schemas.openxmlformats.org/drawingml/2006/main" xmlns:r="http://schemas.openxmlformats.org/officeDocument/2006/relationships" xmlns:p="http://schemas.openxmlformats.org/presentationml/2006/main">
-  <p:cSld name="Slide 8">
-    <p:bg>
-      <p:bgPr>
-        <a:solidFill>
-          <a:srgbClr val="F8FAFC"/>
-        </a:solidFill>
-        <a:effectLst/>
-      </p:bgPr>
-    </p:bg>
-    <p:spTree>
-      <p:nvGrpSpPr>
-        <p:cNvPr id="1" name=""/>
-        <p:cNvGrpSpPr/>
-        <p:nvPr/>
-      </p:nvGrpSpPr>
-      <p:grpSpPr>
-        <a:xfrm>
-          <a:off x="0" y="0"/>
-          <a:ext cx="0" cy="0"/>
-          <a:chOff x="0" y="0"/>
-          <a:chExt cx="0" cy="0"/>
-        </a:xfrm>
-      </p:grpSpPr>
-      <p:sp>
-        <p:nvSpPr>
-          <p:cNvPr id="2" name="Shape 0"/>
-          <p:cNvSpPr/>
-          <p:nvPr/>
-        </p:nvSpPr>
-        <p:spPr>
-          <a:xfrm>
-            <a:off x="0" y="0"/>
-            <a:ext cx="12191695" cy="146304"/>
-          </a:xfrm>
-          <a:prstGeom prst="rect">
-            <a:avLst/>
-          </a:prstGeom>
-          <a:solidFill>
-            <a:srgbClr val="1E2A5A"/>
-          </a:solidFill>
-          <a:ln w="12700">
-            <a:solidFill>
-              <a:srgbClr val="1E2A5A"/>
-            </a:solidFill>
-            <a:prstDash val="solid"/>
-          </a:ln>
-        </p:spPr>
-        <p:txBody>
-          <a:bodyPr/>
-          <a:lstStyle/>
-          <a:p>
-            <a:endParaRPr lang="tr-TR"/>
-          </a:p>
-        </p:txBody>
-      </p:sp>
-      <p:sp>
-        <p:nvSpPr>
-          <p:cNvPr id="3" name="Text 1"/>
-          <p:cNvSpPr/>
-          <p:nvPr/>
-        </p:nvSpPr>
-        <p:spPr>
-          <a:xfrm>
-            <a:off x="594360" y="438912"/>
-            <a:ext cx="8138160" cy="384048"/>
-          </a:xfrm>
-          <a:prstGeom prst="rect">
-            <a:avLst/>
-          </a:prstGeom>
-          <a:noFill/>
-          <a:ln/>
-        </p:spPr>
-        <p:txBody>
-          <a:bodyPr wrap="square" lIns="0" tIns="0" rIns="0" bIns="0" rtlCol="0" anchor="ctr"/>
-          <a:lstStyle/>
-          <a:p>
-            <a:pPr marL="0" indent="0">
-              <a:buNone/>
-            </a:pPr>
-            <a:r>
-              <a:rPr lang="en-US" sz="2400" b="1" dirty="0">
-                <a:solidFill>
-                  <a:srgbClr val="1E2A5A"/>
-                </a:solidFill>
-                <a:latin typeface="Aptos Display" pitchFamily="34" charset="0"/>
-                <a:ea typeface="Aptos Display" pitchFamily="34" charset="-122"/>
-                <a:cs typeface="Aptos Display" pitchFamily="34" charset="-120"/>
-              </a:rPr>
-              <a:t>7. Literatürle İlişki</a:t>
-            </a:r>
-            <a:endParaRPr lang="en-US" sz="2400" dirty="0"/>
-          </a:p>
-        </p:txBody>
-      </p:sp>
-      <p:sp>
-        <p:nvSpPr>
-          <p:cNvPr id="4" name="Text 2"/>
-          <p:cNvSpPr/>
-          <p:nvPr/>
-        </p:nvSpPr>
-        <p:spPr>
-          <a:xfrm>
-            <a:off x="612648" y="896112"/>
-            <a:ext cx="9966960" cy="256032"/>
-          </a:xfrm>
-          <a:prstGeom prst="rect">
-            <a:avLst/>
-          </a:prstGeom>
-          <a:noFill/>
-          <a:ln/>
-        </p:spPr>
-        <p:txBody>
-          <a:bodyPr wrap="square" lIns="0" tIns="0" rIns="0" bIns="0" rtlCol="0" anchor="ctr"/>
-          <a:lstStyle/>
-          <a:p>
-            <a:pPr marL="0" indent="0">
-              <a:buNone/>
-            </a:pPr>
-            <a:r>
-              <a:rPr lang="en-US" sz="1050" i="1" dirty="0">
-                <a:solidFill>
-                  <a:srgbClr val="6B7280"/>
-                </a:solidFill>
-                <a:latin typeface="Aptos" pitchFamily="34" charset="0"/>
-                <a:ea typeface="Aptos" pitchFamily="34" charset="-122"/>
-                <a:cs typeface="Aptos" pitchFamily="34" charset="-120"/>
-              </a:rPr>
-              <a:t>Kendi sonucunuzu literatür içinde konumlandırın.</a:t>
-            </a:r>
-            <a:endParaRPr lang="en-US" sz="1050" dirty="0"/>
-          </a:p>
-        </p:txBody>
-      </p:sp>
-      <p:sp>
-        <p:nvSpPr>
-          <p:cNvPr id="5" name="Shape 3"/>
-          <p:cNvSpPr/>
-          <p:nvPr/>
-        </p:nvSpPr>
-        <p:spPr>
-          <a:xfrm>
-            <a:off x="594360" y="1261872"/>
-            <a:ext cx="10972800" cy="0"/>
-          </a:xfrm>
-          <a:prstGeom prst="line">
-            <a:avLst/>
-          </a:prstGeom>
-          <a:noFill/>
-          <a:ln w="9525">
-            <a:solidFill>
-              <a:srgbClr val="CBD5E1"/>
-            </a:solidFill>
-            <a:prstDash val="solid"/>
-          </a:ln>
-        </p:spPr>
-        <p:txBody>
-          <a:bodyPr/>
-          <a:lstStyle/>
-          <a:p>
-            <a:endParaRPr lang="tr-TR"/>
-          </a:p>
-        </p:txBody>
-      </p:sp>
-      <p:sp>
-        <p:nvSpPr>
-          <p:cNvPr id="6" name="Text 4"/>
-          <p:cNvSpPr/>
-          <p:nvPr/>
-        </p:nvSpPr>
-        <p:spPr>
-          <a:xfrm>
-            <a:off x="594360" y="6510528"/>
-            <a:ext cx="5029200" cy="201168"/>
-          </a:xfrm>
-          <a:prstGeom prst="rect">
-            <a:avLst/>
-          </a:prstGeom>
-          <a:noFill/>
-          <a:ln/>
-        </p:spPr>
-        <p:txBody>
-          <a:bodyPr wrap="square" lIns="0" tIns="0" rIns="0" bIns="0" rtlCol="0" anchor="ctr"/>
-          <a:lstStyle/>
-          <a:p>
-            <a:pPr marL="0" indent="0">
-              <a:buNone/>
-            </a:pPr>
-            <a:r>
-              <a:rPr lang="en-US" sz="850" dirty="0">
-                <a:solidFill>
-                  <a:srgbClr val="6B7280"/>
-                </a:solidFill>
-                <a:latin typeface="Aptos" pitchFamily="34" charset="0"/>
-                <a:ea typeface="Aptos" pitchFamily="34" charset="-122"/>
-                <a:cs typeface="Aptos" pitchFamily="34" charset="-120"/>
-              </a:rPr>
-              <a:t>Final Makale/Bildiri Sunumu  •  8/10</a:t>
-            </a:r>
-            <a:endParaRPr lang="en-US" sz="850" dirty="0"/>
-          </a:p>
-        </p:txBody>
-      </p:sp>
-      <p:sp>
-        <p:nvSpPr>
-          <p:cNvPr id="7" name="Text 5"/>
-          <p:cNvSpPr/>
-          <p:nvPr/>
-        </p:nvSpPr>
-        <p:spPr>
-          <a:xfrm>
-            <a:off x="6995160" y="6510528"/>
-            <a:ext cx="4572000" cy="201168"/>
-          </a:xfrm>
-          <a:prstGeom prst="rect">
-            <a:avLst/>
-          </a:prstGeom>
-          <a:noFill/>
-          <a:ln/>
-        </p:spPr>
-        <p:txBody>
-          <a:bodyPr wrap="square" lIns="0" tIns="0" rIns="0" bIns="0" rtlCol="0" anchor="ctr"/>
-          <a:lstStyle/>
-          <a:p>
-            <a:pPr marL="0" indent="0" algn="r">
-              <a:buNone/>
-            </a:pPr>
-            <a:r>
-              <a:rPr lang="en-US" sz="850" dirty="0">
-                <a:solidFill>
-                  <a:srgbClr val="6B7280"/>
-                </a:solidFill>
-                <a:latin typeface="Aptos" pitchFamily="34" charset="0"/>
-                <a:ea typeface="Aptos" pitchFamily="34" charset="-122"/>
-                <a:cs typeface="Aptos" pitchFamily="34" charset="-120"/>
-              </a:rPr>
-              <a:t>İleri Bilgisayarlı Görme ve Derin Öğrenme</a:t>
-            </a:r>
-            <a:endParaRPr lang="en-US" sz="850" dirty="0"/>
-          </a:p>
-        </p:txBody>
-      </p:sp>
-      <p:sp>
-        <p:nvSpPr>
-          <p:cNvPr id="8" name="Text 6"/>
-          <p:cNvSpPr/>
-          <p:nvPr/>
-        </p:nvSpPr>
-        <p:spPr>
-          <a:xfrm>
-            <a:off x="749808" y="1600200"/>
-            <a:ext cx="10378440" cy="3200400"/>
-          </a:xfrm>
-          <a:prstGeom prst="rect">
-            <a:avLst/>
-          </a:prstGeom>
-          <a:noFill/>
-          <a:ln/>
-        </p:spPr>
-        <p:txBody>
-          <a:bodyPr wrap="square" lIns="254" tIns="254" rIns="254" bIns="254" rtlCol="0" anchor="ctr">
-            <a:normAutofit/>
-          </a:bodyPr>
-          <a:lstStyle/>
-          <a:p>
-            <a:r>
-              <a:rPr lang="en-US" sz="1550" dirty="0">
-                <a:solidFill>
-                  <a:srgbClr val="111827"/>
-                </a:solidFill>
-                <a:latin typeface="Aptos" pitchFamily="34" charset="0"/>
-                <a:ea typeface="Aptos" pitchFamily="34" charset="-122"/>
-                <a:cs typeface="Aptos" pitchFamily="34" charset="-120"/>
-              </a:rPr>
-              <a:t>Mümkünse aynı veri kümesi, değilse aynı problem alanındaki benzer çalışmalarla kısa karşılaştırma.</a:t>
-            </a:r>
-            <a:endParaRPr lang="en-US" sz="1550" dirty="0"/>
-          </a:p>
-          <a:p>
-            <a:r>
-              <a:rPr lang="en-US" sz="1550" dirty="0">
-                <a:solidFill>
-                  <a:srgbClr val="111827"/>
-                </a:solidFill>
-                <a:latin typeface="Aptos" pitchFamily="34" charset="0"/>
-                <a:ea typeface="Aptos" pitchFamily="34" charset="-122"/>
-                <a:cs typeface="Aptos" pitchFamily="34" charset="-120"/>
-              </a:rPr>
-              <a:t>Karşılaştırmada yöntem, metrik, veri bölünmesi ve deney koşullarının farklı olabileceğini belirtme.</a:t>
-            </a:r>
-            <a:endParaRPr lang="en-US" sz="1550" dirty="0"/>
-          </a:p>
-          <a:p>
-            <a:r>
-              <a:rPr lang="en-US" sz="1550" dirty="0">
-                <a:solidFill>
-                  <a:srgbClr val="111827"/>
-                </a:solidFill>
-                <a:latin typeface="Aptos" pitchFamily="34" charset="0"/>
-                <a:ea typeface="Aptos" pitchFamily="34" charset="-122"/>
-                <a:cs typeface="Aptos" pitchFamily="34" charset="-120"/>
-              </a:rPr>
-              <a:t>Literatürdeki sonuçları geçme zorunluluğu yoktur; amaç kendi sonucunuzu bağlam içinde değerlendirmektir.</a:t>
-            </a:r>
-            <a:endParaRPr lang="en-US" sz="1550" dirty="0"/>
-          </a:p>
-          <a:p>
-            <a:r>
-              <a:rPr lang="en-US" sz="1550" dirty="0">
-                <a:solidFill>
-                  <a:srgbClr val="111827"/>
-                </a:solidFill>
-                <a:latin typeface="Aptos" pitchFamily="34" charset="0"/>
-                <a:ea typeface="Aptos" pitchFamily="34" charset="-122"/>
-                <a:cs typeface="Aptos" pitchFamily="34" charset="-120"/>
-              </a:rPr>
-              <a:t>Bu bölüm tablo halinde ya da kısa anlatı şeklinde sunulabilir.</a:t>
-            </a:r>
-            <a:endParaRPr lang="en-US" sz="1550" dirty="0"/>
-          </a:p>
-        </p:txBody>
-      </p:sp>
-      <p:sp>
-        <p:nvSpPr>
-          <p:cNvPr id="9" name="Shape 7"/>
-          <p:cNvSpPr/>
-          <p:nvPr/>
-        </p:nvSpPr>
-        <p:spPr>
-          <a:xfrm>
-            <a:off x="749808" y="5074920"/>
-            <a:ext cx="10378440" cy="713232"/>
-          </a:xfrm>
-          <a:prstGeom prst="rect">
-            <a:avLst/>
-          </a:prstGeom>
-          <a:solidFill>
-            <a:srgbClr val="EEF2F7"/>
-          </a:solidFill>
-          <a:ln w="12700">
-            <a:solidFill>
-              <a:srgbClr val="CBD5E1">
-                <a:alpha val="80000"/>
-              </a:srgbClr>
-            </a:solidFill>
-            <a:prstDash val="solid"/>
-          </a:ln>
-        </p:spPr>
-        <p:txBody>
-          <a:bodyPr/>
-          <a:lstStyle/>
-          <a:p>
-            <a:endParaRPr lang="tr-TR"/>
-          </a:p>
-        </p:txBody>
-      </p:sp>
-      <p:sp>
-        <p:nvSpPr>
-          <p:cNvPr id="10" name="Text 8"/>
-          <p:cNvSpPr/>
-          <p:nvPr/>
-        </p:nvSpPr>
-        <p:spPr>
-          <a:xfrm>
-            <a:off x="987552" y="5248656"/>
-            <a:ext cx="9921240" cy="347472"/>
-          </a:xfrm>
-          <a:prstGeom prst="rect">
-            <a:avLst/>
-          </a:prstGeom>
-          <a:noFill/>
-          <a:ln/>
-        </p:spPr>
-        <p:txBody>
-          <a:bodyPr wrap="square" lIns="127" tIns="127" rIns="127" bIns="127" rtlCol="0" anchor="ctr">
-            <a:normAutofit/>
-          </a:bodyPr>
-          <a:lstStyle/>
-          <a:p>
-            <a:pPr marL="0" indent="0">
-              <a:buNone/>
-            </a:pPr>
-            <a:r>
-              <a:rPr lang="en-US" sz="1200" i="1" dirty="0">
-                <a:solidFill>
-                  <a:srgbClr val="1E2A5A"/>
-                </a:solidFill>
-                <a:latin typeface="Aptos" pitchFamily="34" charset="0"/>
-                <a:ea typeface="Aptos" pitchFamily="34" charset="-122"/>
-                <a:cs typeface="Aptos" pitchFamily="34" charset="-120"/>
-              </a:rPr>
-              <a:t>Makaledeki literatür ve tartışma bölümlerinizden seçilmiş kısa bir özet yeterlidir.</a:t>
-            </a:r>
-            <a:endParaRPr lang="en-US" sz="1200" dirty="0"/>
-          </a:p>
-        </p:txBody>
-      </p:sp>
-    </p:spTree>
-  </p:cSld>
-  <p:clrMapOvr>
-    <a:masterClrMapping/>
-  </p:clrMapOvr>
-</p:sld>
-</file>
-
-<file path=ppt/slides/slide9.xml><?xml version="1.0" encoding="utf-8"?>
-<p:sld xmlns:a="http://schemas.openxmlformats.org/drawingml/2006/main" xmlns:r="http://schemas.openxmlformats.org/officeDocument/2006/relationships" xmlns:p="http://schemas.openxmlformats.org/presentationml/2006/main">
-  <p:cSld name="Slide 9">
-    <p:bg>
-      <p:bgPr>
-        <a:solidFill>
-          <a:srgbClr val="F8FAFC"/>
-        </a:solidFill>
-        <a:effectLst/>
-      </p:bgPr>
-    </p:bg>
-    <p:spTree>
-      <p:nvGrpSpPr>
-        <p:cNvPr id="1" name=""/>
-        <p:cNvGrpSpPr/>
-        <p:nvPr/>
-      </p:nvGrpSpPr>
-      <p:grpSpPr>
-        <a:xfrm>
-          <a:off x="0" y="0"/>
-          <a:ext cx="0" cy="0"/>
-          <a:chOff x="0" y="0"/>
-          <a:chExt cx="0" cy="0"/>
-        </a:xfrm>
-      </p:grpSpPr>
-      <p:sp>
-        <p:nvSpPr>
-          <p:cNvPr id="2" name="Shape 0"/>
-          <p:cNvSpPr/>
-          <p:nvPr/>
-        </p:nvSpPr>
-        <p:spPr>
-          <a:xfrm>
-            <a:off x="0" y="0"/>
-            <a:ext cx="12191695" cy="146304"/>
-          </a:xfrm>
-          <a:prstGeom prst="rect">
-            <a:avLst/>
-          </a:prstGeom>
-          <a:solidFill>
-            <a:srgbClr val="1E2A5A"/>
-          </a:solidFill>
-          <a:ln w="12700">
-            <a:solidFill>
-              <a:srgbClr val="1E2A5A"/>
-            </a:solidFill>
-            <a:prstDash val="solid"/>
-          </a:ln>
-        </p:spPr>
-        <p:txBody>
-          <a:bodyPr/>
-          <a:lstStyle/>
-          <a:p>
-            <a:endParaRPr lang="tr-TR"/>
-          </a:p>
-        </p:txBody>
-      </p:sp>
-      <p:sp>
-        <p:nvSpPr>
-          <p:cNvPr id="3" name="Text 1"/>
-          <p:cNvSpPr/>
-          <p:nvPr/>
-        </p:nvSpPr>
-        <p:spPr>
-          <a:xfrm>
-            <a:off x="594360" y="438912"/>
-            <a:ext cx="8138160" cy="384048"/>
-          </a:xfrm>
-          <a:prstGeom prst="rect">
-            <a:avLst/>
-          </a:prstGeom>
-          <a:noFill/>
-          <a:ln/>
-        </p:spPr>
-        <p:txBody>
-          <a:bodyPr wrap="square" lIns="0" tIns="0" rIns="0" bIns="0" rtlCol="0" anchor="ctr"/>
-          <a:lstStyle/>
-          <a:p>
-            <a:pPr marL="0" indent="0">
-              <a:buNone/>
-            </a:pPr>
-            <a:r>
-              <a:rPr lang="en-US" sz="2400" b="1" dirty="0">
-                <a:solidFill>
-                  <a:srgbClr val="1E2A5A"/>
-                </a:solidFill>
-                <a:latin typeface="Aptos Display" pitchFamily="34" charset="0"/>
-                <a:ea typeface="Aptos Display" pitchFamily="34" charset="-122"/>
-                <a:cs typeface="Aptos Display" pitchFamily="34" charset="-120"/>
-              </a:rPr>
-              <a:t>8. Tartışma ve Sınırlılıklar</a:t>
-            </a:r>
-            <a:endParaRPr lang="en-US" sz="2400" dirty="0"/>
-          </a:p>
-        </p:txBody>
-      </p:sp>
-      <p:sp>
-        <p:nvSpPr>
-          <p:cNvPr id="4" name="Text 2"/>
-          <p:cNvSpPr/>
-          <p:nvPr/>
-        </p:nvSpPr>
-        <p:spPr>
-          <a:xfrm>
-            <a:off x="612648" y="896112"/>
-            <a:ext cx="9966960" cy="256032"/>
-          </a:xfrm>
-          <a:prstGeom prst="rect">
-            <a:avLst/>
-          </a:prstGeom>
-          <a:noFill/>
-          <a:ln/>
-        </p:spPr>
-        <p:txBody>
-          <a:bodyPr wrap="square" lIns="0" tIns="0" rIns="0" bIns="0" rtlCol="0" anchor="ctr"/>
-          <a:lstStyle/>
-          <a:p>
-            <a:pPr marL="0" indent="0">
-              <a:buNone/>
-            </a:pPr>
-            <a:r>
-              <a:rPr lang="en-US" sz="1050" i="1" dirty="0">
-                <a:solidFill>
-                  <a:srgbClr val="6B7280"/>
-                </a:solidFill>
-                <a:latin typeface="Aptos" pitchFamily="34" charset="0"/>
-                <a:ea typeface="Aptos" pitchFamily="34" charset="-122"/>
-                <a:cs typeface="Aptos" pitchFamily="34" charset="-120"/>
-              </a:rPr>
-              <a:t>Çalışmanın güçlü ve sınırlı yönlerini açıkça ifade edin.</a:t>
-            </a:r>
-            <a:endParaRPr lang="en-US" sz="1050" dirty="0"/>
-          </a:p>
-        </p:txBody>
-      </p:sp>
-      <p:sp>
-        <p:nvSpPr>
-          <p:cNvPr id="5" name="Shape 3"/>
-          <p:cNvSpPr/>
-          <p:nvPr/>
-        </p:nvSpPr>
-        <p:spPr>
-          <a:xfrm>
-            <a:off x="594360" y="1261872"/>
-            <a:ext cx="10972800" cy="0"/>
-          </a:xfrm>
-          <a:prstGeom prst="line">
-            <a:avLst/>
-          </a:prstGeom>
-          <a:noFill/>
-          <a:ln w="9525">
-            <a:solidFill>
-              <a:srgbClr val="CBD5E1"/>
-            </a:solidFill>
-            <a:prstDash val="solid"/>
-          </a:ln>
-        </p:spPr>
-        <p:txBody>
-          <a:bodyPr/>
-          <a:lstStyle/>
-          <a:p>
-            <a:endParaRPr lang="tr-TR"/>
-          </a:p>
-        </p:txBody>
-      </p:sp>
-      <p:sp>
-        <p:nvSpPr>
-          <p:cNvPr id="6" name="Text 4"/>
-          <p:cNvSpPr/>
-          <p:nvPr/>
-        </p:nvSpPr>
-        <p:spPr>
-          <a:xfrm>
-            <a:off x="594360" y="6510528"/>
-            <a:ext cx="5029200" cy="201168"/>
-          </a:xfrm>
-          <a:prstGeom prst="rect">
-            <a:avLst/>
-          </a:prstGeom>
-          <a:noFill/>
-          <a:ln/>
-        </p:spPr>
-        <p:txBody>
-          <a:bodyPr wrap="square" lIns="0" tIns="0" rIns="0" bIns="0" rtlCol="0" anchor="ctr"/>
-          <a:lstStyle/>
-          <a:p>
-            <a:pPr marL="0" indent="0">
-              <a:buNone/>
-            </a:pPr>
-            <a:r>
-              <a:rPr lang="en-US" sz="850" dirty="0">
-                <a:solidFill>
-                  <a:srgbClr val="6B7280"/>
-                </a:solidFill>
-                <a:latin typeface="Aptos" pitchFamily="34" charset="0"/>
-                <a:ea typeface="Aptos" pitchFamily="34" charset="-122"/>
-                <a:cs typeface="Aptos" pitchFamily="34" charset="-120"/>
-              </a:rPr>
-              <a:t>Final Makale/Bildiri Sunumu  •  9/10</a:t>
-            </a:r>
-            <a:endParaRPr lang="en-US" sz="850" dirty="0"/>
-          </a:p>
-        </p:txBody>
-      </p:sp>
-      <p:sp>
-        <p:nvSpPr>
-          <p:cNvPr id="7" name="Text 5"/>
-          <p:cNvSpPr/>
-          <p:nvPr/>
-        </p:nvSpPr>
-        <p:spPr>
-          <a:xfrm>
-            <a:off x="6995160" y="6510528"/>
-            <a:ext cx="4572000" cy="201168"/>
-          </a:xfrm>
-          <a:prstGeom prst="rect">
-            <a:avLst/>
-          </a:prstGeom>
-          <a:noFill/>
-          <a:ln/>
-        </p:spPr>
-        <p:txBody>
-          <a:bodyPr wrap="square" lIns="0" tIns="0" rIns="0" bIns="0" rtlCol="0" anchor="ctr"/>
-          <a:lstStyle/>
-          <a:p>
-            <a:pPr marL="0" indent="0" algn="r">
-              <a:buNone/>
-            </a:pPr>
-            <a:r>
-              <a:rPr lang="en-US" sz="850" dirty="0">
-                <a:solidFill>
-                  <a:srgbClr val="6B7280"/>
-                </a:solidFill>
-                <a:latin typeface="Aptos" pitchFamily="34" charset="0"/>
-                <a:ea typeface="Aptos" pitchFamily="34" charset="-122"/>
-                <a:cs typeface="Aptos" pitchFamily="34" charset="-120"/>
-              </a:rPr>
-              <a:t>İleri Bilgisayarlı Görme ve Derin Öğrenme</a:t>
-            </a:r>
-            <a:endParaRPr lang="en-US" sz="850" dirty="0"/>
-          </a:p>
-        </p:txBody>
-      </p:sp>
-      <p:sp>
-        <p:nvSpPr>
-          <p:cNvPr id="8" name="Text 6"/>
-          <p:cNvSpPr/>
-          <p:nvPr/>
-        </p:nvSpPr>
-        <p:spPr>
-          <a:xfrm>
-            <a:off x="749808" y="1600200"/>
-            <a:ext cx="10378440" cy="3200400"/>
-          </a:xfrm>
-          <a:prstGeom prst="rect">
-            <a:avLst/>
-          </a:prstGeom>
-          <a:noFill/>
-          <a:ln/>
-        </p:spPr>
-        <p:txBody>
-          <a:bodyPr wrap="square" lIns="254" tIns="254" rIns="254" bIns="254" rtlCol="0" anchor="ctr">
-            <a:normAutofit/>
-          </a:bodyPr>
-          <a:lstStyle/>
-          <a:p>
-            <a:r>
-              <a:rPr lang="en-US" sz="1550" dirty="0">
-                <a:solidFill>
-                  <a:srgbClr val="111827"/>
-                </a:solidFill>
-                <a:latin typeface="Aptos" pitchFamily="34" charset="0"/>
-                <a:ea typeface="Aptos" pitchFamily="34" charset="-122"/>
-                <a:cs typeface="Aptos" pitchFamily="34" charset="-120"/>
-              </a:rPr>
-              <a:t>Elde edilen bulguların genel yorumu.</a:t>
-            </a:r>
-            <a:endParaRPr lang="en-US" sz="1550" dirty="0"/>
-          </a:p>
-          <a:p>
-            <a:r>
-              <a:rPr lang="en-US" sz="1550" dirty="0">
-                <a:solidFill>
-                  <a:srgbClr val="111827"/>
-                </a:solidFill>
-                <a:latin typeface="Aptos" pitchFamily="34" charset="0"/>
-                <a:ea typeface="Aptos" pitchFamily="34" charset="-122"/>
-                <a:cs typeface="Aptos" pitchFamily="34" charset="-120"/>
-              </a:rPr>
-              <a:t>Çalışmanın güçlü yönü: ne iyi yapıldı, ne gösterildi?</a:t>
-            </a:r>
-            <a:endParaRPr lang="en-US" sz="1550" dirty="0"/>
-          </a:p>
-          <a:p>
-            <a:r>
-              <a:rPr lang="en-US" sz="1550" dirty="0">
-                <a:solidFill>
-                  <a:srgbClr val="111827"/>
-                </a:solidFill>
-                <a:latin typeface="Aptos" pitchFamily="34" charset="0"/>
-                <a:ea typeface="Aptos" pitchFamily="34" charset="-122"/>
-                <a:cs typeface="Aptos" pitchFamily="34" charset="-120"/>
-              </a:rPr>
-              <a:t>Sınırlılıklar: veri, model, compute, metrik, tek seed, split farkı vb.</a:t>
-            </a:r>
-            <a:endParaRPr lang="en-US" sz="1550" dirty="0"/>
-          </a:p>
-          <a:p>
-            <a:r>
-              <a:rPr lang="en-US" sz="1550" dirty="0">
-                <a:solidFill>
-                  <a:srgbClr val="111827"/>
-                </a:solidFill>
-                <a:latin typeface="Aptos" pitchFamily="34" charset="0"/>
-                <a:ea typeface="Aptos" pitchFamily="34" charset="-122"/>
-                <a:cs typeface="Aptos" pitchFamily="34" charset="-120"/>
-              </a:rPr>
-              <a:t>Bu sınırlılıklar sonuçların yorumunu nasıl etkiliyor?</a:t>
-            </a:r>
-            <a:endParaRPr lang="en-US" sz="1550" dirty="0"/>
-          </a:p>
-        </p:txBody>
-      </p:sp>
-      <p:sp>
-        <p:nvSpPr>
-          <p:cNvPr id="9" name="Shape 7"/>
-          <p:cNvSpPr/>
-          <p:nvPr/>
-        </p:nvSpPr>
-        <p:spPr>
-          <a:xfrm>
-            <a:off x="749808" y="5074920"/>
-            <a:ext cx="10378440" cy="713232"/>
-          </a:xfrm>
-          <a:prstGeom prst="rect">
-            <a:avLst/>
-          </a:prstGeom>
-          <a:solidFill>
-            <a:srgbClr val="EEF2F7"/>
-          </a:solidFill>
-          <a:ln w="12700">
-            <a:solidFill>
-              <a:srgbClr val="CBD5E1">
-                <a:alpha val="80000"/>
-              </a:srgbClr>
-            </a:solidFill>
-            <a:prstDash val="solid"/>
-          </a:ln>
-        </p:spPr>
-        <p:txBody>
-          <a:bodyPr/>
-          <a:lstStyle/>
-          <a:p>
-            <a:endParaRPr lang="tr-TR"/>
-          </a:p>
-        </p:txBody>
-      </p:sp>
-      <p:sp>
-        <p:nvSpPr>
-          <p:cNvPr id="10" name="Text 8"/>
-          <p:cNvSpPr/>
-          <p:nvPr/>
-        </p:nvSpPr>
-        <p:spPr>
-          <a:xfrm>
-            <a:off x="987552" y="5248656"/>
-            <a:ext cx="9921240" cy="347472"/>
-          </a:xfrm>
-          <a:prstGeom prst="rect">
-            <a:avLst/>
-          </a:prstGeom>
-          <a:noFill/>
-          <a:ln/>
-        </p:spPr>
-        <p:txBody>
-          <a:bodyPr wrap="square" lIns="127" tIns="127" rIns="127" bIns="127" rtlCol="0" anchor="ctr">
-            <a:normAutofit/>
-          </a:bodyPr>
-          <a:lstStyle/>
-          <a:p>
-            <a:pPr marL="0" indent="0">
-              <a:buNone/>
-            </a:pPr>
-            <a:r>
-              <a:rPr lang="en-US" sz="1200" i="1" dirty="0">
-                <a:solidFill>
-                  <a:srgbClr val="1E2A5A"/>
-                </a:solidFill>
-                <a:latin typeface="Aptos" pitchFamily="34" charset="0"/>
-                <a:ea typeface="Aptos" pitchFamily="34" charset="-122"/>
-                <a:cs typeface="Aptos" pitchFamily="34" charset="-120"/>
-              </a:rPr>
-              <a:t>Sınırlılık yazmak çalışmayı zayıflatmaz; aksine akademik olgunluk gösterir.</a:t>
             </a:r>
             <a:endParaRPr lang="en-US" sz="1200" dirty="0"/>
           </a:p>
